--- a/examples/pptx/supabase-intro.pptx
+++ b/examples/pptx/supabase-intro.pptx
@@ -520,7 +520,7 @@
           <a:lstStyle/>
           <a:p>
             <a:r>
-              <a:t>This is an entry-level tour of Supabase: what it is, what its pieces do, and how a real project uses it.</a:t>
+              <a:t>This is an entry-level tour of Supabase: what it is, how we set up a database in it with Claude, and how to keep that database safe.</a:t>
             </a:r>
           </a:p>
         </p:txBody>
@@ -590,7 +590,7 @@
           <a:lstStyle/>
           <a:p>
             <a:r>
-              <a:t>Storage is for files rather than rows: profile photos, uploaded PDFs, and anything too big to sit in a table — protected by the same kind of access rules as your data.</a:t>
+              <a:t>Supabase's own guide offers two ways to make a table: click through the Table Editor, or write it in SQL, which is the tab open here. We will write SQL.</a:t>
             </a:r>
           </a:p>
         </p:txBody>
@@ -660,7 +660,7 @@
           <a:lstStyle/>
           <a:p>
             <a:r>
-              <a:t>An API is the way your web page talks to the database over the internet, asking for rows or sending new ones.</a:t>
+              <a:t>Clicks leave no record, but SQL is written down, so you can run it again on a fresh project. It can be saved in git as a migration, Claude can write it for you to review, and it can use every Postgres type, not just the ones the Table Editor offers.</a:t>
             </a:r>
           </a:p>
         </p:txBody>
@@ -730,7 +730,7 @@
           <a:lstStyle/>
           <a:p>
             <a:r>
-              <a:t>Without a service like this you would build and run a server yourself. With Supabase you set up a project and the server side is handled for you.</a:t>
+              <a:t>Here is a first table in SQL: a numbered id, the note itself, and the time it was made. The last two lines switch on row level security, which we come to in a moment.</a:t>
             </a:r>
           </a:p>
         </p:txBody>
@@ -800,7 +800,7 @@
           <a:lstStyle/>
           <a:p>
             <a:r>
-              <a:t>This is Supabase's own documentation, and the red box is its warning: a table without row level security can be read and written by anyone who can reach it. Turning it on is the one setting you must not skip.</a:t>
+              <a:t>Supabase publishes an MCP server that connects Claude Code to your project, so Claude can write and run that SQL for you. Supabase's own advice is to keep manual approval on and review each step before it runs.</a:t>
             </a:r>
           </a:p>
         </p:txBody>
@@ -870,7 +870,7 @@
           <a:lstStyle/>
           <a:p>
             <a:r>
-              <a:t>Three settings make it concrete. With security off, a visitor gets every row. Switched on with no policy, they get nothing. Switched on with an owner policy, each person sees only their own rows.</a:t>
+              <a:t>This is Supabase's own documentation, and the red box is its warning: a table without row level security can be read and written by anyone who can reach it. That is why our first table switched it on.</a:t>
             </a:r>
           </a:p>
         </p:txBody>
@@ -940,7 +940,7 @@
           <a:lstStyle/>
           <a:p>
             <a:r>
-              <a:t>Starting costs nothing. The free plan on the pricing page includes a five hundred megabyte database and up to fifty thousand monthly active users, which is far more than a class project needs.</a:t>
+              <a:t>Three settings make it concrete. With security off, a visitor gets every row. Switched on with no policy, they get nothing. Switched on with an owner policy, each person sees only their own rows.</a:t>
             </a:r>
           </a:p>
         </p:txBody>
@@ -1010,7 +1010,7 @@
           <a:lstStyle/>
           <a:p>
             <a:r>
-              <a:t>A real example: the ninth_circuit project keeps its court opinions in Supabase — thousands of them, fetched daily — along with a yes-or-no for whether each concerns asylum and the case details pulled out of it.</a:t>
+              <a:t>Starting costs nothing. The free plan includes a five hundred megabyte database and up to fifty thousand monthly active users, which is far more than a class project needs.</a:t>
             </a:r>
           </a:p>
         </p:txBody>
@@ -1080,7 +1080,7 @@
           <a:lstStyle/>
           <a:p>
             <a:r>
-              <a:t>To try it: make an account on the free plan, create a project, which gives you a database straight away, then make one table and add a row by hand.</a:t>
+              <a:t>A real example: the ninth_circuit project keeps its court opinions in Supabase — thousands of them, fetched daily — along with a yes-or-no for whether each concerns asylum and the case details pulled out of it.</a:t>
             </a:r>
           </a:p>
         </p:txBody>
@@ -1150,7 +1150,7 @@
           <a:lstStyle/>
           <a:p>
             <a:r>
-              <a:t>Every screenshot in this deck was captured on the twenty-first of October 2026 from the pages listed here, and each slide's Source link opens the exact page.</a:t>
+              <a:t>Every screenshot was captured on the twenty-first of October 2026 from the pages listed here, and each slide's Source link opens the exact page.</a:t>
             </a:r>
           </a:p>
         </p:txBody>
@@ -1220,7 +1220,7 @@
           <a:lstStyle/>
           <a:p>
             <a:r>
-              <a:t>So, for your own project: what should it remember? That answer is your first table.</a:t>
+              <a:t>Your first session takes three steps. Connect Claude Code to Supabase with a single claude mcp add command, describe the table you need in plain words so Claude writes the SQL, then read that SQL before you approve it — and check that row level security is switched on.</a:t>
             </a:r>
           </a:p>
         </p:txBody>
@@ -1710,7 +1710,7 @@
           <a:lstStyle/>
           <a:p>
             <a:r>
-              <a:t>Almost everything an app does with a table is one of four things: add a row, find rows, change a row, or delete one.</a:t>
+              <a:t>Sign-in comes built in. Email and password, or signing in with Google, GitHub and others, without you writing any login code yourself.</a:t>
             </a:r>
           </a:p>
         </p:txBody>
@@ -1780,7 +1780,7 @@
           <a:lstStyle/>
           <a:p>
             <a:r>
-              <a:t>Sign-in comes built in. Email and password, or signing in with Google, GitHub and others, without you writing any login code yourself.</a:t>
+              <a:t>SQL is the language a database speaks. You use it to build tables and to ask questions of the data inside them.</a:t>
             </a:r>
           </a:p>
         </p:txBody>
@@ -4197,6 +4197,43 @@
         <p:spPr>
           <a:xfrm>
             <a:off x="6233160" y="1499616"/>
+            <a:ext cx="5958840" cy="609600"/>
+          </a:xfrm>
+          <a:prstGeom prst="rect">
+            <a:avLst/>
+          </a:prstGeom>
+          <a:noFill/>
+        </p:spPr>
+        <p:txBody>
+          <a:bodyPr wrap="none" lIns="0" rIns="0">
+            <a:noAutofit/>
+          </a:bodyPr>
+          <a:lstStyle/>
+          <a:p>
+            <a:pPr algn="l"/>
+            <a:r>
+              <a:rPr sz="3400" b="0" i="0">
+                <a:solidFill>
+                  <a:srgbClr val="0A2240"/>
+                </a:solidFill>
+                <a:latin typeface="Arial"/>
+              </a:rPr>
+              <a:t>Built with customers.</a:t>
+            </a:r>
+          </a:p>
+        </p:txBody>
+      </p:sp>
+      <p:sp>
+        <p:nvSpPr>
+          <p:cNvPr id="7" name="TextBox 6"/>
+          <p:cNvSpPr/>
+          <p:nvPr>
+            <p:ph type="body" idx="2"/>
+          </p:nvPr>
+        </p:nvSpPr>
+        <p:spPr>
+          <a:xfrm>
+            <a:off x="6233160" y="2383536"/>
             <a:ext cx="5501640" cy="1127760"/>
           </a:xfrm>
           <a:prstGeom prst="rect">
@@ -4218,44 +4255,7 @@
                 </a:solidFill>
                 <a:latin typeface="Arial"/>
               </a:rPr>
-              <a:t>Built with customers, not just for them.</a:t>
-            </a:r>
-          </a:p>
-        </p:txBody>
-      </p:sp>
-      <p:sp>
-        <p:nvSpPr>
-          <p:cNvPr id="7" name="TextBox 6"/>
-          <p:cNvSpPr/>
-          <p:nvPr>
-            <p:ph type="body" idx="2"/>
-          </p:nvPr>
-        </p:nvSpPr>
-        <p:spPr>
-          <a:xfrm>
-            <a:off x="6233160" y="2901696"/>
-            <a:ext cx="5501640" cy="1127760"/>
-          </a:xfrm>
-          <a:prstGeom prst="rect">
-            <a:avLst/>
-          </a:prstGeom>
-          <a:noFill/>
-        </p:spPr>
-        <p:txBody>
-          <a:bodyPr wrap="square" lIns="0" rIns="0">
-            <a:noAutofit/>
-          </a:bodyPr>
-          <a:lstStyle/>
-          <a:p>
-            <a:pPr algn="l"/>
-            <a:r>
-              <a:rPr sz="3400" b="0" i="0">
-                <a:solidFill>
-                  <a:srgbClr val="0A2240"/>
-                </a:solidFill>
-                <a:latin typeface="Arial"/>
-              </a:rPr>
-              <a:t>60% faster rollout; 50% fewer tickets.</a:t>
+              <a:t>60% faster; 50% fewer tickets</a:t>
             </a:r>
           </a:p>
         </p:txBody>
@@ -4274,405 +4274,6 @@
 </file>
 
 <file path=ppt/slideLayouts/slideLayout18.xml><?xml version="1.0" encoding="utf-8"?>
-<p:sldLayout xmlns:a="http://schemas.openxmlformats.org/drawingml/2006/main" xmlns:r="http://schemas.openxmlformats.org/officeDocument/2006/relationships" xmlns:p="http://schemas.openxmlformats.org/presentationml/2006/main" type="blank" preserve="1">
-  <p:cSld name="slidekit · Card Grid">
-    <p:bg>
-      <p:bgPr>
-        <a:solidFill>
-          <a:srgbClr val="FFFFFF"/>
-        </a:solidFill>
-        <a:effectLst/>
-      </p:bgPr>
-    </p:bg>
-    <p:spTree>
-      <p:nvGrpSpPr>
-        <p:cNvPr id="1" name=""/>
-        <p:cNvGrpSpPr/>
-        <p:nvPr/>
-      </p:nvGrpSpPr>
-      <p:grpSpPr>
-        <a:xfrm>
-          <a:off x="0" y="0"/>
-          <a:ext cx="0" cy="0"/>
-          <a:chOff x="0" y="0"/>
-          <a:chExt cx="0" cy="0"/>
-        </a:xfrm>
-      </p:grpSpPr>
-      <p:sp>
-        <p:nvSpPr>
-          <p:cNvPr id="4" name="Slide Number Placeholder 3"/>
-          <p:cNvSpPr>
-            <a:spLocks noGrp="1"/>
-          </p:cNvSpPr>
-          <p:nvPr>
-            <p:ph type="sldNum" sz="quarter" idx="12"/>
-          </p:nvPr>
-        </p:nvSpPr>
-        <p:spPr>
-          <a:xfrm>
-            <a:off x="11186160" y="6035040"/>
-            <a:ext cx="548640" cy="365760"/>
-          </a:xfrm>
-        </p:spPr>
-        <p:txBody>
-          <a:bodyPr/>
-          <a:lstStyle/>
-          <a:p>
-            <a:fld id="{C1FF6DA9-008F-8B48-92A6-B652298478BF}" type="slidenum">
-              <a:rPr lang="en-US" smtClean="0"/>
-              <a:t>‹#›</a:t>
-            </a:fld>
-            <a:endParaRPr lang="en-US"/>
-          </a:p>
-        </p:txBody>
-      </p:sp>
-      <p:sp>
-        <p:nvSpPr>
-          <p:cNvPr id="5" name="TextBox 4"/>
-          <p:cNvSpPr/>
-          <p:nvPr>
-            <p:ph type="title"/>
-          </p:nvPr>
-        </p:nvSpPr>
-        <p:spPr>
-          <a:xfrm>
-            <a:off x="457200" y="457200"/>
-            <a:ext cx="11277600" cy="768096"/>
-          </a:xfrm>
-          <a:prstGeom prst="rect">
-            <a:avLst/>
-          </a:prstGeom>
-          <a:noFill/>
-        </p:spPr>
-        <p:txBody>
-          <a:bodyPr wrap="none" lIns="0" rIns="0">
-            <a:noAutofit/>
-          </a:bodyPr>
-          <a:lstStyle/>
-          <a:p>
-            <a:pPr algn="l"/>
-            <a:r>
-              <a:rPr sz="4200" b="1" i="0">
-                <a:solidFill>
-                  <a:srgbClr val="0072CE"/>
-                </a:solidFill>
-                <a:latin typeface="Arial"/>
-              </a:rPr>
-              <a:t>What We Offer</a:t>
-            </a:r>
-          </a:p>
-        </p:txBody>
-      </p:sp>
-      <p:sp>
-        <p:nvSpPr>
-          <p:cNvPr id="6" name="TextBox 5"/>
-          <p:cNvSpPr/>
-          <p:nvPr>
-            <p:ph type="body" idx="1"/>
-          </p:nvPr>
-        </p:nvSpPr>
-        <p:spPr>
-          <a:xfrm>
-            <a:off x="457200" y="1499616"/>
-            <a:ext cx="2831366" cy="518159"/>
-          </a:xfrm>
-          <a:prstGeom prst="rect">
-            <a:avLst/>
-          </a:prstGeom>
-          <a:noFill/>
-        </p:spPr>
-        <p:txBody>
-          <a:bodyPr wrap="none" lIns="0" rIns="0">
-            <a:noAutofit/>
-          </a:bodyPr>
-          <a:lstStyle/>
-          <a:p>
-            <a:pPr algn="l"/>
-            <a:r>
-              <a:rPr sz="3400" b="1" i="0">
-                <a:solidFill>
-                  <a:srgbClr val="0A2240"/>
-                </a:solidFill>
-                <a:latin typeface="Arial"/>
-              </a:rPr>
-              <a:t>Insights</a:t>
-            </a:r>
-          </a:p>
-        </p:txBody>
-      </p:sp>
-      <p:sp>
-        <p:nvSpPr>
-          <p:cNvPr id="7" name="TextBox 6"/>
-          <p:cNvSpPr/>
-          <p:nvPr>
-            <p:ph type="body" idx="2"/>
-          </p:nvPr>
-        </p:nvSpPr>
-        <p:spPr>
-          <a:xfrm>
-            <a:off x="457200" y="2154935"/>
-            <a:ext cx="2613660" cy="3605785"/>
-          </a:xfrm>
-          <a:prstGeom prst="rect">
-            <a:avLst/>
-          </a:prstGeom>
-          <a:noFill/>
-        </p:spPr>
-        <p:txBody>
-          <a:bodyPr wrap="square" lIns="0" rIns="0">
-            <a:noAutofit/>
-          </a:bodyPr>
-          <a:lstStyle/>
-          <a:p>
-            <a:pPr algn="l"/>
-            <a:r>
-              <a:rPr sz="3400" b="0" i="0">
-                <a:solidFill>
-                  <a:srgbClr val="0A2240"/>
-                </a:solidFill>
-                <a:latin typeface="Arial"/>
-              </a:rPr>
-              <a:t>Live data and AI analytics.</a:t>
-            </a:r>
-          </a:p>
-        </p:txBody>
-      </p:sp>
-      <p:sp>
-        <p:nvSpPr>
-          <p:cNvPr id="8" name="TextBox 7"/>
-          <p:cNvSpPr/>
-          <p:nvPr>
-            <p:ph type="body" idx="3"/>
-          </p:nvPr>
-        </p:nvSpPr>
-        <p:spPr>
-          <a:xfrm>
-            <a:off x="3345180" y="1499616"/>
-            <a:ext cx="2909292" cy="518159"/>
-          </a:xfrm>
-          <a:prstGeom prst="rect">
-            <a:avLst/>
-          </a:prstGeom>
-          <a:noFill/>
-        </p:spPr>
-        <p:txBody>
-          <a:bodyPr wrap="none" lIns="0" rIns="0">
-            <a:noAutofit/>
-          </a:bodyPr>
-          <a:lstStyle/>
-          <a:p>
-            <a:pPr algn="l"/>
-            <a:r>
-              <a:rPr sz="3400" b="1" i="0">
-                <a:solidFill>
-                  <a:srgbClr val="0A2240"/>
-                </a:solidFill>
-                <a:latin typeface="Arial"/>
-              </a:rPr>
-              <a:t>Security</a:t>
-            </a:r>
-          </a:p>
-        </p:txBody>
-      </p:sp>
-      <p:sp>
-        <p:nvSpPr>
-          <p:cNvPr id="9" name="TextBox 8"/>
-          <p:cNvSpPr/>
-          <p:nvPr>
-            <p:ph type="body" idx="4"/>
-          </p:nvPr>
-        </p:nvSpPr>
-        <p:spPr>
-          <a:xfrm>
-            <a:off x="3345180" y="2154935"/>
-            <a:ext cx="2613660" cy="3605785"/>
-          </a:xfrm>
-          <a:prstGeom prst="rect">
-            <a:avLst/>
-          </a:prstGeom>
-          <a:noFill/>
-        </p:spPr>
-        <p:txBody>
-          <a:bodyPr wrap="square" lIns="0" rIns="0">
-            <a:noAutofit/>
-          </a:bodyPr>
-          <a:lstStyle/>
-          <a:p>
-            <a:pPr algn="l"/>
-            <a:r>
-              <a:rPr sz="3400" b="0" i="0">
-                <a:solidFill>
-                  <a:srgbClr val="0A2240"/>
-                </a:solidFill>
-                <a:latin typeface="Arial"/>
-              </a:rPr>
-              <a:t>Zero-trust, SOC 2 ready.</a:t>
-            </a:r>
-          </a:p>
-        </p:txBody>
-      </p:sp>
-      <p:sp>
-        <p:nvSpPr>
-          <p:cNvPr id="10" name="TextBox 9"/>
-          <p:cNvSpPr/>
-          <p:nvPr>
-            <p:ph type="body" idx="5"/>
-          </p:nvPr>
-        </p:nvSpPr>
-        <p:spPr>
-          <a:xfrm>
-            <a:off x="6233160" y="1499616"/>
-            <a:ext cx="2613660" cy="518159"/>
-          </a:xfrm>
-          <a:prstGeom prst="rect">
-            <a:avLst/>
-          </a:prstGeom>
-          <a:noFill/>
-        </p:spPr>
-        <p:txBody>
-          <a:bodyPr wrap="none" lIns="0" rIns="0">
-            <a:noAutofit/>
-          </a:bodyPr>
-          <a:lstStyle/>
-          <a:p>
-            <a:pPr algn="l"/>
-            <a:r>
-              <a:rPr sz="3400" b="1" i="0">
-                <a:solidFill>
-                  <a:srgbClr val="0A2240"/>
-                </a:solidFill>
-                <a:latin typeface="Arial"/>
-              </a:rPr>
-              <a:t>Speed</a:t>
-            </a:r>
-          </a:p>
-        </p:txBody>
-      </p:sp>
-      <p:sp>
-        <p:nvSpPr>
-          <p:cNvPr id="11" name="TextBox 10"/>
-          <p:cNvSpPr/>
-          <p:nvPr>
-            <p:ph type="body" idx="6"/>
-          </p:nvPr>
-        </p:nvSpPr>
-        <p:spPr>
-          <a:xfrm>
-            <a:off x="6233160" y="2154935"/>
-            <a:ext cx="2613660" cy="3605785"/>
-          </a:xfrm>
-          <a:prstGeom prst="rect">
-            <a:avLst/>
-          </a:prstGeom>
-          <a:noFill/>
-        </p:spPr>
-        <p:txBody>
-          <a:bodyPr wrap="square" lIns="0" rIns="0">
-            <a:noAutofit/>
-          </a:bodyPr>
-          <a:lstStyle/>
-          <a:p>
-            <a:pPr algn="l"/>
-            <a:r>
-              <a:rPr sz="3400" b="0" i="0">
-                <a:solidFill>
-                  <a:srgbClr val="0A2240"/>
-                </a:solidFill>
-                <a:latin typeface="Arial"/>
-              </a:rPr>
-              <a:t>Sub-100ms p99 latency.</a:t>
-            </a:r>
-          </a:p>
-        </p:txBody>
-      </p:sp>
-      <p:sp>
-        <p:nvSpPr>
-          <p:cNvPr id="12" name="TextBox 11"/>
-          <p:cNvSpPr/>
-          <p:nvPr>
-            <p:ph type="body" idx="7"/>
-          </p:nvPr>
-        </p:nvSpPr>
-        <p:spPr>
-          <a:xfrm>
-            <a:off x="9121140" y="1499616"/>
-            <a:ext cx="2613660" cy="518159"/>
-          </a:xfrm>
-          <a:prstGeom prst="rect">
-            <a:avLst/>
-          </a:prstGeom>
-          <a:noFill/>
-        </p:spPr>
-        <p:txBody>
-          <a:bodyPr wrap="none" lIns="0" rIns="0">
-            <a:noAutofit/>
-          </a:bodyPr>
-          <a:lstStyle/>
-          <a:p>
-            <a:pPr algn="l"/>
-            <a:r>
-              <a:rPr sz="3400" b="1" i="0">
-                <a:solidFill>
-                  <a:srgbClr val="0A2240"/>
-                </a:solidFill>
-                <a:latin typeface="Arial"/>
-              </a:rPr>
-              <a:t>APIs</a:t>
-            </a:r>
-          </a:p>
-        </p:txBody>
-      </p:sp>
-      <p:sp>
-        <p:nvSpPr>
-          <p:cNvPr id="13" name="TextBox 12"/>
-          <p:cNvSpPr/>
-          <p:nvPr>
-            <p:ph type="body" idx="8"/>
-          </p:nvPr>
-        </p:nvSpPr>
-        <p:spPr>
-          <a:xfrm>
-            <a:off x="9121140" y="2154935"/>
-            <a:ext cx="2613660" cy="3605785"/>
-          </a:xfrm>
-          <a:prstGeom prst="rect">
-            <a:avLst/>
-          </a:prstGeom>
-          <a:noFill/>
-        </p:spPr>
-        <p:txBody>
-          <a:bodyPr wrap="square" lIns="0" rIns="0">
-            <a:noAutofit/>
-          </a:bodyPr>
-          <a:lstStyle/>
-          <a:p>
-            <a:pPr algn="l"/>
-            <a:r>
-              <a:rPr sz="3400" b="0" i="0">
-                <a:solidFill>
-                  <a:srgbClr val="0A2240"/>
-                </a:solidFill>
-                <a:latin typeface="Arial"/>
-              </a:rPr>
-              <a:t>300+ open connectors.</a:t>
-            </a:r>
-          </a:p>
-        </p:txBody>
-      </p:sp>
-    </p:spTree>
-    <p:extLst>
-      <p:ext uri="{BB962C8B-B14F-4D97-AF65-F5344CB8AC3E}">
-        <p14:creationId xmlns:p14="http://schemas.microsoft.com/office/powerpoint/2010/main" val="1212999818"/>
-      </p:ext>
-    </p:extLst>
-  </p:cSld>
-  <p:clrMapOvr>
-    <a:masterClrMapping/>
-  </p:clrMapOvr>
-</p:sldLayout>
-</file>
-
-<file path=ppt/slideLayouts/slideLayout19.xml><?xml version="1.0" encoding="utf-8"?>
 <p:sldLayout xmlns:a="http://schemas.openxmlformats.org/drawingml/2006/main" xmlns:r="http://schemas.openxmlformats.org/officeDocument/2006/relationships" xmlns:p="http://schemas.openxmlformats.org/presentationml/2006/main" type="blank" preserve="1">
   <p:cSld name="slidekit · Section Divider">
     <p:bg>
@@ -4827,6 +4428,511 @@
                 <a:latin typeface="Arial"/>
               </a:rPr>
               <a:t>Where We Stand Today</a:t>
+            </a:r>
+          </a:p>
+        </p:txBody>
+      </p:sp>
+    </p:spTree>
+    <p:extLst>
+      <p:ext uri="{BB962C8B-B14F-4D97-AF65-F5344CB8AC3E}">
+        <p14:creationId xmlns:p14="http://schemas.microsoft.com/office/powerpoint/2010/main" val="1212999818"/>
+      </p:ext>
+    </p:extLst>
+  </p:cSld>
+  <p:clrMapOvr>
+    <a:masterClrMapping/>
+  </p:clrMapOvr>
+</p:sldLayout>
+</file>
+
+<file path=ppt/slideLayouts/slideLayout19.xml><?xml version="1.0" encoding="utf-8"?>
+<p:sldLayout xmlns:a="http://schemas.openxmlformats.org/drawingml/2006/main" xmlns:r="http://schemas.openxmlformats.org/officeDocument/2006/relationships" xmlns:p="http://schemas.openxmlformats.org/presentationml/2006/main" type="blank" preserve="1">
+  <p:cSld name="slidekit · Agenda">
+    <p:bg>
+      <p:bgPr>
+        <a:solidFill>
+          <a:srgbClr val="FFFFFF"/>
+        </a:solidFill>
+        <a:effectLst/>
+      </p:bgPr>
+    </p:bg>
+    <p:spTree>
+      <p:nvGrpSpPr>
+        <p:cNvPr id="1" name=""/>
+        <p:cNvGrpSpPr/>
+        <p:nvPr/>
+      </p:nvGrpSpPr>
+      <p:grpSpPr>
+        <a:xfrm>
+          <a:off x="0" y="0"/>
+          <a:ext cx="0" cy="0"/>
+          <a:chOff x="0" y="0"/>
+          <a:chExt cx="0" cy="0"/>
+        </a:xfrm>
+      </p:grpSpPr>
+      <p:sp>
+        <p:nvSpPr>
+          <p:cNvPr id="4" name="Slide Number Placeholder 3"/>
+          <p:cNvSpPr>
+            <a:spLocks noGrp="1"/>
+          </p:cNvSpPr>
+          <p:nvPr>
+            <p:ph type="sldNum" sz="quarter" idx="12"/>
+          </p:nvPr>
+        </p:nvSpPr>
+        <p:spPr>
+          <a:xfrm>
+            <a:off x="11186160" y="6035040"/>
+            <a:ext cx="548640" cy="365760"/>
+          </a:xfrm>
+        </p:spPr>
+        <p:txBody>
+          <a:bodyPr/>
+          <a:lstStyle/>
+          <a:p>
+            <a:fld id="{C1FF6DA9-008F-8B48-92A6-B652298478BF}" type="slidenum">
+              <a:rPr lang="en-US" smtClean="0"/>
+              <a:t>‹#›</a:t>
+            </a:fld>
+            <a:endParaRPr lang="en-US"/>
+          </a:p>
+        </p:txBody>
+      </p:sp>
+      <p:sp>
+        <p:nvSpPr>
+          <p:cNvPr id="5" name="TextBox 4"/>
+          <p:cNvSpPr/>
+          <p:nvPr>
+            <p:ph type="title"/>
+          </p:nvPr>
+        </p:nvSpPr>
+        <p:spPr>
+          <a:xfrm>
+            <a:off x="457200" y="457200"/>
+            <a:ext cx="11277600" cy="768096"/>
+          </a:xfrm>
+          <a:prstGeom prst="rect">
+            <a:avLst/>
+          </a:prstGeom>
+          <a:noFill/>
+        </p:spPr>
+        <p:txBody>
+          <a:bodyPr wrap="none" lIns="0" rIns="0">
+            <a:noAutofit/>
+          </a:bodyPr>
+          <a:lstStyle/>
+          <a:p>
+            <a:pPr algn="l"/>
+            <a:r>
+              <a:rPr sz="4200" b="1" i="0">
+                <a:solidFill>
+                  <a:srgbClr val="0072CE"/>
+                </a:solidFill>
+                <a:latin typeface="Arial"/>
+              </a:rPr>
+              <a:t>What We Will Cover</a:t>
+            </a:r>
+          </a:p>
+        </p:txBody>
+      </p:sp>
+      <p:sp>
+        <p:nvSpPr>
+          <p:cNvPr id="6" name="Rectangle 5"/>
+          <p:cNvSpPr/>
+          <p:nvPr>
+            <p:ph type="body" idx="1"/>
+          </p:nvPr>
+        </p:nvSpPr>
+        <p:spPr>
+          <a:xfrm>
+            <a:off x="457200" y="1280160"/>
+            <a:ext cx="11277600" cy="64008"/>
+          </a:xfrm>
+          <a:prstGeom prst="rect">
+            <a:avLst/>
+          </a:prstGeom>
+          <a:solidFill>
+            <a:srgbClr val="0072CE"/>
+          </a:solidFill>
+          <a:ln>
+            <a:noFill/>
+          </a:ln>
+          <a:effectLst/>
+        </p:spPr>
+        <p:txBody>
+          <a:bodyPr rtlCol="0" anchor="ctr"/>
+          <a:lstStyle/>
+          <a:p>
+            <a:pPr algn="ctr"/>
+          </a:p>
+        </p:txBody>
+      </p:sp>
+      <p:sp>
+        <p:nvSpPr>
+          <p:cNvPr id="7" name="TextBox 6"/>
+          <p:cNvSpPr/>
+          <p:nvPr>
+            <p:ph type="body" idx="2"/>
+          </p:nvPr>
+        </p:nvSpPr>
+        <p:spPr>
+          <a:xfrm>
+            <a:off x="457200" y="1618488"/>
+            <a:ext cx="951348" cy="518159"/>
+          </a:xfrm>
+          <a:prstGeom prst="rect">
+            <a:avLst/>
+          </a:prstGeom>
+          <a:noFill/>
+        </p:spPr>
+        <p:txBody>
+          <a:bodyPr wrap="none" lIns="0" rIns="0">
+            <a:noAutofit/>
+          </a:bodyPr>
+          <a:lstStyle/>
+          <a:p>
+            <a:pPr algn="l"/>
+            <a:r>
+              <a:rPr sz="3400" b="1" i="0">
+                <a:solidFill>
+                  <a:srgbClr val="0072CE"/>
+                </a:solidFill>
+                <a:latin typeface="Arial"/>
+              </a:rPr>
+              <a:t>01</a:t>
+            </a:r>
+          </a:p>
+        </p:txBody>
+      </p:sp>
+      <p:sp>
+        <p:nvSpPr>
+          <p:cNvPr id="8" name="TextBox 7"/>
+          <p:cNvSpPr/>
+          <p:nvPr>
+            <p:ph type="body" idx="3"/>
+          </p:nvPr>
+        </p:nvSpPr>
+        <p:spPr>
+          <a:xfrm>
+            <a:off x="1371600" y="1618488"/>
+            <a:ext cx="10363200" cy="518159"/>
+          </a:xfrm>
+          <a:prstGeom prst="rect">
+            <a:avLst/>
+          </a:prstGeom>
+          <a:noFill/>
+        </p:spPr>
+        <p:txBody>
+          <a:bodyPr wrap="none" lIns="0" rIns="0">
+            <a:noAutofit/>
+          </a:bodyPr>
+          <a:lstStyle/>
+          <a:p>
+            <a:pPr algn="l"/>
+            <a:r>
+              <a:rPr sz="3400" b="0" i="0">
+                <a:solidFill>
+                  <a:srgbClr val="0A2240"/>
+                </a:solidFill>
+                <a:latin typeface="Arial"/>
+              </a:rPr>
+              <a:t>Performance against targets</a:t>
+            </a:r>
+          </a:p>
+        </p:txBody>
+      </p:sp>
+      <p:sp>
+        <p:nvSpPr>
+          <p:cNvPr id="9" name="TextBox 8"/>
+          <p:cNvSpPr/>
+          <p:nvPr>
+            <p:ph type="body" idx="4"/>
+          </p:nvPr>
+        </p:nvSpPr>
+        <p:spPr>
+          <a:xfrm>
+            <a:off x="457200" y="2501798"/>
+            <a:ext cx="951348" cy="518159"/>
+          </a:xfrm>
+          <a:prstGeom prst="rect">
+            <a:avLst/>
+          </a:prstGeom>
+          <a:noFill/>
+        </p:spPr>
+        <p:txBody>
+          <a:bodyPr wrap="none" lIns="0" rIns="0">
+            <a:noAutofit/>
+          </a:bodyPr>
+          <a:lstStyle/>
+          <a:p>
+            <a:pPr algn="l"/>
+            <a:r>
+              <a:rPr sz="3400" b="1" i="0">
+                <a:solidFill>
+                  <a:srgbClr val="0072CE"/>
+                </a:solidFill>
+                <a:latin typeface="Arial"/>
+              </a:rPr>
+              <a:t>02</a:t>
+            </a:r>
+          </a:p>
+        </p:txBody>
+      </p:sp>
+      <p:sp>
+        <p:nvSpPr>
+          <p:cNvPr id="10" name="TextBox 9"/>
+          <p:cNvSpPr/>
+          <p:nvPr>
+            <p:ph type="body" idx="5"/>
+          </p:nvPr>
+        </p:nvSpPr>
+        <p:spPr>
+          <a:xfrm>
+            <a:off x="1371600" y="2501798"/>
+            <a:ext cx="10363200" cy="518159"/>
+          </a:xfrm>
+          <a:prstGeom prst="rect">
+            <a:avLst/>
+          </a:prstGeom>
+          <a:noFill/>
+        </p:spPr>
+        <p:txBody>
+          <a:bodyPr wrap="none" lIns="0" rIns="0">
+            <a:noAutofit/>
+          </a:bodyPr>
+          <a:lstStyle/>
+          <a:p>
+            <a:pPr algn="l"/>
+            <a:r>
+              <a:rPr sz="3400" b="0" i="0">
+                <a:solidFill>
+                  <a:srgbClr val="0A2240"/>
+                </a:solidFill>
+                <a:latin typeface="Arial"/>
+              </a:rPr>
+              <a:t>Customer and market signals</a:t>
+            </a:r>
+          </a:p>
+        </p:txBody>
+      </p:sp>
+      <p:sp>
+        <p:nvSpPr>
+          <p:cNvPr id="11" name="TextBox 10"/>
+          <p:cNvSpPr/>
+          <p:nvPr>
+            <p:ph type="body" idx="6"/>
+          </p:nvPr>
+        </p:nvSpPr>
+        <p:spPr>
+          <a:xfrm>
+            <a:off x="457200" y="3385108"/>
+            <a:ext cx="951348" cy="518159"/>
+          </a:xfrm>
+          <a:prstGeom prst="rect">
+            <a:avLst/>
+          </a:prstGeom>
+          <a:noFill/>
+        </p:spPr>
+        <p:txBody>
+          <a:bodyPr wrap="none" lIns="0" rIns="0">
+            <a:noAutofit/>
+          </a:bodyPr>
+          <a:lstStyle/>
+          <a:p>
+            <a:pPr algn="l"/>
+            <a:r>
+              <a:rPr sz="3400" b="1" i="0">
+                <a:solidFill>
+                  <a:srgbClr val="0072CE"/>
+                </a:solidFill>
+                <a:latin typeface="Arial"/>
+              </a:rPr>
+              <a:t>03</a:t>
+            </a:r>
+          </a:p>
+        </p:txBody>
+      </p:sp>
+      <p:sp>
+        <p:nvSpPr>
+          <p:cNvPr id="12" name="TextBox 11"/>
+          <p:cNvSpPr/>
+          <p:nvPr>
+            <p:ph type="body" idx="7"/>
+          </p:nvPr>
+        </p:nvSpPr>
+        <p:spPr>
+          <a:xfrm>
+            <a:off x="1371600" y="3385108"/>
+            <a:ext cx="10363200" cy="518159"/>
+          </a:xfrm>
+          <a:prstGeom prst="rect">
+            <a:avLst/>
+          </a:prstGeom>
+          <a:noFill/>
+        </p:spPr>
+        <p:txBody>
+          <a:bodyPr wrap="none" lIns="0" rIns="0">
+            <a:noAutofit/>
+          </a:bodyPr>
+          <a:lstStyle/>
+          <a:p>
+            <a:pPr algn="l"/>
+            <a:r>
+              <a:rPr sz="3400" b="0" i="0">
+                <a:solidFill>
+                  <a:srgbClr val="0A2240"/>
+                </a:solidFill>
+                <a:latin typeface="Arial"/>
+              </a:rPr>
+              <a:t>Operational health and risks</a:t>
+            </a:r>
+          </a:p>
+        </p:txBody>
+      </p:sp>
+      <p:sp>
+        <p:nvSpPr>
+          <p:cNvPr id="13" name="TextBox 12"/>
+          <p:cNvSpPr/>
+          <p:nvPr>
+            <p:ph type="body" idx="8"/>
+          </p:nvPr>
+        </p:nvSpPr>
+        <p:spPr>
+          <a:xfrm>
+            <a:off x="457200" y="4268418"/>
+            <a:ext cx="951348" cy="518159"/>
+          </a:xfrm>
+          <a:prstGeom prst="rect">
+            <a:avLst/>
+          </a:prstGeom>
+          <a:noFill/>
+        </p:spPr>
+        <p:txBody>
+          <a:bodyPr wrap="none" lIns="0" rIns="0">
+            <a:noAutofit/>
+          </a:bodyPr>
+          <a:lstStyle/>
+          <a:p>
+            <a:pPr algn="l"/>
+            <a:r>
+              <a:rPr sz="3400" b="1" i="0">
+                <a:solidFill>
+                  <a:srgbClr val="0072CE"/>
+                </a:solidFill>
+                <a:latin typeface="Arial"/>
+              </a:rPr>
+              <a:t>04</a:t>
+            </a:r>
+          </a:p>
+        </p:txBody>
+      </p:sp>
+      <p:sp>
+        <p:nvSpPr>
+          <p:cNvPr id="14" name="TextBox 13"/>
+          <p:cNvSpPr/>
+          <p:nvPr>
+            <p:ph type="body" idx="9"/>
+          </p:nvPr>
+        </p:nvSpPr>
+        <p:spPr>
+          <a:xfrm>
+            <a:off x="1371600" y="4268418"/>
+            <a:ext cx="10363200" cy="518159"/>
+          </a:xfrm>
+          <a:prstGeom prst="rect">
+            <a:avLst/>
+          </a:prstGeom>
+          <a:noFill/>
+        </p:spPr>
+        <p:txBody>
+          <a:bodyPr wrap="none" lIns="0" rIns="0">
+            <a:noAutofit/>
+          </a:bodyPr>
+          <a:lstStyle/>
+          <a:p>
+            <a:pPr algn="l"/>
+            <a:r>
+              <a:rPr sz="3400" b="0" i="0">
+                <a:solidFill>
+                  <a:srgbClr val="0A2240"/>
+                </a:solidFill>
+                <a:latin typeface="Arial"/>
+              </a:rPr>
+              <a:t>Roadmap for next quarter</a:t>
+            </a:r>
+          </a:p>
+        </p:txBody>
+      </p:sp>
+      <p:sp>
+        <p:nvSpPr>
+          <p:cNvPr id="15" name="TextBox 14"/>
+          <p:cNvSpPr/>
+          <p:nvPr>
+            <p:ph type="body" idx="13"/>
+          </p:nvPr>
+        </p:nvSpPr>
+        <p:spPr>
+          <a:xfrm>
+            <a:off x="457200" y="5151728"/>
+            <a:ext cx="951348" cy="518159"/>
+          </a:xfrm>
+          <a:prstGeom prst="rect">
+            <a:avLst/>
+          </a:prstGeom>
+          <a:noFill/>
+        </p:spPr>
+        <p:txBody>
+          <a:bodyPr wrap="none" lIns="0" rIns="0">
+            <a:noAutofit/>
+          </a:bodyPr>
+          <a:lstStyle/>
+          <a:p>
+            <a:pPr algn="l"/>
+            <a:r>
+              <a:rPr sz="3400" b="1" i="0">
+                <a:solidFill>
+                  <a:srgbClr val="0072CE"/>
+                </a:solidFill>
+                <a:latin typeface="Arial"/>
+              </a:rPr>
+              <a:t>05</a:t>
+            </a:r>
+          </a:p>
+        </p:txBody>
+      </p:sp>
+      <p:sp>
+        <p:nvSpPr>
+          <p:cNvPr id="16" name="TextBox 15"/>
+          <p:cNvSpPr/>
+          <p:nvPr>
+            <p:ph type="body" idx="14"/>
+          </p:nvPr>
+        </p:nvSpPr>
+        <p:spPr>
+          <a:xfrm>
+            <a:off x="1371600" y="5151728"/>
+            <a:ext cx="10363200" cy="518159"/>
+          </a:xfrm>
+          <a:prstGeom prst="rect">
+            <a:avLst/>
+          </a:prstGeom>
+          <a:noFill/>
+        </p:spPr>
+        <p:txBody>
+          <a:bodyPr wrap="none" lIns="0" rIns="0">
+            <a:noAutofit/>
+          </a:bodyPr>
+          <a:lstStyle/>
+          <a:p>
+            <a:pPr algn="l"/>
+            <a:r>
+              <a:rPr sz="3400" b="0" i="0">
+                <a:solidFill>
+                  <a:srgbClr val="0A2240"/>
+                </a:solidFill>
+                <a:latin typeface="Arial"/>
+              </a:rPr>
+              <a:t>Decisions we need today</a:t>
             </a:r>
           </a:p>
         </p:txBody>
@@ -5016,511 +5122,6 @@
 
 <file path=ppt/slideLayouts/slideLayout20.xml><?xml version="1.0" encoding="utf-8"?>
 <p:sldLayout xmlns:a="http://schemas.openxmlformats.org/drawingml/2006/main" xmlns:r="http://schemas.openxmlformats.org/officeDocument/2006/relationships" xmlns:p="http://schemas.openxmlformats.org/presentationml/2006/main" type="blank" preserve="1">
-  <p:cSld name="slidekit · Agenda">
-    <p:bg>
-      <p:bgPr>
-        <a:solidFill>
-          <a:srgbClr val="FFFFFF"/>
-        </a:solidFill>
-        <a:effectLst/>
-      </p:bgPr>
-    </p:bg>
-    <p:spTree>
-      <p:nvGrpSpPr>
-        <p:cNvPr id="1" name=""/>
-        <p:cNvGrpSpPr/>
-        <p:nvPr/>
-      </p:nvGrpSpPr>
-      <p:grpSpPr>
-        <a:xfrm>
-          <a:off x="0" y="0"/>
-          <a:ext cx="0" cy="0"/>
-          <a:chOff x="0" y="0"/>
-          <a:chExt cx="0" cy="0"/>
-        </a:xfrm>
-      </p:grpSpPr>
-      <p:sp>
-        <p:nvSpPr>
-          <p:cNvPr id="4" name="Slide Number Placeholder 3"/>
-          <p:cNvSpPr>
-            <a:spLocks noGrp="1"/>
-          </p:cNvSpPr>
-          <p:nvPr>
-            <p:ph type="sldNum" sz="quarter" idx="12"/>
-          </p:nvPr>
-        </p:nvSpPr>
-        <p:spPr>
-          <a:xfrm>
-            <a:off x="11186160" y="6035040"/>
-            <a:ext cx="548640" cy="365760"/>
-          </a:xfrm>
-        </p:spPr>
-        <p:txBody>
-          <a:bodyPr/>
-          <a:lstStyle/>
-          <a:p>
-            <a:fld id="{C1FF6DA9-008F-8B48-92A6-B652298478BF}" type="slidenum">
-              <a:rPr lang="en-US" smtClean="0"/>
-              <a:t>‹#›</a:t>
-            </a:fld>
-            <a:endParaRPr lang="en-US"/>
-          </a:p>
-        </p:txBody>
-      </p:sp>
-      <p:sp>
-        <p:nvSpPr>
-          <p:cNvPr id="5" name="TextBox 4"/>
-          <p:cNvSpPr/>
-          <p:nvPr>
-            <p:ph type="title"/>
-          </p:nvPr>
-        </p:nvSpPr>
-        <p:spPr>
-          <a:xfrm>
-            <a:off x="457200" y="457200"/>
-            <a:ext cx="11277600" cy="768096"/>
-          </a:xfrm>
-          <a:prstGeom prst="rect">
-            <a:avLst/>
-          </a:prstGeom>
-          <a:noFill/>
-        </p:spPr>
-        <p:txBody>
-          <a:bodyPr wrap="none" lIns="0" rIns="0">
-            <a:noAutofit/>
-          </a:bodyPr>
-          <a:lstStyle/>
-          <a:p>
-            <a:pPr algn="l"/>
-            <a:r>
-              <a:rPr sz="4200" b="1" i="0">
-                <a:solidFill>
-                  <a:srgbClr val="0072CE"/>
-                </a:solidFill>
-                <a:latin typeface="Arial"/>
-              </a:rPr>
-              <a:t>What We Will Cover</a:t>
-            </a:r>
-          </a:p>
-        </p:txBody>
-      </p:sp>
-      <p:sp>
-        <p:nvSpPr>
-          <p:cNvPr id="6" name="Rectangle 5"/>
-          <p:cNvSpPr/>
-          <p:nvPr>
-            <p:ph type="body" idx="1"/>
-          </p:nvPr>
-        </p:nvSpPr>
-        <p:spPr>
-          <a:xfrm>
-            <a:off x="457200" y="1280160"/>
-            <a:ext cx="11277600" cy="64008"/>
-          </a:xfrm>
-          <a:prstGeom prst="rect">
-            <a:avLst/>
-          </a:prstGeom>
-          <a:solidFill>
-            <a:srgbClr val="0072CE"/>
-          </a:solidFill>
-          <a:ln>
-            <a:noFill/>
-          </a:ln>
-          <a:effectLst/>
-        </p:spPr>
-        <p:txBody>
-          <a:bodyPr rtlCol="0" anchor="ctr"/>
-          <a:lstStyle/>
-          <a:p>
-            <a:pPr algn="ctr"/>
-          </a:p>
-        </p:txBody>
-      </p:sp>
-      <p:sp>
-        <p:nvSpPr>
-          <p:cNvPr id="7" name="TextBox 6"/>
-          <p:cNvSpPr/>
-          <p:nvPr>
-            <p:ph type="body" idx="2"/>
-          </p:nvPr>
-        </p:nvSpPr>
-        <p:spPr>
-          <a:xfrm>
-            <a:off x="457200" y="1618488"/>
-            <a:ext cx="951348" cy="518159"/>
-          </a:xfrm>
-          <a:prstGeom prst="rect">
-            <a:avLst/>
-          </a:prstGeom>
-          <a:noFill/>
-        </p:spPr>
-        <p:txBody>
-          <a:bodyPr wrap="none" lIns="0" rIns="0">
-            <a:noAutofit/>
-          </a:bodyPr>
-          <a:lstStyle/>
-          <a:p>
-            <a:pPr algn="l"/>
-            <a:r>
-              <a:rPr sz="3400" b="1" i="0">
-                <a:solidFill>
-                  <a:srgbClr val="0072CE"/>
-                </a:solidFill>
-                <a:latin typeface="Arial"/>
-              </a:rPr>
-              <a:t>01</a:t>
-            </a:r>
-          </a:p>
-        </p:txBody>
-      </p:sp>
-      <p:sp>
-        <p:nvSpPr>
-          <p:cNvPr id="8" name="TextBox 7"/>
-          <p:cNvSpPr/>
-          <p:nvPr>
-            <p:ph type="body" idx="3"/>
-          </p:nvPr>
-        </p:nvSpPr>
-        <p:spPr>
-          <a:xfrm>
-            <a:off x="1371600" y="1618488"/>
-            <a:ext cx="10363200" cy="518159"/>
-          </a:xfrm>
-          <a:prstGeom prst="rect">
-            <a:avLst/>
-          </a:prstGeom>
-          <a:noFill/>
-        </p:spPr>
-        <p:txBody>
-          <a:bodyPr wrap="none" lIns="0" rIns="0">
-            <a:noAutofit/>
-          </a:bodyPr>
-          <a:lstStyle/>
-          <a:p>
-            <a:pPr algn="l"/>
-            <a:r>
-              <a:rPr sz="3400" b="0" i="0">
-                <a:solidFill>
-                  <a:srgbClr val="0A2240"/>
-                </a:solidFill>
-                <a:latin typeface="Arial"/>
-              </a:rPr>
-              <a:t>Performance against targets</a:t>
-            </a:r>
-          </a:p>
-        </p:txBody>
-      </p:sp>
-      <p:sp>
-        <p:nvSpPr>
-          <p:cNvPr id="9" name="TextBox 8"/>
-          <p:cNvSpPr/>
-          <p:nvPr>
-            <p:ph type="body" idx="4"/>
-          </p:nvPr>
-        </p:nvSpPr>
-        <p:spPr>
-          <a:xfrm>
-            <a:off x="457200" y="2501798"/>
-            <a:ext cx="951348" cy="518159"/>
-          </a:xfrm>
-          <a:prstGeom prst="rect">
-            <a:avLst/>
-          </a:prstGeom>
-          <a:noFill/>
-        </p:spPr>
-        <p:txBody>
-          <a:bodyPr wrap="none" lIns="0" rIns="0">
-            <a:noAutofit/>
-          </a:bodyPr>
-          <a:lstStyle/>
-          <a:p>
-            <a:pPr algn="l"/>
-            <a:r>
-              <a:rPr sz="3400" b="1" i="0">
-                <a:solidFill>
-                  <a:srgbClr val="0072CE"/>
-                </a:solidFill>
-                <a:latin typeface="Arial"/>
-              </a:rPr>
-              <a:t>02</a:t>
-            </a:r>
-          </a:p>
-        </p:txBody>
-      </p:sp>
-      <p:sp>
-        <p:nvSpPr>
-          <p:cNvPr id="10" name="TextBox 9"/>
-          <p:cNvSpPr/>
-          <p:nvPr>
-            <p:ph type="body" idx="5"/>
-          </p:nvPr>
-        </p:nvSpPr>
-        <p:spPr>
-          <a:xfrm>
-            <a:off x="1371600" y="2501798"/>
-            <a:ext cx="10363200" cy="518159"/>
-          </a:xfrm>
-          <a:prstGeom prst="rect">
-            <a:avLst/>
-          </a:prstGeom>
-          <a:noFill/>
-        </p:spPr>
-        <p:txBody>
-          <a:bodyPr wrap="none" lIns="0" rIns="0">
-            <a:noAutofit/>
-          </a:bodyPr>
-          <a:lstStyle/>
-          <a:p>
-            <a:pPr algn="l"/>
-            <a:r>
-              <a:rPr sz="3400" b="0" i="0">
-                <a:solidFill>
-                  <a:srgbClr val="0A2240"/>
-                </a:solidFill>
-                <a:latin typeface="Arial"/>
-              </a:rPr>
-              <a:t>Customer and market signals</a:t>
-            </a:r>
-          </a:p>
-        </p:txBody>
-      </p:sp>
-      <p:sp>
-        <p:nvSpPr>
-          <p:cNvPr id="11" name="TextBox 10"/>
-          <p:cNvSpPr/>
-          <p:nvPr>
-            <p:ph type="body" idx="6"/>
-          </p:nvPr>
-        </p:nvSpPr>
-        <p:spPr>
-          <a:xfrm>
-            <a:off x="457200" y="3385108"/>
-            <a:ext cx="951348" cy="518159"/>
-          </a:xfrm>
-          <a:prstGeom prst="rect">
-            <a:avLst/>
-          </a:prstGeom>
-          <a:noFill/>
-        </p:spPr>
-        <p:txBody>
-          <a:bodyPr wrap="none" lIns="0" rIns="0">
-            <a:noAutofit/>
-          </a:bodyPr>
-          <a:lstStyle/>
-          <a:p>
-            <a:pPr algn="l"/>
-            <a:r>
-              <a:rPr sz="3400" b="1" i="0">
-                <a:solidFill>
-                  <a:srgbClr val="0072CE"/>
-                </a:solidFill>
-                <a:latin typeface="Arial"/>
-              </a:rPr>
-              <a:t>03</a:t>
-            </a:r>
-          </a:p>
-        </p:txBody>
-      </p:sp>
-      <p:sp>
-        <p:nvSpPr>
-          <p:cNvPr id="12" name="TextBox 11"/>
-          <p:cNvSpPr/>
-          <p:nvPr>
-            <p:ph type="body" idx="7"/>
-          </p:nvPr>
-        </p:nvSpPr>
-        <p:spPr>
-          <a:xfrm>
-            <a:off x="1371600" y="3385108"/>
-            <a:ext cx="10363200" cy="518159"/>
-          </a:xfrm>
-          <a:prstGeom prst="rect">
-            <a:avLst/>
-          </a:prstGeom>
-          <a:noFill/>
-        </p:spPr>
-        <p:txBody>
-          <a:bodyPr wrap="none" lIns="0" rIns="0">
-            <a:noAutofit/>
-          </a:bodyPr>
-          <a:lstStyle/>
-          <a:p>
-            <a:pPr algn="l"/>
-            <a:r>
-              <a:rPr sz="3400" b="0" i="0">
-                <a:solidFill>
-                  <a:srgbClr val="0A2240"/>
-                </a:solidFill>
-                <a:latin typeface="Arial"/>
-              </a:rPr>
-              <a:t>Operational health and risks</a:t>
-            </a:r>
-          </a:p>
-        </p:txBody>
-      </p:sp>
-      <p:sp>
-        <p:nvSpPr>
-          <p:cNvPr id="13" name="TextBox 12"/>
-          <p:cNvSpPr/>
-          <p:nvPr>
-            <p:ph type="body" idx="8"/>
-          </p:nvPr>
-        </p:nvSpPr>
-        <p:spPr>
-          <a:xfrm>
-            <a:off x="457200" y="4268418"/>
-            <a:ext cx="951348" cy="518159"/>
-          </a:xfrm>
-          <a:prstGeom prst="rect">
-            <a:avLst/>
-          </a:prstGeom>
-          <a:noFill/>
-        </p:spPr>
-        <p:txBody>
-          <a:bodyPr wrap="none" lIns="0" rIns="0">
-            <a:noAutofit/>
-          </a:bodyPr>
-          <a:lstStyle/>
-          <a:p>
-            <a:pPr algn="l"/>
-            <a:r>
-              <a:rPr sz="3400" b="1" i="0">
-                <a:solidFill>
-                  <a:srgbClr val="0072CE"/>
-                </a:solidFill>
-                <a:latin typeface="Arial"/>
-              </a:rPr>
-              <a:t>04</a:t>
-            </a:r>
-          </a:p>
-        </p:txBody>
-      </p:sp>
-      <p:sp>
-        <p:nvSpPr>
-          <p:cNvPr id="14" name="TextBox 13"/>
-          <p:cNvSpPr/>
-          <p:nvPr>
-            <p:ph type="body" idx="9"/>
-          </p:nvPr>
-        </p:nvSpPr>
-        <p:spPr>
-          <a:xfrm>
-            <a:off x="1371600" y="4268418"/>
-            <a:ext cx="10363200" cy="518159"/>
-          </a:xfrm>
-          <a:prstGeom prst="rect">
-            <a:avLst/>
-          </a:prstGeom>
-          <a:noFill/>
-        </p:spPr>
-        <p:txBody>
-          <a:bodyPr wrap="none" lIns="0" rIns="0">
-            <a:noAutofit/>
-          </a:bodyPr>
-          <a:lstStyle/>
-          <a:p>
-            <a:pPr algn="l"/>
-            <a:r>
-              <a:rPr sz="3400" b="0" i="0">
-                <a:solidFill>
-                  <a:srgbClr val="0A2240"/>
-                </a:solidFill>
-                <a:latin typeface="Arial"/>
-              </a:rPr>
-              <a:t>Roadmap for next quarter</a:t>
-            </a:r>
-          </a:p>
-        </p:txBody>
-      </p:sp>
-      <p:sp>
-        <p:nvSpPr>
-          <p:cNvPr id="15" name="TextBox 14"/>
-          <p:cNvSpPr/>
-          <p:nvPr>
-            <p:ph type="body" idx="13"/>
-          </p:nvPr>
-        </p:nvSpPr>
-        <p:spPr>
-          <a:xfrm>
-            <a:off x="457200" y="5151728"/>
-            <a:ext cx="951348" cy="518159"/>
-          </a:xfrm>
-          <a:prstGeom prst="rect">
-            <a:avLst/>
-          </a:prstGeom>
-          <a:noFill/>
-        </p:spPr>
-        <p:txBody>
-          <a:bodyPr wrap="none" lIns="0" rIns="0">
-            <a:noAutofit/>
-          </a:bodyPr>
-          <a:lstStyle/>
-          <a:p>
-            <a:pPr algn="l"/>
-            <a:r>
-              <a:rPr sz="3400" b="1" i="0">
-                <a:solidFill>
-                  <a:srgbClr val="0072CE"/>
-                </a:solidFill>
-                <a:latin typeface="Arial"/>
-              </a:rPr>
-              <a:t>05</a:t>
-            </a:r>
-          </a:p>
-        </p:txBody>
-      </p:sp>
-      <p:sp>
-        <p:nvSpPr>
-          <p:cNvPr id="16" name="TextBox 15"/>
-          <p:cNvSpPr/>
-          <p:nvPr>
-            <p:ph type="body" idx="14"/>
-          </p:nvPr>
-        </p:nvSpPr>
-        <p:spPr>
-          <a:xfrm>
-            <a:off x="1371600" y="5151728"/>
-            <a:ext cx="10363200" cy="518159"/>
-          </a:xfrm>
-          <a:prstGeom prst="rect">
-            <a:avLst/>
-          </a:prstGeom>
-          <a:noFill/>
-        </p:spPr>
-        <p:txBody>
-          <a:bodyPr wrap="none" lIns="0" rIns="0">
-            <a:noAutofit/>
-          </a:bodyPr>
-          <a:lstStyle/>
-          <a:p>
-            <a:pPr algn="l"/>
-            <a:r>
-              <a:rPr sz="3400" b="0" i="0">
-                <a:solidFill>
-                  <a:srgbClr val="0A2240"/>
-                </a:solidFill>
-                <a:latin typeface="Arial"/>
-              </a:rPr>
-              <a:t>Decisions we need today</a:t>
-            </a:r>
-          </a:p>
-        </p:txBody>
-      </p:sp>
-    </p:spTree>
-    <p:extLst>
-      <p:ext uri="{BB962C8B-B14F-4D97-AF65-F5344CB8AC3E}">
-        <p14:creationId xmlns:p14="http://schemas.microsoft.com/office/powerpoint/2010/main" val="1212999818"/>
-      </p:ext>
-    </p:extLst>
-  </p:cSld>
-  <p:clrMapOvr>
-    <a:masterClrMapping/>
-  </p:clrMapOvr>
-</p:sldLayout>
-</file>
-
-<file path=ppt/slideLayouts/slideLayout21.xml><?xml version="1.0" encoding="utf-8"?>
-<p:sldLayout xmlns:a="http://schemas.openxmlformats.org/drawingml/2006/main" xmlns:r="http://schemas.openxmlformats.org/officeDocument/2006/relationships" xmlns:p="http://schemas.openxmlformats.org/presentationml/2006/main" type="blank" preserve="1">
   <p:cSld name="slidekit · Big Number">
     <p:bg>
       <p:bgPr>
@@ -5691,7 +5292,7 @@
 </p:sldLayout>
 </file>
 
-<file path=ppt/slideLayouts/slideLayout22.xml><?xml version="1.0" encoding="utf-8"?>
+<file path=ppt/slideLayouts/slideLayout21.xml><?xml version="1.0" encoding="utf-8"?>
 <p:sldLayout xmlns:a="http://schemas.openxmlformats.org/drawingml/2006/main" xmlns:r="http://schemas.openxmlformats.org/officeDocument/2006/relationships" xmlns:p="http://schemas.openxmlformats.org/presentationml/2006/main" type="blank" preserve="1">
   <p:cSld name="slidekit · Pull Quote">
     <p:bg>
@@ -5754,8 +5355,8 @@
         </p:nvSpPr>
         <p:spPr>
           <a:xfrm>
-            <a:off x="457200" y="2301240"/>
-            <a:ext cx="128016" cy="2255520"/>
+            <a:off x="457200" y="2621280"/>
+            <a:ext cx="128016" cy="1615440"/>
           </a:xfrm>
           <a:prstGeom prst="rect">
             <a:avLst/>
@@ -5786,16 +5387,16 @@
         </p:nvSpPr>
         <p:spPr>
           <a:xfrm>
-            <a:off x="996696" y="2301240"/>
-            <a:ext cx="10738104" cy="1371600"/>
-          </a:xfrm>
-          <a:prstGeom prst="rect">
-            <a:avLst/>
-          </a:prstGeom>
-          <a:noFill/>
-        </p:spPr>
-        <p:txBody>
-          <a:bodyPr wrap="square" lIns="0" rIns="0">
+            <a:off x="996696" y="2621280"/>
+            <a:ext cx="11195304" cy="731520"/>
+          </a:xfrm>
+          <a:prstGeom prst="rect">
+            <a:avLst/>
+          </a:prstGeom>
+          <a:noFill/>
+        </p:spPr>
+        <p:txBody>
+          <a:bodyPr wrap="none" lIns="0" rIns="0">
             <a:noAutofit/>
           </a:bodyPr>
           <a:lstStyle/>
@@ -5808,7 +5409,7 @@
                 </a:solidFill>
                 <a:latin typeface="Arial"/>
               </a:rPr>
-              <a:t>"We stopped buying tools and started buying outcomes."</a:t>
+              <a:t>"We buy outcomes, not tools."</a:t>
             </a:r>
           </a:p>
         </p:txBody>
@@ -5823,7 +5424,7 @@
         </p:nvSpPr>
         <p:spPr>
           <a:xfrm>
-            <a:off x="996696" y="3947160"/>
+            <a:off x="996696" y="3627120"/>
             <a:ext cx="11195304" cy="609600"/>
           </a:xfrm>
           <a:prstGeom prst="rect">
@@ -5841,7 +5442,7 @@
             <a:r>
               <a:rPr sz="3400" b="0" i="0">
                 <a:solidFill>
-                  <a:srgbClr val="5B6B82"/>
+                  <a:srgbClr val="0A2240"/>
                 </a:solidFill>
                 <a:latin typeface="Arial"/>
               </a:rPr>
@@ -5863,7 +5464,7 @@
 </p:sldLayout>
 </file>
 
-<file path=ppt/slideLayouts/slideLayout23.xml><?xml version="1.0" encoding="utf-8"?>
+<file path=ppt/slideLayouts/slideLayout22.xml><?xml version="1.0" encoding="utf-8"?>
 <p:sldLayout xmlns:a="http://schemas.openxmlformats.org/drawingml/2006/main" xmlns:r="http://schemas.openxmlformats.org/officeDocument/2006/relationships" xmlns:p="http://schemas.openxmlformats.org/presentationml/2006/main" type="blank" preserve="1">
   <p:cSld name="slidekit · Definition">
     <p:bg>
@@ -5926,8 +5527,8 @@
         </p:nvSpPr>
         <p:spPr>
           <a:xfrm>
-            <a:off x="457200" y="1965960"/>
-            <a:ext cx="128016" cy="2926080"/>
+            <a:off x="457200" y="2484120"/>
+            <a:ext cx="128016" cy="1889760"/>
           </a:xfrm>
           <a:prstGeom prst="rect">
             <a:avLst/>
@@ -5958,7 +5559,7 @@
         </p:nvSpPr>
         <p:spPr>
           <a:xfrm>
-            <a:off x="996696" y="1965960"/>
+            <a:off x="996696" y="2484120"/>
             <a:ext cx="11195304" cy="1005840"/>
           </a:xfrm>
           <a:prstGeom prst="rect">
@@ -5995,16 +5596,16 @@
         </p:nvSpPr>
         <p:spPr>
           <a:xfrm>
-            <a:off x="996696" y="3246120"/>
-            <a:ext cx="10738104" cy="1645920"/>
-          </a:xfrm>
-          <a:prstGeom prst="rect">
-            <a:avLst/>
-          </a:prstGeom>
-          <a:noFill/>
-        </p:spPr>
-        <p:txBody>
-          <a:bodyPr wrap="square" lIns="0" rIns="0">
+            <a:off x="996696" y="3764280"/>
+            <a:ext cx="11195304" cy="609600"/>
+          </a:xfrm>
+          <a:prstGeom prst="rect">
+            <a:avLst/>
+          </a:prstGeom>
+          <a:noFill/>
+        </p:spPr>
+        <p:txBody>
+          <a:bodyPr wrap="none" lIns="0" rIns="0">
             <a:noAutofit/>
           </a:bodyPr>
           <a:lstStyle/>
@@ -6017,7 +5618,7 @@
                 </a:solidFill>
                 <a:latin typeface="Arial"/>
               </a:rPr>
-              <a:t>The percentage of recurring revenue retained from existing customers over a period, including expansion and after churn.</a:t>
+              <a:t>Revenue kept from existing customers.</a:t>
             </a:r>
           </a:p>
         </p:txBody>
@@ -6035,7 +5636,7 @@
 </p:sldLayout>
 </file>
 
-<file path=ppt/slideLayouts/slideLayout24.xml><?xml version="1.0" encoding="utf-8"?>
+<file path=ppt/slideLayouts/slideLayout23.xml><?xml version="1.0" encoding="utf-8"?>
 <p:sldLayout xmlns:a="http://schemas.openxmlformats.org/drawingml/2006/main" xmlns:r="http://schemas.openxmlformats.org/officeDocument/2006/relationships" xmlns:p="http://schemas.openxmlformats.org/presentationml/2006/main" type="blank" preserve="1">
   <p:cSld name="slidekit · Question">
     <p:bg>
@@ -6098,8 +5699,8 @@
         </p:nvSpPr>
         <p:spPr>
           <a:xfrm>
-            <a:off x="457200" y="2011680"/>
-            <a:ext cx="128016" cy="2834640"/>
+            <a:off x="457200" y="2926080"/>
+            <a:ext cx="128016" cy="1005840"/>
           </a:xfrm>
           <a:prstGeom prst="rect">
             <a:avLst/>
@@ -6130,16 +5731,16 @@
         </p:nvSpPr>
         <p:spPr>
           <a:xfrm>
-            <a:off x="996696" y="2011680"/>
-            <a:ext cx="10738104" cy="2834640"/>
-          </a:xfrm>
-          <a:prstGeom prst="rect">
-            <a:avLst/>
-          </a:prstGeom>
-          <a:noFill/>
-        </p:spPr>
-        <p:txBody>
-          <a:bodyPr wrap="square" lIns="0" rIns="0">
+            <a:off x="996696" y="2926080"/>
+            <a:ext cx="11195304" cy="1005840"/>
+          </a:xfrm>
+          <a:prstGeom prst="rect">
+            <a:avLst/>
+          </a:prstGeom>
+          <a:noFill/>
+        </p:spPr>
+        <p:txBody>
+          <a:bodyPr wrap="none" lIns="0" rIns="0">
             <a:noAutofit/>
           </a:bodyPr>
           <a:lstStyle/>
@@ -6152,7 +5753,7 @@
                 </a:solidFill>
                 <a:latin typeface="Arial"/>
               </a:rPr>
-              <a:t>What would we build if we trusted our customers completely?</a:t>
+              <a:t>What if we trusted users?</a:t>
             </a:r>
           </a:p>
         </p:txBody>
@@ -6170,7 +5771,7 @@
 </p:sldLayout>
 </file>
 
-<file path=ppt/slideLayouts/slideLayout25.xml><?xml version="1.0" encoding="utf-8"?>
+<file path=ppt/slideLayouts/slideLayout24.xml><?xml version="1.0" encoding="utf-8"?>
 <p:sldLayout xmlns:a="http://schemas.openxmlformats.org/drawingml/2006/main" xmlns:r="http://schemas.openxmlformats.org/officeDocument/2006/relationships" xmlns:p="http://schemas.openxmlformats.org/presentationml/2006/main" type="blank" preserve="1">
   <p:cSld name="slidekit · Bullet List">
     <p:bg>
@@ -6384,7 +5985,7 @@
 </p:sldLayout>
 </file>
 
-<file path=ppt/slideLayouts/slideLayout26.xml><?xml version="1.0" encoding="utf-8"?>
+<file path=ppt/slideLayouts/slideLayout25.xml><?xml version="1.0" encoding="utf-8"?>
 <p:sldLayout xmlns:a="http://schemas.openxmlformats.org/drawingml/2006/main" xmlns:r="http://schemas.openxmlformats.org/officeDocument/2006/relationships" xmlns:p="http://schemas.openxmlformats.org/presentationml/2006/main" type="blank" preserve="1">
   <p:cSld name="slidekit · Code Block">
     <p:bg>
@@ -6454,7 +6055,7 @@
             <a:avLst/>
           </a:prstGeom>
           <a:solidFill>
-            <a:srgbClr val="FF5F56"/>
+            <a:srgbClr val="FFFFFF"/>
           </a:solidFill>
           <a:ln>
             <a:noFill/>
@@ -6486,7 +6087,7 @@
             <a:avLst/>
           </a:prstGeom>
           <a:solidFill>
-            <a:srgbClr val="FFBD2E"/>
+            <a:srgbClr val="FFFFFF"/>
           </a:solidFill>
           <a:ln>
             <a:noFill/>
@@ -6518,7 +6119,7 @@
             <a:avLst/>
           </a:prstGeom>
           <a:solidFill>
-            <a:srgbClr val="27C93F"/>
+            <a:srgbClr val="FFFFFF"/>
           </a:solidFill>
           <a:ln>
             <a:noFill/>
@@ -6561,7 +6162,7 @@
             <a:r>
               <a:rPr sz="4200" b="0" i="0">
                 <a:solidFill>
-                  <a:srgbClr val="D4D4D4"/>
+                  <a:srgbClr val="FFFFFF"/>
                 </a:solidFill>
                 <a:latin typeface="Arial"/>
               </a:rPr>
@@ -6598,7 +6199,7 @@
             <a:r>
               <a:rPr sz="3400" b="0" i="0">
                 <a:solidFill>
-                  <a:srgbClr val="6A9955"/>
+                  <a:srgbClr val="FFFFFF"/>
                 </a:solidFill>
                 <a:latin typeface="Arial"/>
               </a:rPr>
@@ -6655,7 +6256,7 @@
         <p:spPr>
           <a:xfrm>
             <a:off x="1057461" y="2356103"/>
-            <a:ext cx="302848" cy="518159"/>
+            <a:ext cx="2524382" cy="518159"/>
           </a:xfrm>
           <a:prstGeom prst="rect">
             <a:avLst/>
@@ -6672,11 +6273,11 @@
             <a:r>
               <a:rPr sz="3400" b="0" i="0">
                 <a:solidFill>
-                  <a:srgbClr val="D4D4D4"/>
-                </a:solidFill>
-                <a:latin typeface="Arial"/>
-              </a:rPr>
-              <a:t> </a:t>
+                  <a:srgbClr val="FFFFFF"/>
+                </a:solidFill>
+                <a:latin typeface="Arial"/>
+              </a:rPr>
+              <a:t> main():</a:t>
             </a:r>
           </a:p>
         </p:txBody>
@@ -6691,8 +6292,8 @@
         </p:nvSpPr>
         <p:spPr>
           <a:xfrm>
-            <a:off x="1177429" y="2356103"/>
-            <a:ext cx="1680348" cy="518159"/>
+            <a:off x="457200" y="2874262"/>
+            <a:ext cx="7046475" cy="518159"/>
           </a:xfrm>
           <a:prstGeom prst="rect">
             <a:avLst/>
@@ -6709,11 +6310,11 @@
             <a:r>
               <a:rPr sz="3400" b="0" i="0">
                 <a:solidFill>
-                  <a:srgbClr val="DCDCAA"/>
-                </a:solidFill>
-                <a:latin typeface="Arial"/>
-              </a:rPr>
-              <a:t>main</a:t>
+                  <a:srgbClr val="FFFFFF"/>
+                </a:solidFill>
+                <a:latin typeface="Arial"/>
+              </a:rPr>
+              <a:t>    print("Hello, world!")</a:t>
             </a:r>
           </a:p>
         </p:txBody>
@@ -6728,8 +6329,8 @@
         </p:nvSpPr>
         <p:spPr>
           <a:xfrm>
-            <a:off x="2113347" y="2356103"/>
-            <a:ext cx="834964" cy="518159"/>
+            <a:off x="457200" y="3910580"/>
+            <a:ext cx="2140486" cy="518159"/>
           </a:xfrm>
           <a:prstGeom prst="rect">
             <a:avLst/>
@@ -6746,11 +6347,11 @@
             <a:r>
               <a:rPr sz="3400" b="0" i="0">
                 <a:solidFill>
-                  <a:srgbClr val="D4D4D4"/>
-                </a:solidFill>
-                <a:latin typeface="Arial"/>
-              </a:rPr>
-              <a:t>():</a:t>
+                  <a:srgbClr val="FFFFFF"/>
+                </a:solidFill>
+                <a:latin typeface="Arial"/>
+              </a:rPr>
+              <a:t>main()</a:t>
             </a:r>
           </a:p>
         </p:txBody>
@@ -6761,265 +6362,6 @@
           <p:cNvSpPr/>
           <p:nvPr>
             <p:ph type="body" idx="13"/>
-          </p:nvPr>
-        </p:nvSpPr>
-        <p:spPr>
-          <a:xfrm>
-            <a:off x="457200" y="2874262"/>
-            <a:ext cx="662751" cy="518159"/>
-          </a:xfrm>
-          <a:prstGeom prst="rect">
-            <a:avLst/>
-          </a:prstGeom>
-          <a:noFill/>
-        </p:spPr>
-        <p:txBody>
-          <a:bodyPr wrap="none" lIns="0" rIns="0">
-            <a:noAutofit/>
-          </a:bodyPr>
-          <a:lstStyle/>
-          <a:p>
-            <a:pPr algn="l"/>
-            <a:r>
-              <a:rPr sz="3400" b="0" i="0">
-                <a:solidFill>
-                  <a:srgbClr val="D4D4D4"/>
-                </a:solidFill>
-                <a:latin typeface="Arial"/>
-              </a:rPr>
-              <a:t>    </a:t>
-            </a:r>
-          </a:p>
-        </p:txBody>
-      </p:sp>
-      <p:sp>
-        <p:nvSpPr>
-          <p:cNvPr id="15" name="TextBox 14"/>
-          <p:cNvSpPr/>
-          <p:nvPr>
-            <p:ph type="body" idx="14"/>
-          </p:nvPr>
-        </p:nvSpPr>
-        <p:spPr>
-          <a:xfrm>
-            <a:off x="937071" y="2874262"/>
-            <a:ext cx="1526857" cy="518159"/>
-          </a:xfrm>
-          <a:prstGeom prst="rect">
-            <a:avLst/>
-          </a:prstGeom>
-          <a:noFill/>
-        </p:spPr>
-        <p:txBody>
-          <a:bodyPr wrap="none" lIns="0" rIns="0">
-            <a:noAutofit/>
-          </a:bodyPr>
-          <a:lstStyle/>
-          <a:p>
-            <a:pPr algn="l"/>
-            <a:r>
-              <a:rPr sz="3400" b="0" i="0">
-                <a:solidFill>
-                  <a:srgbClr val="DCDCAA"/>
-                </a:solidFill>
-                <a:latin typeface="Arial"/>
-              </a:rPr>
-              <a:t>print</a:t>
-            </a:r>
-          </a:p>
-        </p:txBody>
-      </p:sp>
-      <p:sp>
-        <p:nvSpPr>
-          <p:cNvPr id="16" name="TextBox 15"/>
-          <p:cNvSpPr/>
-          <p:nvPr>
-            <p:ph type="body" idx="15"/>
-          </p:nvPr>
-        </p:nvSpPr>
-        <p:spPr>
-          <a:xfrm>
-            <a:off x="1777057" y="2874262"/>
-            <a:ext cx="412948" cy="518159"/>
-          </a:xfrm>
-          <a:prstGeom prst="rect">
-            <a:avLst/>
-          </a:prstGeom>
-          <a:noFill/>
-        </p:spPr>
-        <p:txBody>
-          <a:bodyPr wrap="none" lIns="0" rIns="0">
-            <a:noAutofit/>
-          </a:bodyPr>
-          <a:lstStyle/>
-          <a:p>
-            <a:pPr algn="l"/>
-            <a:r>
-              <a:rPr sz="3400" b="0" i="0">
-                <a:solidFill>
-                  <a:srgbClr val="D4D4D4"/>
-                </a:solidFill>
-                <a:latin typeface="Arial"/>
-              </a:rPr>
-              <a:t>(</a:t>
-            </a:r>
-          </a:p>
-        </p:txBody>
-      </p:sp>
-      <p:sp>
-        <p:nvSpPr>
-          <p:cNvPr id="17" name="TextBox 16"/>
-          <p:cNvSpPr/>
-          <p:nvPr>
-            <p:ph type="body" idx="16"/>
-          </p:nvPr>
-        </p:nvSpPr>
-        <p:spPr>
-          <a:xfrm>
-            <a:off x="1920850" y="2874262"/>
-            <a:ext cx="4474566" cy="518159"/>
-          </a:xfrm>
-          <a:prstGeom prst="rect">
-            <a:avLst/>
-          </a:prstGeom>
-          <a:noFill/>
-        </p:spPr>
-        <p:txBody>
-          <a:bodyPr wrap="none" lIns="0" rIns="0">
-            <a:noAutofit/>
-          </a:bodyPr>
-          <a:lstStyle/>
-          <a:p>
-            <a:pPr algn="l"/>
-            <a:r>
-              <a:rPr sz="3400" b="0" i="0">
-                <a:solidFill>
-                  <a:srgbClr val="CE9178"/>
-                </a:solidFill>
-                <a:latin typeface="Arial"/>
-              </a:rPr>
-              <a:t>"Hello, world!"</a:t>
-            </a:r>
-          </a:p>
-        </p:txBody>
-      </p:sp>
-      <p:sp>
-        <p:nvSpPr>
-          <p:cNvPr id="18" name="TextBox 17"/>
-          <p:cNvSpPr/>
-          <p:nvPr>
-            <p:ph type="body" idx="17"/>
-          </p:nvPr>
-        </p:nvSpPr>
-        <p:spPr>
-          <a:xfrm>
-            <a:off x="4603155" y="2874262"/>
-            <a:ext cx="412948" cy="518159"/>
-          </a:xfrm>
-          <a:prstGeom prst="rect">
-            <a:avLst/>
-          </a:prstGeom>
-          <a:noFill/>
-        </p:spPr>
-        <p:txBody>
-          <a:bodyPr wrap="none" lIns="0" rIns="0">
-            <a:noAutofit/>
-          </a:bodyPr>
-          <a:lstStyle/>
-          <a:p>
-            <a:pPr algn="l"/>
-            <a:r>
-              <a:rPr sz="3400" b="0" i="0">
-                <a:solidFill>
-                  <a:srgbClr val="D4D4D4"/>
-                </a:solidFill>
-                <a:latin typeface="Arial"/>
-              </a:rPr>
-              <a:t>)</a:t>
-            </a:r>
-          </a:p>
-        </p:txBody>
-      </p:sp>
-      <p:sp>
-        <p:nvSpPr>
-          <p:cNvPr id="19" name="TextBox 18"/>
-          <p:cNvSpPr/>
-          <p:nvPr>
-            <p:ph type="body" idx="18"/>
-          </p:nvPr>
-        </p:nvSpPr>
-        <p:spPr>
-          <a:xfrm>
-            <a:off x="457200" y="3910580"/>
-            <a:ext cx="1680348" cy="518159"/>
-          </a:xfrm>
-          <a:prstGeom prst="rect">
-            <a:avLst/>
-          </a:prstGeom>
-          <a:noFill/>
-        </p:spPr>
-        <p:txBody>
-          <a:bodyPr wrap="none" lIns="0" rIns="0">
-            <a:noAutofit/>
-          </a:bodyPr>
-          <a:lstStyle/>
-          <a:p>
-            <a:pPr algn="l"/>
-            <a:r>
-              <a:rPr sz="3400" b="0" i="0">
-                <a:solidFill>
-                  <a:srgbClr val="DCDCAA"/>
-                </a:solidFill>
-                <a:latin typeface="Arial"/>
-              </a:rPr>
-              <a:t>main</a:t>
-            </a:r>
-          </a:p>
-        </p:txBody>
-      </p:sp>
-      <p:sp>
-        <p:nvSpPr>
-          <p:cNvPr id="20" name="TextBox 19"/>
-          <p:cNvSpPr/>
-          <p:nvPr>
-            <p:ph type="body" idx="19"/>
-          </p:nvPr>
-        </p:nvSpPr>
-        <p:spPr>
-          <a:xfrm>
-            <a:off x="1393118" y="3910580"/>
-            <a:ext cx="643017" cy="518159"/>
-          </a:xfrm>
-          <a:prstGeom prst="rect">
-            <a:avLst/>
-          </a:prstGeom>
-          <a:noFill/>
-        </p:spPr>
-        <p:txBody>
-          <a:bodyPr wrap="none" lIns="0" rIns="0">
-            <a:noAutofit/>
-          </a:bodyPr>
-          <a:lstStyle/>
-          <a:p>
-            <a:pPr algn="l"/>
-            <a:r>
-              <a:rPr sz="3400" b="0" i="0">
-                <a:solidFill>
-                  <a:srgbClr val="D4D4D4"/>
-                </a:solidFill>
-                <a:latin typeface="Arial"/>
-              </a:rPr>
-              <a:t>()</a:t>
-            </a:r>
-          </a:p>
-        </p:txBody>
-      </p:sp>
-      <p:sp>
-        <p:nvSpPr>
-          <p:cNvPr id="21" name="TextBox 20"/>
-          <p:cNvSpPr/>
-          <p:nvPr>
-            <p:ph type="body" idx="20"/>
           </p:nvPr>
         </p:nvSpPr>
         <p:spPr>
@@ -7042,7 +6384,7 @@
             <a:r>
               <a:rPr sz="3400" b="0" i="0">
                 <a:solidFill>
-                  <a:srgbClr val="4EC9B0"/>
+                  <a:srgbClr val="569CD6"/>
                 </a:solidFill>
                 <a:latin typeface="Arial"/>
               </a:rPr>
@@ -7053,10 +6395,10 @@
       </p:sp>
       <p:sp>
         <p:nvSpPr>
-          <p:cNvPr id="22" name="TextBox 21"/>
-          <p:cNvSpPr/>
-          <p:nvPr>
-            <p:ph type="body" idx="21"/>
+          <p:cNvPr id="15" name="TextBox 14"/>
+          <p:cNvSpPr/>
+          <p:nvPr>
+            <p:ph type="body" idx="14"/>
           </p:nvPr>
         </p:nvSpPr>
         <p:spPr>
@@ -7079,7 +6421,7 @@
             <a:r>
               <a:rPr sz="3400" b="0" i="0">
                 <a:solidFill>
-                  <a:srgbClr val="D4D4D4"/>
+                  <a:srgbClr val="FFFFFF"/>
                 </a:solidFill>
                 <a:latin typeface="Arial"/>
               </a:rPr>
@@ -7090,10 +6432,10 @@
       </p:sp>
       <p:sp>
         <p:nvSpPr>
-          <p:cNvPr id="23" name="TextBox 22"/>
-          <p:cNvSpPr/>
-          <p:nvPr>
-            <p:ph type="body" idx="22"/>
+          <p:cNvPr id="16" name="TextBox 15"/>
+          <p:cNvSpPr/>
+          <p:nvPr>
+            <p:ph type="body" idx="15"/>
           </p:nvPr>
         </p:nvSpPr>
         <p:spPr>
@@ -7116,7 +6458,7 @@
             <a:r>
               <a:rPr sz="3400" b="0" i="0">
                 <a:solidFill>
-                  <a:srgbClr val="D4D4D4"/>
+                  <a:srgbClr val="FFFFFF"/>
                 </a:solidFill>
                 <a:latin typeface="Arial"/>
               </a:rPr>
@@ -7138,7 +6480,7 @@
 </p:sldLayout>
 </file>
 
-<file path=ppt/slideLayouts/slideLayout27.xml><?xml version="1.0" encoding="utf-8"?>
+<file path=ppt/slideLayouts/slideLayout26.xml><?xml version="1.0" encoding="utf-8"?>
 <p:sldLayout xmlns:a="http://schemas.openxmlformats.org/drawingml/2006/main" xmlns:r="http://schemas.openxmlformats.org/officeDocument/2006/relationships" xmlns:p="http://schemas.openxmlformats.org/presentationml/2006/main" type="blank" preserve="1">
   <p:cSld name="slidekit · File Tree">
     <p:bg>
@@ -7247,7 +6589,7 @@
             </a:avLst>
           </a:prstGeom>
           <a:solidFill>
-            <a:srgbClr val="0C1A1C"/>
+            <a:srgbClr val="0A2240"/>
           </a:solidFill>
           <a:ln>
             <a:noFill/>
@@ -7290,7 +6632,7 @@
             <a:r>
               <a:rPr sz="2600" b="1" i="0">
                 <a:solidFill>
-                  <a:srgbClr val="569CD6"/>
+                  <a:srgbClr val="0072CE"/>
                 </a:solidFill>
                 <a:latin typeface="Courier New"/>
               </a:rPr>
@@ -7327,7 +6669,7 @@
             <a:r>
               <a:rPr sz="2600" b="0" i="0">
                 <a:solidFill>
-                  <a:srgbClr val="55707A"/>
+                  <a:srgbClr val="0072CE"/>
                 </a:solidFill>
                 <a:latin typeface="Courier New"/>
               </a:rPr>
@@ -7364,7 +6706,7 @@
             <a:r>
               <a:rPr sz="2600" b="1" i="0">
                 <a:solidFill>
-                  <a:srgbClr val="569CD6"/>
+                  <a:srgbClr val="0072CE"/>
                 </a:solidFill>
                 <a:latin typeface="Courier New"/>
               </a:rPr>
@@ -7401,7 +6743,7 @@
             <a:r>
               <a:rPr sz="2600" b="0" i="0">
                 <a:solidFill>
-                  <a:srgbClr val="55707A"/>
+                  <a:srgbClr val="0072CE"/>
                 </a:solidFill>
                 <a:latin typeface="Courier New"/>
               </a:rPr>
@@ -7438,7 +6780,7 @@
             <a:r>
               <a:rPr sz="2600" b="1" i="0">
                 <a:solidFill>
-                  <a:srgbClr val="569CD6"/>
+                  <a:srgbClr val="0072CE"/>
                 </a:solidFill>
                 <a:latin typeface="Courier New"/>
               </a:rPr>
@@ -7475,7 +6817,7 @@
             <a:r>
               <a:rPr sz="2600" b="0" i="0">
                 <a:solidFill>
-                  <a:srgbClr val="55707A"/>
+                  <a:srgbClr val="0072CE"/>
                 </a:solidFill>
                 <a:latin typeface="Courier New"/>
               </a:rPr>
@@ -7512,7 +6854,7 @@
             <a:r>
               <a:rPr sz="2600" b="0" i="0">
                 <a:solidFill>
-                  <a:srgbClr val="D4D4D4"/>
+                  <a:srgbClr val="FFFFFF"/>
                 </a:solidFill>
                 <a:latin typeface="Courier New"/>
               </a:rPr>
@@ -7549,7 +6891,7 @@
             <a:r>
               <a:rPr sz="2600" b="0" i="0">
                 <a:solidFill>
-                  <a:srgbClr val="55707A"/>
+                  <a:srgbClr val="0072CE"/>
                 </a:solidFill>
                 <a:latin typeface="Courier New"/>
               </a:rPr>
@@ -7586,7 +6928,7 @@
             <a:r>
               <a:rPr sz="2600" b="0" i="0">
                 <a:solidFill>
-                  <a:srgbClr val="D4D4D4"/>
+                  <a:srgbClr val="FFFFFF"/>
                 </a:solidFill>
                 <a:latin typeface="Courier New"/>
               </a:rPr>
@@ -7623,7 +6965,7 @@
             <a:r>
               <a:rPr sz="2600" b="0" i="0">
                 <a:solidFill>
-                  <a:srgbClr val="55707A"/>
+                  <a:srgbClr val="0072CE"/>
                 </a:solidFill>
                 <a:latin typeface="Courier New"/>
               </a:rPr>
@@ -7660,7 +7002,7 @@
             <a:r>
               <a:rPr sz="2600" b="0" i="0">
                 <a:solidFill>
-                  <a:srgbClr val="D4D4D4"/>
+                  <a:srgbClr val="FFFFFF"/>
                 </a:solidFill>
                 <a:latin typeface="Courier New"/>
               </a:rPr>
@@ -7697,7 +7039,7 @@
             <a:r>
               <a:rPr sz="2600" b="0" i="0">
                 <a:solidFill>
-                  <a:srgbClr val="55707A"/>
+                  <a:srgbClr val="0072CE"/>
                 </a:solidFill>
                 <a:latin typeface="Courier New"/>
               </a:rPr>
@@ -7734,7 +7076,7 @@
             <a:r>
               <a:rPr sz="2600" b="0" i="0">
                 <a:solidFill>
-                  <a:srgbClr val="D4D4D4"/>
+                  <a:srgbClr val="FFFFFF"/>
                 </a:solidFill>
                 <a:latin typeface="Courier New"/>
               </a:rPr>
@@ -7771,7 +7113,7 @@
             <a:r>
               <a:rPr sz="2600" b="0" i="0">
                 <a:solidFill>
-                  <a:srgbClr val="55707A"/>
+                  <a:srgbClr val="0072CE"/>
                 </a:solidFill>
                 <a:latin typeface="Courier New"/>
               </a:rPr>
@@ -7808,7 +7150,7 @@
             <a:r>
               <a:rPr sz="2600" b="0" i="0">
                 <a:solidFill>
-                  <a:srgbClr val="D4D4D4"/>
+                  <a:srgbClr val="FFFFFF"/>
                 </a:solidFill>
                 <a:latin typeface="Courier New"/>
               </a:rPr>
@@ -7830,7 +7172,7 @@
 </p:sldLayout>
 </file>
 
-<file path=ppt/slideLayouts/slideLayout28.xml><?xml version="1.0" encoding="utf-8"?>
+<file path=ppt/slideLayouts/slideLayout27.xml><?xml version="1.0" encoding="utf-8"?>
 <p:sldLayout xmlns:a="http://schemas.openxmlformats.org/drawingml/2006/main" xmlns:r="http://schemas.openxmlformats.org/officeDocument/2006/relationships" xmlns:p="http://schemas.openxmlformats.org/presentationml/2006/main" type="blank" preserve="1">
   <p:cSld name="slidekit · Numbered Steps">
     <p:bg>
@@ -8266,7 +7608,7 @@
 </p:sldLayout>
 </file>
 
-<file path=ppt/slideLayouts/slideLayout29.xml><?xml version="1.0" encoding="utf-8"?>
+<file path=ppt/slideLayouts/slideLayout28.xml><?xml version="1.0" encoding="utf-8"?>
 <p:sldLayout xmlns:a="http://schemas.openxmlformats.org/drawingml/2006/main" xmlns:r="http://schemas.openxmlformats.org/officeDocument/2006/relationships" xmlns:p="http://schemas.openxmlformats.org/presentationml/2006/main" type="blank" preserve="1">
   <p:cSld name="slidekit · Two Panel List">
     <p:bg>
@@ -8403,8 +7745,8 @@
         </p:nvSpPr>
         <p:spPr>
           <a:xfrm>
-            <a:off x="548640" y="2176271"/>
-            <a:ext cx="1650492" cy="54864"/>
+            <a:off x="457200" y="2176271"/>
+            <a:ext cx="1367718" cy="54864"/>
           </a:xfrm>
           <a:prstGeom prst="rect">
             <a:avLst/>
@@ -8453,7 +7795,7 @@
             <a:r>
               <a:rPr sz="3400" b="1" i="0">
                 <a:solidFill>
-                  <a:srgbClr val="5B6B82"/>
+                  <a:srgbClr val="0A2240"/>
                 </a:solidFill>
                 <a:latin typeface="Arial"/>
               </a:rPr>
@@ -8472,14 +7814,14 @@
         </p:nvSpPr>
         <p:spPr>
           <a:xfrm>
-            <a:off x="6324600" y="2176271"/>
-            <a:ext cx="1650492" cy="54864"/>
+            <a:off x="6233160" y="2176271"/>
+            <a:ext cx="1007604" cy="54864"/>
           </a:xfrm>
           <a:prstGeom prst="rect">
             <a:avLst/>
           </a:prstGeom>
           <a:solidFill>
-            <a:srgbClr val="5B6B82"/>
+            <a:srgbClr val="0A2240"/>
           </a:solidFill>
           <a:ln>
             <a:noFill/>
@@ -8712,6 +8054,294 @@
                 <a:latin typeface="Arial"/>
               </a:rPr>
               <a:t>In-product live chat</a:t>
+            </a:r>
+          </a:p>
+        </p:txBody>
+      </p:sp>
+    </p:spTree>
+    <p:extLst>
+      <p:ext uri="{BB962C8B-B14F-4D97-AF65-F5344CB8AC3E}">
+        <p14:creationId xmlns:p14="http://schemas.microsoft.com/office/powerpoint/2010/main" val="1212999818"/>
+      </p:ext>
+    </p:extLst>
+  </p:cSld>
+  <p:clrMapOvr>
+    <a:masterClrMapping/>
+  </p:clrMapOvr>
+</p:sldLayout>
+</file>
+
+<file path=ppt/slideLayouts/slideLayout29.xml><?xml version="1.0" encoding="utf-8"?>
+<p:sldLayout xmlns:a="http://schemas.openxmlformats.org/drawingml/2006/main" xmlns:r="http://schemas.openxmlformats.org/officeDocument/2006/relationships" xmlns:p="http://schemas.openxmlformats.org/presentationml/2006/main" type="blank" preserve="1">
+  <p:cSld name="slidekit · This vs That">
+    <p:bg>
+      <p:bgPr>
+        <a:solidFill>
+          <a:srgbClr val="FFFFFF"/>
+        </a:solidFill>
+        <a:effectLst/>
+      </p:bgPr>
+    </p:bg>
+    <p:spTree>
+      <p:nvGrpSpPr>
+        <p:cNvPr id="1" name=""/>
+        <p:cNvGrpSpPr/>
+        <p:nvPr/>
+      </p:nvGrpSpPr>
+      <p:grpSpPr>
+        <a:xfrm>
+          <a:off x="0" y="0"/>
+          <a:ext cx="0" cy="0"/>
+          <a:chOff x="0" y="0"/>
+          <a:chExt cx="0" cy="0"/>
+        </a:xfrm>
+      </p:grpSpPr>
+      <p:sp>
+        <p:nvSpPr>
+          <p:cNvPr id="4" name="Slide Number Placeholder 3"/>
+          <p:cNvSpPr>
+            <a:spLocks noGrp="1"/>
+          </p:cNvSpPr>
+          <p:nvPr>
+            <p:ph type="sldNum" sz="quarter" idx="12"/>
+          </p:nvPr>
+        </p:nvSpPr>
+        <p:spPr>
+          <a:xfrm>
+            <a:off x="11186160" y="6035040"/>
+            <a:ext cx="548640" cy="365760"/>
+          </a:xfrm>
+        </p:spPr>
+        <p:txBody>
+          <a:bodyPr/>
+          <a:lstStyle/>
+          <a:p>
+            <a:fld id="{C1FF6DA9-008F-8B48-92A6-B652298478BF}" type="slidenum">
+              <a:rPr lang="en-US" smtClean="0"/>
+              <a:t>‹#›</a:t>
+            </a:fld>
+            <a:endParaRPr lang="en-US"/>
+          </a:p>
+        </p:txBody>
+      </p:sp>
+      <p:sp>
+        <p:nvSpPr>
+          <p:cNvPr id="5" name="TextBox 4"/>
+          <p:cNvSpPr/>
+          <p:nvPr>
+            <p:ph type="title"/>
+          </p:nvPr>
+        </p:nvSpPr>
+        <p:spPr>
+          <a:xfrm>
+            <a:off x="457200" y="457200"/>
+            <a:ext cx="11277600" cy="768096"/>
+          </a:xfrm>
+          <a:prstGeom prst="rect">
+            <a:avLst/>
+          </a:prstGeom>
+          <a:noFill/>
+        </p:spPr>
+        <p:txBody>
+          <a:bodyPr wrap="none" lIns="0" rIns="0">
+            <a:noAutofit/>
+          </a:bodyPr>
+          <a:lstStyle/>
+          <a:p>
+            <a:pPr algn="l"/>
+            <a:r>
+              <a:rPr sz="4200" b="1" i="0">
+                <a:solidFill>
+                  <a:srgbClr val="0072CE"/>
+                </a:solidFill>
+                <a:latin typeface="Arial"/>
+              </a:rPr>
+              <a:t>Cloud or On-Prem</a:t>
+            </a:r>
+          </a:p>
+        </p:txBody>
+      </p:sp>
+      <p:sp>
+        <p:nvSpPr>
+          <p:cNvPr id="6" name="TextBox 5"/>
+          <p:cNvSpPr/>
+          <p:nvPr>
+            <p:ph type="body" idx="1"/>
+          </p:nvPr>
+        </p:nvSpPr>
+        <p:spPr>
+          <a:xfrm>
+            <a:off x="457200" y="2776728"/>
+            <a:ext cx="4792980" cy="914400"/>
+          </a:xfrm>
+          <a:prstGeom prst="rect">
+            <a:avLst/>
+          </a:prstGeom>
+          <a:noFill/>
+        </p:spPr>
+        <p:txBody>
+          <a:bodyPr wrap="none" lIns="0" rIns="0">
+            <a:noAutofit/>
+          </a:bodyPr>
+          <a:lstStyle/>
+          <a:p>
+            <a:pPr algn="ctr"/>
+            <a:r>
+              <a:rPr sz="6000" b="1" i="0">
+                <a:solidFill>
+                  <a:srgbClr val="0A2240"/>
+                </a:solidFill>
+                <a:latin typeface="Arial"/>
+              </a:rPr>
+              <a:t>3 wks</a:t>
+            </a:r>
+          </a:p>
+        </p:txBody>
+      </p:sp>
+      <p:sp>
+        <p:nvSpPr>
+          <p:cNvPr id="7" name="TextBox 6"/>
+          <p:cNvSpPr/>
+          <p:nvPr>
+            <p:ph type="body" idx="2"/>
+          </p:nvPr>
+        </p:nvSpPr>
+        <p:spPr>
+          <a:xfrm>
+            <a:off x="0" y="3965448"/>
+            <a:ext cx="5707380" cy="518159"/>
+          </a:xfrm>
+          <a:prstGeom prst="rect">
+            <a:avLst/>
+          </a:prstGeom>
+          <a:noFill/>
+        </p:spPr>
+        <p:txBody>
+          <a:bodyPr wrap="none" lIns="0" rIns="0">
+            <a:noAutofit/>
+          </a:bodyPr>
+          <a:lstStyle/>
+          <a:p>
+            <a:pPr algn="ctr"/>
+            <a:r>
+              <a:rPr sz="3400" b="0" i="0">
+                <a:solidFill>
+                  <a:srgbClr val="0A2240"/>
+                </a:solidFill>
+                <a:latin typeface="Arial"/>
+              </a:rPr>
+              <a:t>Cloud time-to-launch</a:t>
+            </a:r>
+          </a:p>
+        </p:txBody>
+      </p:sp>
+      <p:sp>
+        <p:nvSpPr>
+          <p:cNvPr id="8" name="TextBox 7"/>
+          <p:cNvSpPr/>
+          <p:nvPr>
+            <p:ph type="body" idx="3"/>
+          </p:nvPr>
+        </p:nvSpPr>
+        <p:spPr>
+          <a:xfrm>
+            <a:off x="6941820" y="2776728"/>
+            <a:ext cx="4792980" cy="914400"/>
+          </a:xfrm>
+          <a:prstGeom prst="rect">
+            <a:avLst/>
+          </a:prstGeom>
+          <a:noFill/>
+        </p:spPr>
+        <p:txBody>
+          <a:bodyPr wrap="none" lIns="0" rIns="0">
+            <a:noAutofit/>
+          </a:bodyPr>
+          <a:lstStyle/>
+          <a:p>
+            <a:pPr algn="ctr"/>
+            <a:r>
+              <a:rPr sz="6000" b="1" i="0">
+                <a:solidFill>
+                  <a:srgbClr val="0A2240"/>
+                </a:solidFill>
+                <a:latin typeface="Arial"/>
+              </a:rPr>
+              <a:t>6 mo</a:t>
+            </a:r>
+          </a:p>
+        </p:txBody>
+      </p:sp>
+      <p:sp>
+        <p:nvSpPr>
+          <p:cNvPr id="9" name="TextBox 8"/>
+          <p:cNvSpPr/>
+          <p:nvPr>
+            <p:ph type="body" idx="4"/>
+          </p:nvPr>
+        </p:nvSpPr>
+        <p:spPr>
+          <a:xfrm>
+            <a:off x="6484620" y="3965448"/>
+            <a:ext cx="5707380" cy="518159"/>
+          </a:xfrm>
+          <a:prstGeom prst="rect">
+            <a:avLst/>
+          </a:prstGeom>
+          <a:noFill/>
+        </p:spPr>
+        <p:txBody>
+          <a:bodyPr wrap="none" lIns="0" rIns="0">
+            <a:noAutofit/>
+          </a:bodyPr>
+          <a:lstStyle/>
+          <a:p>
+            <a:pPr algn="ctr"/>
+            <a:r>
+              <a:rPr sz="3400" b="0" i="0">
+                <a:solidFill>
+                  <a:srgbClr val="0A2240"/>
+                </a:solidFill>
+                <a:latin typeface="Arial"/>
+              </a:rPr>
+              <a:t>On-prem time-to-launch</a:t>
+            </a:r>
+          </a:p>
+        </p:txBody>
+      </p:sp>
+      <p:sp>
+        <p:nvSpPr>
+          <p:cNvPr id="10" name="TextBox 9"/>
+          <p:cNvSpPr/>
+          <p:nvPr>
+            <p:ph type="body" idx="5"/>
+          </p:nvPr>
+        </p:nvSpPr>
+        <p:spPr>
+          <a:xfrm>
+            <a:off x="5435323" y="3310127"/>
+            <a:ext cx="1321354" cy="640080"/>
+          </a:xfrm>
+          <a:prstGeom prst="rect">
+            <a:avLst/>
+          </a:prstGeom>
+          <a:noFill/>
+        </p:spPr>
+        <p:txBody>
+          <a:bodyPr wrap="none" lIns="0" rIns="0">
+            <a:noAutofit/>
+          </a:bodyPr>
+          <a:lstStyle/>
+          <a:p>
+            <a:pPr algn="ctr"/>
+            <a:r>
+              <a:rPr sz="4200" b="1" i="0">
+                <a:solidFill>
+                  <a:srgbClr val="0A2240"/>
+                </a:solidFill>
+                <a:latin typeface="Arial"/>
+              </a:rPr>
+              <a:t>VS</a:t>
             </a:r>
           </a:p>
         </p:txBody>
@@ -8977,294 +8607,6 @@
 
 <file path=ppt/slideLayouts/slideLayout30.xml><?xml version="1.0" encoding="utf-8"?>
 <p:sldLayout xmlns:a="http://schemas.openxmlformats.org/drawingml/2006/main" xmlns:r="http://schemas.openxmlformats.org/officeDocument/2006/relationships" xmlns:p="http://schemas.openxmlformats.org/presentationml/2006/main" type="blank" preserve="1">
-  <p:cSld name="slidekit · This vs That">
-    <p:bg>
-      <p:bgPr>
-        <a:solidFill>
-          <a:srgbClr val="FFFFFF"/>
-        </a:solidFill>
-        <a:effectLst/>
-      </p:bgPr>
-    </p:bg>
-    <p:spTree>
-      <p:nvGrpSpPr>
-        <p:cNvPr id="1" name=""/>
-        <p:cNvGrpSpPr/>
-        <p:nvPr/>
-      </p:nvGrpSpPr>
-      <p:grpSpPr>
-        <a:xfrm>
-          <a:off x="0" y="0"/>
-          <a:ext cx="0" cy="0"/>
-          <a:chOff x="0" y="0"/>
-          <a:chExt cx="0" cy="0"/>
-        </a:xfrm>
-      </p:grpSpPr>
-      <p:sp>
-        <p:nvSpPr>
-          <p:cNvPr id="4" name="Slide Number Placeholder 3"/>
-          <p:cNvSpPr>
-            <a:spLocks noGrp="1"/>
-          </p:cNvSpPr>
-          <p:nvPr>
-            <p:ph type="sldNum" sz="quarter" idx="12"/>
-          </p:nvPr>
-        </p:nvSpPr>
-        <p:spPr>
-          <a:xfrm>
-            <a:off x="11186160" y="6035040"/>
-            <a:ext cx="548640" cy="365760"/>
-          </a:xfrm>
-        </p:spPr>
-        <p:txBody>
-          <a:bodyPr/>
-          <a:lstStyle/>
-          <a:p>
-            <a:fld id="{C1FF6DA9-008F-8B48-92A6-B652298478BF}" type="slidenum">
-              <a:rPr lang="en-US" smtClean="0"/>
-              <a:t>‹#›</a:t>
-            </a:fld>
-            <a:endParaRPr lang="en-US"/>
-          </a:p>
-        </p:txBody>
-      </p:sp>
-      <p:sp>
-        <p:nvSpPr>
-          <p:cNvPr id="5" name="TextBox 4"/>
-          <p:cNvSpPr/>
-          <p:nvPr>
-            <p:ph type="title"/>
-          </p:nvPr>
-        </p:nvSpPr>
-        <p:spPr>
-          <a:xfrm>
-            <a:off x="457200" y="457200"/>
-            <a:ext cx="11277600" cy="768096"/>
-          </a:xfrm>
-          <a:prstGeom prst="rect">
-            <a:avLst/>
-          </a:prstGeom>
-          <a:noFill/>
-        </p:spPr>
-        <p:txBody>
-          <a:bodyPr wrap="none" lIns="0" rIns="0">
-            <a:noAutofit/>
-          </a:bodyPr>
-          <a:lstStyle/>
-          <a:p>
-            <a:pPr algn="l"/>
-            <a:r>
-              <a:rPr sz="4200" b="1" i="0">
-                <a:solidFill>
-                  <a:srgbClr val="0072CE"/>
-                </a:solidFill>
-                <a:latin typeface="Arial"/>
-              </a:rPr>
-              <a:t>Cloud or On-Prem</a:t>
-            </a:r>
-          </a:p>
-        </p:txBody>
-      </p:sp>
-      <p:sp>
-        <p:nvSpPr>
-          <p:cNvPr id="6" name="TextBox 5"/>
-          <p:cNvSpPr/>
-          <p:nvPr>
-            <p:ph type="body" idx="1"/>
-          </p:nvPr>
-        </p:nvSpPr>
-        <p:spPr>
-          <a:xfrm>
-            <a:off x="457200" y="2776728"/>
-            <a:ext cx="4792980" cy="914400"/>
-          </a:xfrm>
-          <a:prstGeom prst="rect">
-            <a:avLst/>
-          </a:prstGeom>
-          <a:noFill/>
-        </p:spPr>
-        <p:txBody>
-          <a:bodyPr wrap="none" lIns="0" rIns="0">
-            <a:noAutofit/>
-          </a:bodyPr>
-          <a:lstStyle/>
-          <a:p>
-            <a:pPr algn="ctr"/>
-            <a:r>
-              <a:rPr sz="6000" b="1" i="0">
-                <a:solidFill>
-                  <a:srgbClr val="0A2240"/>
-                </a:solidFill>
-                <a:latin typeface="Arial"/>
-              </a:rPr>
-              <a:t>3 wks</a:t>
-            </a:r>
-          </a:p>
-        </p:txBody>
-      </p:sp>
-      <p:sp>
-        <p:nvSpPr>
-          <p:cNvPr id="7" name="TextBox 6"/>
-          <p:cNvSpPr/>
-          <p:nvPr>
-            <p:ph type="body" idx="2"/>
-          </p:nvPr>
-        </p:nvSpPr>
-        <p:spPr>
-          <a:xfrm>
-            <a:off x="0" y="3965448"/>
-            <a:ext cx="5707380" cy="518159"/>
-          </a:xfrm>
-          <a:prstGeom prst="rect">
-            <a:avLst/>
-          </a:prstGeom>
-          <a:noFill/>
-        </p:spPr>
-        <p:txBody>
-          <a:bodyPr wrap="none" lIns="0" rIns="0">
-            <a:noAutofit/>
-          </a:bodyPr>
-          <a:lstStyle/>
-          <a:p>
-            <a:pPr algn="ctr"/>
-            <a:r>
-              <a:rPr sz="3400" b="0" i="0">
-                <a:solidFill>
-                  <a:srgbClr val="0A2240"/>
-                </a:solidFill>
-                <a:latin typeface="Arial"/>
-              </a:rPr>
-              <a:t>Cloud time-to-launch</a:t>
-            </a:r>
-          </a:p>
-        </p:txBody>
-      </p:sp>
-      <p:sp>
-        <p:nvSpPr>
-          <p:cNvPr id="8" name="TextBox 7"/>
-          <p:cNvSpPr/>
-          <p:nvPr>
-            <p:ph type="body" idx="3"/>
-          </p:nvPr>
-        </p:nvSpPr>
-        <p:spPr>
-          <a:xfrm>
-            <a:off x="6941820" y="2776728"/>
-            <a:ext cx="4792980" cy="914400"/>
-          </a:xfrm>
-          <a:prstGeom prst="rect">
-            <a:avLst/>
-          </a:prstGeom>
-          <a:noFill/>
-        </p:spPr>
-        <p:txBody>
-          <a:bodyPr wrap="none" lIns="0" rIns="0">
-            <a:noAutofit/>
-          </a:bodyPr>
-          <a:lstStyle/>
-          <a:p>
-            <a:pPr algn="ctr"/>
-            <a:r>
-              <a:rPr sz="6000" b="1" i="0">
-                <a:solidFill>
-                  <a:srgbClr val="0A2240"/>
-                </a:solidFill>
-                <a:latin typeface="Arial"/>
-              </a:rPr>
-              <a:t>6 mo</a:t>
-            </a:r>
-          </a:p>
-        </p:txBody>
-      </p:sp>
-      <p:sp>
-        <p:nvSpPr>
-          <p:cNvPr id="9" name="TextBox 8"/>
-          <p:cNvSpPr/>
-          <p:nvPr>
-            <p:ph type="body" idx="4"/>
-          </p:nvPr>
-        </p:nvSpPr>
-        <p:spPr>
-          <a:xfrm>
-            <a:off x="6484620" y="3965448"/>
-            <a:ext cx="5707380" cy="518159"/>
-          </a:xfrm>
-          <a:prstGeom prst="rect">
-            <a:avLst/>
-          </a:prstGeom>
-          <a:noFill/>
-        </p:spPr>
-        <p:txBody>
-          <a:bodyPr wrap="none" lIns="0" rIns="0">
-            <a:noAutofit/>
-          </a:bodyPr>
-          <a:lstStyle/>
-          <a:p>
-            <a:pPr algn="ctr"/>
-            <a:r>
-              <a:rPr sz="3400" b="0" i="0">
-                <a:solidFill>
-                  <a:srgbClr val="0A2240"/>
-                </a:solidFill>
-                <a:latin typeface="Arial"/>
-              </a:rPr>
-              <a:t>On-prem time-to-launch</a:t>
-            </a:r>
-          </a:p>
-        </p:txBody>
-      </p:sp>
-      <p:sp>
-        <p:nvSpPr>
-          <p:cNvPr id="10" name="TextBox 9"/>
-          <p:cNvSpPr/>
-          <p:nvPr>
-            <p:ph type="body" idx="5"/>
-          </p:nvPr>
-        </p:nvSpPr>
-        <p:spPr>
-          <a:xfrm>
-            <a:off x="5435323" y="3310127"/>
-            <a:ext cx="1321354" cy="640080"/>
-          </a:xfrm>
-          <a:prstGeom prst="rect">
-            <a:avLst/>
-          </a:prstGeom>
-          <a:noFill/>
-        </p:spPr>
-        <p:txBody>
-          <a:bodyPr wrap="none" lIns="0" rIns="0">
-            <a:noAutofit/>
-          </a:bodyPr>
-          <a:lstStyle/>
-          <a:p>
-            <a:pPr algn="ctr"/>
-            <a:r>
-              <a:rPr sz="4200" b="1" i="0">
-                <a:solidFill>
-                  <a:srgbClr val="5B6B82"/>
-                </a:solidFill>
-                <a:latin typeface="Arial"/>
-              </a:rPr>
-              <a:t>VS</a:t>
-            </a:r>
-          </a:p>
-        </p:txBody>
-      </p:sp>
-    </p:spTree>
-    <p:extLst>
-      <p:ext uri="{BB962C8B-B14F-4D97-AF65-F5344CB8AC3E}">
-        <p14:creationId xmlns:p14="http://schemas.microsoft.com/office/powerpoint/2010/main" val="1212999818"/>
-      </p:ext>
-    </p:extLst>
-  </p:cSld>
-  <p:clrMapOvr>
-    <a:masterClrMapping/>
-  </p:clrMapOvr>
-</p:sldLayout>
-</file>
-
-<file path=ppt/slideLayouts/slideLayout31.xml><?xml version="1.0" encoding="utf-8"?>
-<p:sldLayout xmlns:a="http://schemas.openxmlformats.org/drawingml/2006/main" xmlns:r="http://schemas.openxmlformats.org/officeDocument/2006/relationships" xmlns:p="http://schemas.openxmlformats.org/presentationml/2006/main" type="blank" preserve="1">
   <p:cSld name="slidekit · KPI Grid">
     <p:bg>
       <p:bgPr>
@@ -9787,7 +9129,7 @@
         </p:nvSpPr>
         <p:spPr>
           <a:xfrm>
-            <a:off x="4307840" y="3797808"/>
+            <a:off x="4307840" y="4056888"/>
             <a:ext cx="3576320" cy="640080"/>
           </a:xfrm>
           <a:prstGeom prst="rect">
@@ -9824,7 +9166,7 @@
         </p:nvSpPr>
         <p:spPr>
           <a:xfrm>
-            <a:off x="5559552" y="4492752"/>
+            <a:off x="5559552" y="4751832"/>
             <a:ext cx="1072896" cy="54864"/>
           </a:xfrm>
           <a:prstGeom prst="rect">
@@ -9856,16 +9198,16 @@
         </p:nvSpPr>
         <p:spPr>
           <a:xfrm>
-            <a:off x="4307840" y="4602480"/>
-            <a:ext cx="3576320" cy="1127760"/>
-          </a:xfrm>
-          <a:prstGeom prst="rect">
-            <a:avLst/>
-          </a:prstGeom>
-          <a:noFill/>
-        </p:spPr>
-        <p:txBody>
-          <a:bodyPr wrap="square" lIns="0" rIns="0">
+            <a:off x="3943896" y="4861560"/>
+            <a:ext cx="4304208" cy="609600"/>
+          </a:xfrm>
+          <a:prstGeom prst="rect">
+            <a:avLst/>
+          </a:prstGeom>
+          <a:noFill/>
+        </p:spPr>
+        <p:txBody>
+          <a:bodyPr wrap="none" lIns="0" rIns="0">
             <a:noAutofit/>
           </a:bodyPr>
           <a:lstStyle/>
@@ -9878,7 +9220,7 @@
                 </a:solidFill>
                 <a:latin typeface="Arial"/>
               </a:rPr>
-              <a:t>Avg. time to value</a:t>
+              <a:t>Time to value</a:t>
             </a:r>
           </a:p>
         </p:txBody>
@@ -10002,7 +9344,7 @@
 </p:sldLayout>
 </file>
 
-<file path=ppt/slideLayouts/slideLayout32.xml><?xml version="1.0" encoding="utf-8"?>
+<file path=ppt/slideLayouts/slideLayout31.xml><?xml version="1.0" encoding="utf-8"?>
 <p:sldLayout xmlns:a="http://schemas.openxmlformats.org/drawingml/2006/main" xmlns:r="http://schemas.openxmlformats.org/officeDocument/2006/relationships" xmlns:p="http://schemas.openxmlformats.org/presentationml/2006/main" type="blank" preserve="1">
   <p:cSld name="slidekit · Chart With Insight">
     <p:bg>
@@ -10189,7 +9531,7 @@
             <a:r>
               <a:rPr sz="2500" b="0" i="0">
                 <a:solidFill>
-                  <a:srgbClr val="5B6B82"/>
+                  <a:srgbClr val="0A2240"/>
                 </a:solidFill>
                 <a:latin typeface="Arial"/>
               </a:rPr>
@@ -10295,7 +9637,7 @@
             <a:r>
               <a:rPr sz="2500" b="0" i="0">
                 <a:solidFill>
-                  <a:srgbClr val="5B6B82"/>
+                  <a:srgbClr val="0A2240"/>
                 </a:solidFill>
                 <a:latin typeface="Arial"/>
               </a:rPr>
@@ -10401,7 +9743,7 @@
             <a:r>
               <a:rPr sz="2500" b="0" i="0">
                 <a:solidFill>
-                  <a:srgbClr val="5B6B82"/>
+                  <a:srgbClr val="0A2240"/>
                 </a:solidFill>
                 <a:latin typeface="Arial"/>
               </a:rPr>
@@ -10507,7 +9849,7 @@
             <a:r>
               <a:rPr sz="2500" b="0" i="0">
                 <a:solidFill>
-                  <a:srgbClr val="5B6B82"/>
+                  <a:srgbClr val="0A2240"/>
                 </a:solidFill>
                 <a:latin typeface="Arial"/>
               </a:rPr>
@@ -10526,8 +9868,8 @@
         </p:nvSpPr>
         <p:spPr>
           <a:xfrm>
-            <a:off x="7498080" y="1770888"/>
-            <a:ext cx="128016" cy="3718560"/>
+            <a:off x="7498080" y="3325368"/>
+            <a:ext cx="128016" cy="609600"/>
           </a:xfrm>
           <a:prstGeom prst="rect">
             <a:avLst/>
@@ -10558,16 +9900,16 @@
         </p:nvSpPr>
         <p:spPr>
           <a:xfrm>
-            <a:off x="8037576" y="1770888"/>
-            <a:ext cx="3697224" cy="3718560"/>
-          </a:xfrm>
-          <a:prstGeom prst="rect">
-            <a:avLst/>
-          </a:prstGeom>
-          <a:noFill/>
-        </p:spPr>
-        <p:txBody>
-          <a:bodyPr wrap="square" lIns="0" rIns="0">
+            <a:off x="8037576" y="3325368"/>
+            <a:ext cx="4154424" cy="609600"/>
+          </a:xfrm>
+          <a:prstGeom prst="rect">
+            <a:avLst/>
+          </a:prstGeom>
+          <a:noFill/>
+        </p:spPr>
+        <p:txBody>
+          <a:bodyPr wrap="none" lIns="0" rIns="0">
             <a:noAutofit/>
           </a:bodyPr>
           <a:lstStyle/>
@@ -10580,7 +9922,7 @@
                 </a:solidFill>
                 <a:latin typeface="Arial"/>
               </a:rPr>
-              <a:t>Activations nearly quadrupled once self-serve onboarding shipped in February.</a:t>
+              <a:t>Activations 4x.</a:t>
             </a:r>
           </a:p>
         </p:txBody>
@@ -10598,7 +9940,7 @@
 </p:sldLayout>
 </file>
 
-<file path=ppt/slideLayouts/slideLayout33.xml><?xml version="1.0" encoding="utf-8"?>
+<file path=ppt/slideLayouts/slideLayout32.xml><?xml version="1.0" encoding="utf-8"?>
 <p:sldLayout xmlns:a="http://schemas.openxmlformats.org/drawingml/2006/main" xmlns:r="http://schemas.openxmlformats.org/officeDocument/2006/relationships" xmlns:p="http://schemas.openxmlformats.org/presentationml/2006/main" type="blank" preserve="1">
   <p:cSld name="slidekit · Table">
     <p:bg>
@@ -11288,7 +10630,7 @@
 </p:sldLayout>
 </file>
 
-<file path=ppt/slideLayouts/slideLayout34.xml><?xml version="1.0" encoding="utf-8"?>
+<file path=ppt/slideLayouts/slideLayout33.xml><?xml version="1.0" encoding="utf-8"?>
 <p:sldLayout xmlns:a="http://schemas.openxmlformats.org/drawingml/2006/main" xmlns:r="http://schemas.openxmlformats.org/officeDocument/2006/relationships" xmlns:p="http://schemas.openxmlformats.org/presentationml/2006/main" type="blank" preserve="1">
   <p:cSld name="slidekit · Metric Comparison">
     <p:bg>
@@ -11388,7 +10730,7 @@
         </p:nvSpPr>
         <p:spPr>
           <a:xfrm>
-            <a:off x="457200" y="2075688"/>
+            <a:off x="457200" y="2334768"/>
             <a:ext cx="3576320" cy="914400"/>
           </a:xfrm>
           <a:prstGeom prst="rect">
@@ -11425,16 +10767,16 @@
         </p:nvSpPr>
         <p:spPr>
           <a:xfrm>
-            <a:off x="457200" y="3264408"/>
-            <a:ext cx="3576320" cy="1127760"/>
-          </a:xfrm>
-          <a:prstGeom prst="rect">
-            <a:avLst/>
-          </a:prstGeom>
-          <a:noFill/>
-        </p:spPr>
-        <p:txBody>
-          <a:bodyPr wrap="square" lIns="0" rIns="0">
+            <a:off x="457200" y="3523488"/>
+            <a:ext cx="3576320" cy="609600"/>
+          </a:xfrm>
+          <a:prstGeom prst="rect">
+            <a:avLst/>
+          </a:prstGeom>
+          <a:noFill/>
+        </p:spPr>
+        <p:txBody>
+          <a:bodyPr wrap="none" lIns="0" rIns="0">
             <a:noAutofit/>
           </a:bodyPr>
           <a:lstStyle/>
@@ -11447,7 +10789,7 @@
                 </a:solidFill>
                 <a:latin typeface="Arial"/>
               </a:rPr>
-              <a:t>Annual recurring revenue</a:t>
+              <a:t>Revenue</a:t>
             </a:r>
           </a:p>
         </p:txBody>
@@ -11462,7 +10804,7 @@
         </p:nvSpPr>
         <p:spPr>
           <a:xfrm>
-            <a:off x="1522569" y="4666488"/>
+            <a:off x="1522569" y="4407408"/>
             <a:ext cx="1445581" cy="518159"/>
           </a:xfrm>
           <a:prstGeom prst="rect">
@@ -11494,7 +10836,7 @@
         </p:nvSpPr>
         <p:spPr>
           <a:xfrm>
-            <a:off x="1260802" y="4666488"/>
+            <a:off x="1260802" y="4407408"/>
             <a:ext cx="1969115" cy="518159"/>
           </a:xfrm>
           <a:prstGeom prst="rect">
@@ -11531,7 +10873,7 @@
         </p:nvSpPr>
         <p:spPr>
           <a:xfrm>
-            <a:off x="4307840" y="2075688"/>
+            <a:off x="4307840" y="2334768"/>
             <a:ext cx="3576320" cy="914400"/>
           </a:xfrm>
           <a:prstGeom prst="rect">
@@ -11568,8 +10910,8 @@
         </p:nvSpPr>
         <p:spPr>
           <a:xfrm>
-            <a:off x="3834934" y="3264408"/>
-            <a:ext cx="4522132" cy="1127760"/>
+            <a:off x="3834934" y="3523488"/>
+            <a:ext cx="4522132" cy="609600"/>
           </a:xfrm>
           <a:prstGeom prst="rect">
             <a:avLst/>
@@ -11605,7 +10947,7 @@
         </p:nvSpPr>
         <p:spPr>
           <a:xfrm>
-            <a:off x="5175547" y="4666488"/>
+            <a:off x="5175547" y="4407408"/>
             <a:ext cx="1840906" cy="518159"/>
           </a:xfrm>
           <a:prstGeom prst="rect">
@@ -11637,7 +10979,7 @@
         </p:nvSpPr>
         <p:spPr>
           <a:xfrm>
-            <a:off x="4795183" y="4666488"/>
+            <a:off x="4795183" y="4407408"/>
             <a:ext cx="2601634" cy="518159"/>
           </a:xfrm>
           <a:prstGeom prst="rect">
@@ -11674,7 +11016,7 @@
         </p:nvSpPr>
         <p:spPr>
           <a:xfrm>
-            <a:off x="8158480" y="2075688"/>
+            <a:off x="8158480" y="2334768"/>
             <a:ext cx="3576320" cy="914400"/>
           </a:xfrm>
           <a:prstGeom prst="rect">
@@ -11711,16 +11053,16 @@
         </p:nvSpPr>
         <p:spPr>
           <a:xfrm>
-            <a:off x="8158480" y="3264408"/>
-            <a:ext cx="3576320" cy="1127760"/>
-          </a:xfrm>
-          <a:prstGeom prst="rect">
-            <a:avLst/>
-          </a:prstGeom>
-          <a:noFill/>
-        </p:spPr>
-        <p:txBody>
-          <a:bodyPr wrap="square" lIns="0" rIns="0">
+            <a:off x="7701280" y="3523488"/>
+            <a:ext cx="4490720" cy="609600"/>
+          </a:xfrm>
+          <a:prstGeom prst="rect">
+            <a:avLst/>
+          </a:prstGeom>
+          <a:noFill/>
+        </p:spPr>
+        <p:txBody>
+          <a:bodyPr wrap="none" lIns="0" rIns="0">
             <a:noAutofit/>
           </a:bodyPr>
           <a:lstStyle/>
@@ -11733,7 +11075,7 @@
                 </a:solidFill>
                 <a:latin typeface="Arial"/>
               </a:rPr>
-              <a:t>Net promoter score</a:t>
+              <a:t>Promoter score</a:t>
             </a:r>
           </a:p>
         </p:txBody>
@@ -11748,7 +11090,7 @@
         </p:nvSpPr>
         <p:spPr>
           <a:xfrm>
-            <a:off x="9427731" y="4666488"/>
+            <a:off x="9427731" y="4407408"/>
             <a:ext cx="1037817" cy="518159"/>
           </a:xfrm>
           <a:prstGeom prst="rect">
@@ -11780,7 +11122,7 @@
         </p:nvSpPr>
         <p:spPr>
           <a:xfrm>
-            <a:off x="9288294" y="4666488"/>
+            <a:off x="9288294" y="4407408"/>
             <a:ext cx="1316691" cy="518159"/>
           </a:xfrm>
           <a:prstGeom prst="rect">
@@ -11820,7 +11162,7 @@
 </p:sldLayout>
 </file>
 
-<file path=ppt/slideLayouts/slideLayout35.xml><?xml version="1.0" encoding="utf-8"?>
+<file path=ppt/slideLayouts/slideLayout34.xml><?xml version="1.0" encoding="utf-8"?>
 <p:sldLayout xmlns:a="http://schemas.openxmlformats.org/drawingml/2006/main" xmlns:r="http://schemas.openxmlformats.org/officeDocument/2006/relationships" xmlns:p="http://schemas.openxmlformats.org/presentationml/2006/main" type="blank" preserve="1">
   <p:cSld name="slidekit · Process Steps">
     <p:bg>
@@ -11958,7 +11300,7 @@
         <p:spPr>
           <a:xfrm>
             <a:off x="457200" y="2194560"/>
-            <a:ext cx="784098" cy="54864"/>
+            <a:ext cx="593303" cy="54864"/>
           </a:xfrm>
           <a:prstGeom prst="rect">
             <a:avLst/>
@@ -12101,7 +11443,7 @@
         <p:spPr>
           <a:xfrm>
             <a:off x="3345180" y="2194560"/>
-            <a:ext cx="784098" cy="54864"/>
+            <a:ext cx="593303" cy="54864"/>
           </a:xfrm>
           <a:prstGeom prst="rect">
             <a:avLst/>
@@ -12244,7 +11586,7 @@
         <p:spPr>
           <a:xfrm>
             <a:off x="6233160" y="2194560"/>
-            <a:ext cx="784098" cy="54864"/>
+            <a:ext cx="593303" cy="54864"/>
           </a:xfrm>
           <a:prstGeom prst="rect">
             <a:avLst/>
@@ -12387,7 +11729,7 @@
         <p:spPr>
           <a:xfrm>
             <a:off x="9121140" y="2194560"/>
-            <a:ext cx="784098" cy="54864"/>
+            <a:ext cx="593303" cy="54864"/>
           </a:xfrm>
           <a:prstGeom prst="rect">
             <a:avLst/>
@@ -12495,7 +11837,7 @@
 </p:sldLayout>
 </file>
 
-<file path=ppt/slideLayouts/slideLayout36.xml><?xml version="1.0" encoding="utf-8"?>
+<file path=ppt/slideLayouts/slideLayout35.xml><?xml version="1.0" encoding="utf-8"?>
 <p:sldLayout xmlns:a="http://schemas.openxmlformats.org/drawingml/2006/main" xmlns:r="http://schemas.openxmlformats.org/officeDocument/2006/relationships" xmlns:p="http://schemas.openxmlformats.org/presentationml/2006/main" type="blank" preserve="1">
   <p:cSld name="slidekit · Roadmap">
     <p:bg>
@@ -13027,7 +12369,7 @@
 </p:sldLayout>
 </file>
 
-<file path=ppt/slideLayouts/slideLayout37.xml><?xml version="1.0" encoding="utf-8"?>
+<file path=ppt/slideLayouts/slideLayout36.xml><?xml version="1.0" encoding="utf-8"?>
 <p:sldLayout xmlns:a="http://schemas.openxmlformats.org/drawingml/2006/main" xmlns:r="http://schemas.openxmlformats.org/officeDocument/2006/relationships" xmlns:p="http://schemas.openxmlformats.org/presentationml/2006/main" type="blank" preserve="1">
   <p:cSld name="slidekit · Funnel">
     <p:bg>
@@ -13406,7 +12748,7 @@
 </p:sldLayout>
 </file>
 
-<file path=ppt/slideLayouts/slideLayout38.xml><?xml version="1.0" encoding="utf-8"?>
+<file path=ppt/slideLayouts/slideLayout37.xml><?xml version="1.0" encoding="utf-8"?>
 <p:sldLayout xmlns:a="http://schemas.openxmlformats.org/drawingml/2006/main" xmlns:r="http://schemas.openxmlformats.org/officeDocument/2006/relationships" xmlns:p="http://schemas.openxmlformats.org/presentationml/2006/main" type="blank" preserve="1">
   <p:cSld name="slidekit · Nested Circles">
     <p:bg>
@@ -13513,7 +12855,7 @@
             <a:avLst/>
           </a:prstGeom>
           <a:solidFill>
-            <a:srgbClr val="5B6B82"/>
+            <a:srgbClr val="0A2240"/>
           </a:solidFill>
           <a:ln>
             <a:noFill/>
@@ -13577,7 +12919,7 @@
             <a:avLst/>
           </a:prstGeom>
           <a:solidFill>
-            <a:srgbClr val="0072CE"/>
+            <a:srgbClr val="0A2240"/>
           </a:solidFill>
           <a:ln>
             <a:noFill/>
@@ -13827,7 +13169,7 @@
 </p:sldLayout>
 </file>
 
-<file path=ppt/slideLayouts/slideLayout39.xml><?xml version="1.0" encoding="utf-8"?>
+<file path=ppt/slideLayouts/slideLayout38.xml><?xml version="1.0" encoding="utf-8"?>
 <p:sldLayout xmlns:a="http://schemas.openxmlformats.org/drawingml/2006/main" xmlns:r="http://schemas.openxmlformats.org/officeDocument/2006/relationships" xmlns:p="http://schemas.openxmlformats.org/presentationml/2006/main" type="blank" preserve="1">
   <p:cSld name="slidekit · Pyramid">
     <p:bg>
@@ -14189,6 +13531,533 @@
                 <a:latin typeface="Arial"/>
               </a:rPr>
               <a:t>Tactics</a:t>
+            </a:r>
+          </a:p>
+        </p:txBody>
+      </p:sp>
+    </p:spTree>
+    <p:extLst>
+      <p:ext uri="{BB962C8B-B14F-4D97-AF65-F5344CB8AC3E}">
+        <p14:creationId xmlns:p14="http://schemas.microsoft.com/office/powerpoint/2010/main" val="1212999818"/>
+      </p:ext>
+    </p:extLst>
+  </p:cSld>
+  <p:clrMapOvr>
+    <a:masterClrMapping/>
+  </p:clrMapOvr>
+</p:sldLayout>
+</file>
+
+<file path=ppt/slideLayouts/slideLayout39.xml><?xml version="1.0" encoding="utf-8"?>
+<p:sldLayout xmlns:a="http://schemas.openxmlformats.org/drawingml/2006/main" xmlns:r="http://schemas.openxmlformats.org/officeDocument/2006/relationships" xmlns:p="http://schemas.openxmlformats.org/presentationml/2006/main" type="blank" preserve="1">
+  <p:cSld name="slidekit · SWOT">
+    <p:bg>
+      <p:bgPr>
+        <a:solidFill>
+          <a:srgbClr val="FFFFFF"/>
+        </a:solidFill>
+        <a:effectLst/>
+      </p:bgPr>
+    </p:bg>
+    <p:spTree>
+      <p:nvGrpSpPr>
+        <p:cNvPr id="1" name=""/>
+        <p:cNvGrpSpPr/>
+        <p:nvPr/>
+      </p:nvGrpSpPr>
+      <p:grpSpPr>
+        <a:xfrm>
+          <a:off x="0" y="0"/>
+          <a:ext cx="0" cy="0"/>
+          <a:chOff x="0" y="0"/>
+          <a:chExt cx="0" cy="0"/>
+        </a:xfrm>
+      </p:grpSpPr>
+      <p:sp>
+        <p:nvSpPr>
+          <p:cNvPr id="4" name="Slide Number Placeholder 3"/>
+          <p:cNvSpPr>
+            <a:spLocks noGrp="1"/>
+          </p:cNvSpPr>
+          <p:nvPr>
+            <p:ph type="sldNum" sz="quarter" idx="12"/>
+          </p:nvPr>
+        </p:nvSpPr>
+        <p:spPr>
+          <a:xfrm>
+            <a:off x="11186160" y="6035040"/>
+            <a:ext cx="548640" cy="365760"/>
+          </a:xfrm>
+        </p:spPr>
+        <p:txBody>
+          <a:bodyPr/>
+          <a:lstStyle/>
+          <a:p>
+            <a:fld id="{C1FF6DA9-008F-8B48-92A6-B652298478BF}" type="slidenum">
+              <a:rPr lang="en-US" smtClean="0"/>
+              <a:t>‹#›</a:t>
+            </a:fld>
+            <a:endParaRPr lang="en-US"/>
+          </a:p>
+        </p:txBody>
+      </p:sp>
+      <p:sp>
+        <p:nvSpPr>
+          <p:cNvPr id="5" name="TextBox 4"/>
+          <p:cNvSpPr/>
+          <p:nvPr>
+            <p:ph type="title"/>
+          </p:nvPr>
+        </p:nvSpPr>
+        <p:spPr>
+          <a:xfrm>
+            <a:off x="457200" y="457200"/>
+            <a:ext cx="11277600" cy="768096"/>
+          </a:xfrm>
+          <a:prstGeom prst="rect">
+            <a:avLst/>
+          </a:prstGeom>
+          <a:noFill/>
+        </p:spPr>
+        <p:txBody>
+          <a:bodyPr wrap="none" lIns="0" rIns="0">
+            <a:noAutofit/>
+          </a:bodyPr>
+          <a:lstStyle/>
+          <a:p>
+            <a:pPr algn="l"/>
+            <a:r>
+              <a:rPr sz="4200" b="1" i="0">
+                <a:solidFill>
+                  <a:srgbClr val="0072CE"/>
+                </a:solidFill>
+                <a:latin typeface="Arial"/>
+              </a:rPr>
+              <a:t>SWOT Analysis</a:t>
+            </a:r>
+          </a:p>
+        </p:txBody>
+      </p:sp>
+      <p:sp>
+        <p:nvSpPr>
+          <p:cNvPr id="6" name="TextBox 5"/>
+          <p:cNvSpPr/>
+          <p:nvPr>
+            <p:ph type="body" idx="1"/>
+          </p:nvPr>
+        </p:nvSpPr>
+        <p:spPr>
+          <a:xfrm>
+            <a:off x="457200" y="1499616"/>
+            <a:ext cx="5501640" cy="621791"/>
+          </a:xfrm>
+          <a:prstGeom prst="rect">
+            <a:avLst/>
+          </a:prstGeom>
+          <a:noFill/>
+        </p:spPr>
+        <p:txBody>
+          <a:bodyPr wrap="none" lIns="0" rIns="0">
+            <a:noAutofit/>
+          </a:bodyPr>
+          <a:lstStyle/>
+          <a:p>
+            <a:pPr algn="l"/>
+            <a:r>
+              <a:rPr sz="3400" b="1" i="0">
+                <a:solidFill>
+                  <a:srgbClr val="0072CE"/>
+                </a:solidFill>
+                <a:latin typeface="Arial"/>
+              </a:rPr>
+              <a:t>Strengths</a:t>
+            </a:r>
+          </a:p>
+        </p:txBody>
+      </p:sp>
+      <p:sp>
+        <p:nvSpPr>
+          <p:cNvPr id="7" name="Rectangle 6"/>
+          <p:cNvSpPr/>
+          <p:nvPr>
+            <p:ph type="body" idx="2"/>
+          </p:nvPr>
+        </p:nvSpPr>
+        <p:spPr>
+          <a:xfrm>
+            <a:off x="457200" y="2176271"/>
+            <a:ext cx="2015207" cy="54864"/>
+          </a:xfrm>
+          <a:prstGeom prst="rect">
+            <a:avLst/>
+          </a:prstGeom>
+          <a:solidFill>
+            <a:srgbClr val="0072CE"/>
+          </a:solidFill>
+          <a:ln>
+            <a:noFill/>
+          </a:ln>
+          <a:effectLst/>
+        </p:spPr>
+        <p:txBody>
+          <a:bodyPr rtlCol="0" anchor="ctr"/>
+          <a:lstStyle/>
+          <a:p>
+            <a:pPr algn="ctr"/>
+          </a:p>
+        </p:txBody>
+      </p:sp>
+      <p:sp>
+        <p:nvSpPr>
+          <p:cNvPr id="8" name="TextBox 7"/>
+          <p:cNvSpPr/>
+          <p:nvPr>
+            <p:ph type="body" idx="3"/>
+          </p:nvPr>
+        </p:nvSpPr>
+        <p:spPr>
+          <a:xfrm>
+            <a:off x="457200" y="2395727"/>
+            <a:ext cx="7863523" cy="609600"/>
+          </a:xfrm>
+          <a:prstGeom prst="rect">
+            <a:avLst/>
+          </a:prstGeom>
+          <a:noFill/>
+        </p:spPr>
+        <p:txBody>
+          <a:bodyPr wrap="none" lIns="0" rIns="0">
+            <a:noAutofit/>
+          </a:bodyPr>
+          <a:lstStyle/>
+          <a:p>
+            <a:pPr algn="l"/>
+            <a:r>
+              <a:rPr sz="3400" b="0" i="0">
+                <a:solidFill>
+                  <a:srgbClr val="0A2240"/>
+                </a:solidFill>
+                <a:latin typeface="Arial"/>
+              </a:rPr>
+              <a:t>Strong brand, loyal users</a:t>
+            </a:r>
+          </a:p>
+        </p:txBody>
+      </p:sp>
+      <p:sp>
+        <p:nvSpPr>
+          <p:cNvPr id="9" name="TextBox 8"/>
+          <p:cNvSpPr/>
+          <p:nvPr>
+            <p:ph type="body" idx="4"/>
+          </p:nvPr>
+        </p:nvSpPr>
+        <p:spPr>
+          <a:xfrm>
+            <a:off x="6233160" y="1499616"/>
+            <a:ext cx="5501640" cy="621791"/>
+          </a:xfrm>
+          <a:prstGeom prst="rect">
+            <a:avLst/>
+          </a:prstGeom>
+          <a:noFill/>
+        </p:spPr>
+        <p:txBody>
+          <a:bodyPr wrap="none" lIns="0" rIns="0">
+            <a:noAutofit/>
+          </a:bodyPr>
+          <a:lstStyle/>
+          <a:p>
+            <a:pPr algn="l"/>
+            <a:r>
+              <a:rPr sz="3400" b="1" i="0">
+                <a:solidFill>
+                  <a:srgbClr val="0A2240"/>
+                </a:solidFill>
+                <a:latin typeface="Arial"/>
+              </a:rPr>
+              <a:t>Weaknesses</a:t>
+            </a:r>
+          </a:p>
+        </p:txBody>
+      </p:sp>
+      <p:sp>
+        <p:nvSpPr>
+          <p:cNvPr id="10" name="Rectangle 9"/>
+          <p:cNvSpPr/>
+          <p:nvPr>
+            <p:ph type="body" idx="5"/>
+          </p:nvPr>
+        </p:nvSpPr>
+        <p:spPr>
+          <a:xfrm>
+            <a:off x="6233160" y="2176271"/>
+            <a:ext cx="2584686" cy="54864"/>
+          </a:xfrm>
+          <a:prstGeom prst="rect">
+            <a:avLst/>
+          </a:prstGeom>
+          <a:solidFill>
+            <a:srgbClr val="0A2240"/>
+          </a:solidFill>
+          <a:ln>
+            <a:noFill/>
+          </a:ln>
+          <a:effectLst/>
+        </p:spPr>
+        <p:txBody>
+          <a:bodyPr rtlCol="0" anchor="ctr"/>
+          <a:lstStyle/>
+          <a:p>
+            <a:pPr algn="ctr"/>
+          </a:p>
+        </p:txBody>
+      </p:sp>
+      <p:sp>
+        <p:nvSpPr>
+          <p:cNvPr id="11" name="TextBox 10"/>
+          <p:cNvSpPr/>
+          <p:nvPr>
+            <p:ph type="body" idx="6"/>
+          </p:nvPr>
+        </p:nvSpPr>
+        <p:spPr>
+          <a:xfrm>
+            <a:off x="6233160" y="2395727"/>
+            <a:ext cx="5958840" cy="609600"/>
+          </a:xfrm>
+          <a:prstGeom prst="rect">
+            <a:avLst/>
+          </a:prstGeom>
+          <a:noFill/>
+        </p:spPr>
+        <p:txBody>
+          <a:bodyPr wrap="none" lIns="0" rIns="0">
+            <a:noAutofit/>
+          </a:bodyPr>
+          <a:lstStyle/>
+          <a:p>
+            <a:pPr algn="l"/>
+            <a:r>
+              <a:rPr sz="3400" b="0" i="0">
+                <a:solidFill>
+                  <a:srgbClr val="0A2240"/>
+                </a:solidFill>
+                <a:latin typeface="Arial"/>
+              </a:rPr>
+              <a:t>Thin margins, small team</a:t>
+            </a:r>
+          </a:p>
+        </p:txBody>
+      </p:sp>
+      <p:sp>
+        <p:nvSpPr>
+          <p:cNvPr id="12" name="TextBox 11"/>
+          <p:cNvSpPr/>
+          <p:nvPr>
+            <p:ph type="body" idx="7"/>
+          </p:nvPr>
+        </p:nvSpPr>
+        <p:spPr>
+          <a:xfrm>
+            <a:off x="457200" y="3767328"/>
+            <a:ext cx="5501640" cy="621791"/>
+          </a:xfrm>
+          <a:prstGeom prst="rect">
+            <a:avLst/>
+          </a:prstGeom>
+          <a:noFill/>
+        </p:spPr>
+        <p:txBody>
+          <a:bodyPr wrap="none" lIns="0" rIns="0">
+            <a:noAutofit/>
+          </a:bodyPr>
+          <a:lstStyle/>
+          <a:p>
+            <a:pPr algn="l"/>
+            <a:r>
+              <a:rPr sz="3400" b="1" i="0">
+                <a:solidFill>
+                  <a:srgbClr val="0072CE"/>
+                </a:solidFill>
+                <a:latin typeface="Arial"/>
+              </a:rPr>
+              <a:t>Opportunities</a:t>
+            </a:r>
+          </a:p>
+        </p:txBody>
+      </p:sp>
+      <p:sp>
+        <p:nvSpPr>
+          <p:cNvPr id="13" name="Rectangle 12"/>
+          <p:cNvSpPr/>
+          <p:nvPr>
+            <p:ph type="body" idx="8"/>
+          </p:nvPr>
+        </p:nvSpPr>
+        <p:spPr>
+          <a:xfrm>
+            <a:off x="457200" y="4443983"/>
+            <a:ext cx="2830525" cy="54864"/>
+          </a:xfrm>
+          <a:prstGeom prst="rect">
+            <a:avLst/>
+          </a:prstGeom>
+          <a:solidFill>
+            <a:srgbClr val="0072CE"/>
+          </a:solidFill>
+          <a:ln>
+            <a:noFill/>
+          </a:ln>
+          <a:effectLst/>
+        </p:spPr>
+        <p:txBody>
+          <a:bodyPr rtlCol="0" anchor="ctr"/>
+          <a:lstStyle/>
+          <a:p>
+            <a:pPr algn="ctr"/>
+          </a:p>
+        </p:txBody>
+      </p:sp>
+      <p:sp>
+        <p:nvSpPr>
+          <p:cNvPr id="14" name="TextBox 13"/>
+          <p:cNvSpPr/>
+          <p:nvPr>
+            <p:ph type="body" idx="9"/>
+          </p:nvPr>
+        </p:nvSpPr>
+        <p:spPr>
+          <a:xfrm>
+            <a:off x="457200" y="4663439"/>
+            <a:ext cx="8015326" cy="609600"/>
+          </a:xfrm>
+          <a:prstGeom prst="rect">
+            <a:avLst/>
+          </a:prstGeom>
+          <a:noFill/>
+        </p:spPr>
+        <p:txBody>
+          <a:bodyPr wrap="none" lIns="0" rIns="0">
+            <a:noAutofit/>
+          </a:bodyPr>
+          <a:lstStyle/>
+          <a:p>
+            <a:pPr algn="l"/>
+            <a:r>
+              <a:rPr sz="3400" b="0" i="0">
+                <a:solidFill>
+                  <a:srgbClr val="0A2240"/>
+                </a:solidFill>
+                <a:latin typeface="Arial"/>
+              </a:rPr>
+              <a:t>New markets via partners</a:t>
+            </a:r>
+          </a:p>
+        </p:txBody>
+      </p:sp>
+      <p:sp>
+        <p:nvSpPr>
+          <p:cNvPr id="15" name="TextBox 14"/>
+          <p:cNvSpPr/>
+          <p:nvPr>
+            <p:ph type="body" idx="13"/>
+          </p:nvPr>
+        </p:nvSpPr>
+        <p:spPr>
+          <a:xfrm>
+            <a:off x="6233160" y="3767328"/>
+            <a:ext cx="5501640" cy="621791"/>
+          </a:xfrm>
+          <a:prstGeom prst="rect">
+            <a:avLst/>
+          </a:prstGeom>
+          <a:noFill/>
+        </p:spPr>
+        <p:txBody>
+          <a:bodyPr wrap="none" lIns="0" rIns="0">
+            <a:noAutofit/>
+          </a:bodyPr>
+          <a:lstStyle/>
+          <a:p>
+            <a:pPr algn="l"/>
+            <a:r>
+              <a:rPr sz="3400" b="1" i="0">
+                <a:solidFill>
+                  <a:srgbClr val="0A2240"/>
+                </a:solidFill>
+                <a:latin typeface="Arial"/>
+              </a:rPr>
+              <a:t>Threats</a:t>
+            </a:r>
+          </a:p>
+        </p:txBody>
+      </p:sp>
+      <p:sp>
+        <p:nvSpPr>
+          <p:cNvPr id="16" name="Rectangle 15"/>
+          <p:cNvSpPr/>
+          <p:nvPr>
+            <p:ph type="body" idx="14"/>
+          </p:nvPr>
+        </p:nvSpPr>
+        <p:spPr>
+          <a:xfrm>
+            <a:off x="6233160" y="4443983"/>
+            <a:ext cx="1559793" cy="54864"/>
+          </a:xfrm>
+          <a:prstGeom prst="rect">
+            <a:avLst/>
+          </a:prstGeom>
+          <a:solidFill>
+            <a:srgbClr val="0A2240"/>
+          </a:solidFill>
+          <a:ln>
+            <a:noFill/>
+          </a:ln>
+          <a:effectLst/>
+        </p:spPr>
+        <p:txBody>
+          <a:bodyPr rtlCol="0" anchor="ctr"/>
+          <a:lstStyle/>
+          <a:p>
+            <a:pPr algn="ctr"/>
+          </a:p>
+        </p:txBody>
+      </p:sp>
+      <p:sp>
+        <p:nvSpPr>
+          <p:cNvPr id="17" name="TextBox 16"/>
+          <p:cNvSpPr/>
+          <p:nvPr>
+            <p:ph type="body" idx="15"/>
+          </p:nvPr>
+        </p:nvSpPr>
+        <p:spPr>
+          <a:xfrm>
+            <a:off x="6233160" y="4663439"/>
+            <a:ext cx="5958840" cy="609600"/>
+          </a:xfrm>
+          <a:prstGeom prst="rect">
+            <a:avLst/>
+          </a:prstGeom>
+          <a:noFill/>
+        </p:spPr>
+        <p:txBody>
+          <a:bodyPr wrap="none" lIns="0" rIns="0">
+            <a:noAutofit/>
+          </a:bodyPr>
+          <a:lstStyle/>
+          <a:p>
+            <a:pPr algn="l"/>
+            <a:r>
+              <a:rPr sz="3400" b="0" i="0">
+                <a:solidFill>
+                  <a:srgbClr val="0A2240"/>
+                </a:solidFill>
+                <a:latin typeface="Arial"/>
+              </a:rPr>
+              <a:t>New entrants cut prices</a:t>
             </a:r>
           </a:p>
         </p:txBody>
@@ -14495,533 +14364,6 @@
 </file>
 
 <file path=ppt/slideLayouts/slideLayout40.xml><?xml version="1.0" encoding="utf-8"?>
-<p:sldLayout xmlns:a="http://schemas.openxmlformats.org/drawingml/2006/main" xmlns:r="http://schemas.openxmlformats.org/officeDocument/2006/relationships" xmlns:p="http://schemas.openxmlformats.org/presentationml/2006/main" type="blank" preserve="1">
-  <p:cSld name="slidekit · SWOT">
-    <p:bg>
-      <p:bgPr>
-        <a:solidFill>
-          <a:srgbClr val="FFFFFF"/>
-        </a:solidFill>
-        <a:effectLst/>
-      </p:bgPr>
-    </p:bg>
-    <p:spTree>
-      <p:nvGrpSpPr>
-        <p:cNvPr id="1" name=""/>
-        <p:cNvGrpSpPr/>
-        <p:nvPr/>
-      </p:nvGrpSpPr>
-      <p:grpSpPr>
-        <a:xfrm>
-          <a:off x="0" y="0"/>
-          <a:ext cx="0" cy="0"/>
-          <a:chOff x="0" y="0"/>
-          <a:chExt cx="0" cy="0"/>
-        </a:xfrm>
-      </p:grpSpPr>
-      <p:sp>
-        <p:nvSpPr>
-          <p:cNvPr id="4" name="Slide Number Placeholder 3"/>
-          <p:cNvSpPr>
-            <a:spLocks noGrp="1"/>
-          </p:cNvSpPr>
-          <p:nvPr>
-            <p:ph type="sldNum" sz="quarter" idx="12"/>
-          </p:nvPr>
-        </p:nvSpPr>
-        <p:spPr>
-          <a:xfrm>
-            <a:off x="11186160" y="6035040"/>
-            <a:ext cx="548640" cy="365760"/>
-          </a:xfrm>
-        </p:spPr>
-        <p:txBody>
-          <a:bodyPr/>
-          <a:lstStyle/>
-          <a:p>
-            <a:fld id="{C1FF6DA9-008F-8B48-92A6-B652298478BF}" type="slidenum">
-              <a:rPr lang="en-US" smtClean="0"/>
-              <a:t>‹#›</a:t>
-            </a:fld>
-            <a:endParaRPr lang="en-US"/>
-          </a:p>
-        </p:txBody>
-      </p:sp>
-      <p:sp>
-        <p:nvSpPr>
-          <p:cNvPr id="5" name="TextBox 4"/>
-          <p:cNvSpPr/>
-          <p:nvPr>
-            <p:ph type="title"/>
-          </p:nvPr>
-        </p:nvSpPr>
-        <p:spPr>
-          <a:xfrm>
-            <a:off x="457200" y="457200"/>
-            <a:ext cx="11277600" cy="768096"/>
-          </a:xfrm>
-          <a:prstGeom prst="rect">
-            <a:avLst/>
-          </a:prstGeom>
-          <a:noFill/>
-        </p:spPr>
-        <p:txBody>
-          <a:bodyPr wrap="none" lIns="0" rIns="0">
-            <a:noAutofit/>
-          </a:bodyPr>
-          <a:lstStyle/>
-          <a:p>
-            <a:pPr algn="l"/>
-            <a:r>
-              <a:rPr sz="4200" b="1" i="0">
-                <a:solidFill>
-                  <a:srgbClr val="0072CE"/>
-                </a:solidFill>
-                <a:latin typeface="Arial"/>
-              </a:rPr>
-              <a:t>SWOT Analysis</a:t>
-            </a:r>
-          </a:p>
-        </p:txBody>
-      </p:sp>
-      <p:sp>
-        <p:nvSpPr>
-          <p:cNvPr id="6" name="TextBox 5"/>
-          <p:cNvSpPr/>
-          <p:nvPr>
-            <p:ph type="body" idx="1"/>
-          </p:nvPr>
-        </p:nvSpPr>
-        <p:spPr>
-          <a:xfrm>
-            <a:off x="457200" y="1499616"/>
-            <a:ext cx="5501640" cy="621791"/>
-          </a:xfrm>
-          <a:prstGeom prst="rect">
-            <a:avLst/>
-          </a:prstGeom>
-          <a:noFill/>
-        </p:spPr>
-        <p:txBody>
-          <a:bodyPr wrap="none" lIns="0" rIns="0">
-            <a:noAutofit/>
-          </a:bodyPr>
-          <a:lstStyle/>
-          <a:p>
-            <a:pPr algn="l"/>
-            <a:r>
-              <a:rPr sz="3400" b="1" i="0">
-                <a:solidFill>
-                  <a:srgbClr val="0072CE"/>
-                </a:solidFill>
-                <a:latin typeface="Arial"/>
-              </a:rPr>
-              <a:t>Strengths</a:t>
-            </a:r>
-          </a:p>
-        </p:txBody>
-      </p:sp>
-      <p:sp>
-        <p:nvSpPr>
-          <p:cNvPr id="7" name="Rectangle 6"/>
-          <p:cNvSpPr/>
-          <p:nvPr>
-            <p:ph type="body" idx="2"/>
-          </p:nvPr>
-        </p:nvSpPr>
-        <p:spPr>
-          <a:xfrm>
-            <a:off x="457200" y="2176271"/>
-            <a:ext cx="1650492" cy="54864"/>
-          </a:xfrm>
-          <a:prstGeom prst="rect">
-            <a:avLst/>
-          </a:prstGeom>
-          <a:solidFill>
-            <a:srgbClr val="0072CE"/>
-          </a:solidFill>
-          <a:ln>
-            <a:noFill/>
-          </a:ln>
-          <a:effectLst/>
-        </p:spPr>
-        <p:txBody>
-          <a:bodyPr rtlCol="0" anchor="ctr"/>
-          <a:lstStyle/>
-          <a:p>
-            <a:pPr algn="ctr"/>
-          </a:p>
-        </p:txBody>
-      </p:sp>
-      <p:sp>
-        <p:nvSpPr>
-          <p:cNvPr id="8" name="TextBox 7"/>
-          <p:cNvSpPr/>
-          <p:nvPr>
-            <p:ph type="body" idx="3"/>
-          </p:nvPr>
-        </p:nvSpPr>
-        <p:spPr>
-          <a:xfrm>
-            <a:off x="457200" y="2395727"/>
-            <a:ext cx="5501640" cy="1097281"/>
-          </a:xfrm>
-          <a:prstGeom prst="rect">
-            <a:avLst/>
-          </a:prstGeom>
-          <a:noFill/>
-        </p:spPr>
-        <p:txBody>
-          <a:bodyPr wrap="square" lIns="0" rIns="0">
-            <a:noAutofit/>
-          </a:bodyPr>
-          <a:lstStyle/>
-          <a:p>
-            <a:pPr algn="l"/>
-            <a:r>
-              <a:rPr sz="3400" b="0" i="0">
-                <a:solidFill>
-                  <a:srgbClr val="0A2240"/>
-                </a:solidFill>
-                <a:latin typeface="Arial"/>
-              </a:rPr>
-              <a:t>A strong brand with loyal users</a:t>
-            </a:r>
-          </a:p>
-        </p:txBody>
-      </p:sp>
-      <p:sp>
-        <p:nvSpPr>
-          <p:cNvPr id="9" name="TextBox 8"/>
-          <p:cNvSpPr/>
-          <p:nvPr>
-            <p:ph type="body" idx="4"/>
-          </p:nvPr>
-        </p:nvSpPr>
-        <p:spPr>
-          <a:xfrm>
-            <a:off x="6233160" y="1499616"/>
-            <a:ext cx="5501640" cy="621791"/>
-          </a:xfrm>
-          <a:prstGeom prst="rect">
-            <a:avLst/>
-          </a:prstGeom>
-          <a:noFill/>
-        </p:spPr>
-        <p:txBody>
-          <a:bodyPr wrap="none" lIns="0" rIns="0">
-            <a:noAutofit/>
-          </a:bodyPr>
-          <a:lstStyle/>
-          <a:p>
-            <a:pPr algn="l"/>
-            <a:r>
-              <a:rPr sz="3400" b="1" i="0">
-                <a:solidFill>
-                  <a:srgbClr val="5B6B82"/>
-                </a:solidFill>
-                <a:latin typeface="Arial"/>
-              </a:rPr>
-              <a:t>Weaknesses</a:t>
-            </a:r>
-          </a:p>
-        </p:txBody>
-      </p:sp>
-      <p:sp>
-        <p:nvSpPr>
-          <p:cNvPr id="10" name="Rectangle 9"/>
-          <p:cNvSpPr/>
-          <p:nvPr>
-            <p:ph type="body" idx="5"/>
-          </p:nvPr>
-        </p:nvSpPr>
-        <p:spPr>
-          <a:xfrm>
-            <a:off x="6233160" y="2176271"/>
-            <a:ext cx="1650492" cy="54864"/>
-          </a:xfrm>
-          <a:prstGeom prst="rect">
-            <a:avLst/>
-          </a:prstGeom>
-          <a:solidFill>
-            <a:srgbClr val="5B6B82"/>
-          </a:solidFill>
-          <a:ln>
-            <a:noFill/>
-          </a:ln>
-          <a:effectLst/>
-        </p:spPr>
-        <p:txBody>
-          <a:bodyPr rtlCol="0" anchor="ctr"/>
-          <a:lstStyle/>
-          <a:p>
-            <a:pPr algn="ctr"/>
-          </a:p>
-        </p:txBody>
-      </p:sp>
-      <p:sp>
-        <p:nvSpPr>
-          <p:cNvPr id="11" name="TextBox 10"/>
-          <p:cNvSpPr/>
-          <p:nvPr>
-            <p:ph type="body" idx="6"/>
-          </p:nvPr>
-        </p:nvSpPr>
-        <p:spPr>
-          <a:xfrm>
-            <a:off x="6233160" y="2395727"/>
-            <a:ext cx="5501640" cy="1097281"/>
-          </a:xfrm>
-          <a:prstGeom prst="rect">
-            <a:avLst/>
-          </a:prstGeom>
-          <a:noFill/>
-        </p:spPr>
-        <p:txBody>
-          <a:bodyPr wrap="square" lIns="0" rIns="0">
-            <a:noAutofit/>
-          </a:bodyPr>
-          <a:lstStyle/>
-          <a:p>
-            <a:pPr algn="l"/>
-            <a:r>
-              <a:rPr sz="3400" b="0" i="0">
-                <a:solidFill>
-                  <a:srgbClr val="0A2240"/>
-                </a:solidFill>
-                <a:latin typeface="Arial"/>
-              </a:rPr>
-              <a:t>Thin margins and a small team</a:t>
-            </a:r>
-          </a:p>
-        </p:txBody>
-      </p:sp>
-      <p:sp>
-        <p:nvSpPr>
-          <p:cNvPr id="12" name="TextBox 11"/>
-          <p:cNvSpPr/>
-          <p:nvPr>
-            <p:ph type="body" idx="7"/>
-          </p:nvPr>
-        </p:nvSpPr>
-        <p:spPr>
-          <a:xfrm>
-            <a:off x="457200" y="3767328"/>
-            <a:ext cx="5501640" cy="621791"/>
-          </a:xfrm>
-          <a:prstGeom prst="rect">
-            <a:avLst/>
-          </a:prstGeom>
-          <a:noFill/>
-        </p:spPr>
-        <p:txBody>
-          <a:bodyPr wrap="none" lIns="0" rIns="0">
-            <a:noAutofit/>
-          </a:bodyPr>
-          <a:lstStyle/>
-          <a:p>
-            <a:pPr algn="l"/>
-            <a:r>
-              <a:rPr sz="3400" b="1" i="0">
-                <a:solidFill>
-                  <a:srgbClr val="0072CE"/>
-                </a:solidFill>
-                <a:latin typeface="Arial"/>
-              </a:rPr>
-              <a:t>Opportunities</a:t>
-            </a:r>
-          </a:p>
-        </p:txBody>
-      </p:sp>
-      <p:sp>
-        <p:nvSpPr>
-          <p:cNvPr id="13" name="Rectangle 12"/>
-          <p:cNvSpPr/>
-          <p:nvPr>
-            <p:ph type="body" idx="8"/>
-          </p:nvPr>
-        </p:nvSpPr>
-        <p:spPr>
-          <a:xfrm>
-            <a:off x="457200" y="4443983"/>
-            <a:ext cx="1650492" cy="54864"/>
-          </a:xfrm>
-          <a:prstGeom prst="rect">
-            <a:avLst/>
-          </a:prstGeom>
-          <a:solidFill>
-            <a:srgbClr val="0072CE"/>
-          </a:solidFill>
-          <a:ln>
-            <a:noFill/>
-          </a:ln>
-          <a:effectLst/>
-        </p:spPr>
-        <p:txBody>
-          <a:bodyPr rtlCol="0" anchor="ctr"/>
-          <a:lstStyle/>
-          <a:p>
-            <a:pPr algn="ctr"/>
-          </a:p>
-        </p:txBody>
-      </p:sp>
-      <p:sp>
-        <p:nvSpPr>
-          <p:cNvPr id="14" name="TextBox 13"/>
-          <p:cNvSpPr/>
-          <p:nvPr>
-            <p:ph type="body" idx="9"/>
-          </p:nvPr>
-        </p:nvSpPr>
-        <p:spPr>
-          <a:xfrm>
-            <a:off x="457200" y="4663439"/>
-            <a:ext cx="5501640" cy="1097281"/>
-          </a:xfrm>
-          <a:prstGeom prst="rect">
-            <a:avLst/>
-          </a:prstGeom>
-          <a:noFill/>
-        </p:spPr>
-        <p:txBody>
-          <a:bodyPr wrap="square" lIns="0" rIns="0">
-            <a:noAutofit/>
-          </a:bodyPr>
-          <a:lstStyle/>
-          <a:p>
-            <a:pPr algn="l"/>
-            <a:r>
-              <a:rPr sz="3400" b="0" i="0">
-                <a:solidFill>
-                  <a:srgbClr val="0A2240"/>
-                </a:solidFill>
-                <a:latin typeface="Arial"/>
-              </a:rPr>
-              <a:t>New markets through partnerships</a:t>
-            </a:r>
-          </a:p>
-        </p:txBody>
-      </p:sp>
-      <p:sp>
-        <p:nvSpPr>
-          <p:cNvPr id="15" name="TextBox 14"/>
-          <p:cNvSpPr/>
-          <p:nvPr>
-            <p:ph type="body" idx="13"/>
-          </p:nvPr>
-        </p:nvSpPr>
-        <p:spPr>
-          <a:xfrm>
-            <a:off x="6233160" y="3767328"/>
-            <a:ext cx="5501640" cy="621791"/>
-          </a:xfrm>
-          <a:prstGeom prst="rect">
-            <a:avLst/>
-          </a:prstGeom>
-          <a:noFill/>
-        </p:spPr>
-        <p:txBody>
-          <a:bodyPr wrap="none" lIns="0" rIns="0">
-            <a:noAutofit/>
-          </a:bodyPr>
-          <a:lstStyle/>
-          <a:p>
-            <a:pPr algn="l"/>
-            <a:r>
-              <a:rPr sz="3400" b="1" i="0">
-                <a:solidFill>
-                  <a:srgbClr val="5B6B82"/>
-                </a:solidFill>
-                <a:latin typeface="Arial"/>
-              </a:rPr>
-              <a:t>Threats</a:t>
-            </a:r>
-          </a:p>
-        </p:txBody>
-      </p:sp>
-      <p:sp>
-        <p:nvSpPr>
-          <p:cNvPr id="16" name="Rectangle 15"/>
-          <p:cNvSpPr/>
-          <p:nvPr>
-            <p:ph type="body" idx="14"/>
-          </p:nvPr>
-        </p:nvSpPr>
-        <p:spPr>
-          <a:xfrm>
-            <a:off x="6233160" y="4443983"/>
-            <a:ext cx="1650492" cy="54864"/>
-          </a:xfrm>
-          <a:prstGeom prst="rect">
-            <a:avLst/>
-          </a:prstGeom>
-          <a:solidFill>
-            <a:srgbClr val="5B6B82"/>
-          </a:solidFill>
-          <a:ln>
-            <a:noFill/>
-          </a:ln>
-          <a:effectLst/>
-        </p:spPr>
-        <p:txBody>
-          <a:bodyPr rtlCol="0" anchor="ctr"/>
-          <a:lstStyle/>
-          <a:p>
-            <a:pPr algn="ctr"/>
-          </a:p>
-        </p:txBody>
-      </p:sp>
-      <p:sp>
-        <p:nvSpPr>
-          <p:cNvPr id="17" name="TextBox 16"/>
-          <p:cNvSpPr/>
-          <p:nvPr>
-            <p:ph type="body" idx="15"/>
-          </p:nvPr>
-        </p:nvSpPr>
-        <p:spPr>
-          <a:xfrm>
-            <a:off x="6233160" y="4663439"/>
-            <a:ext cx="5501640" cy="1097281"/>
-          </a:xfrm>
-          <a:prstGeom prst="rect">
-            <a:avLst/>
-          </a:prstGeom>
-          <a:noFill/>
-        </p:spPr>
-        <p:txBody>
-          <a:bodyPr wrap="square" lIns="0" rIns="0">
-            <a:noAutofit/>
-          </a:bodyPr>
-          <a:lstStyle/>
-          <a:p>
-            <a:pPr algn="l"/>
-            <a:r>
-              <a:rPr sz="3400" b="0" i="0">
-                <a:solidFill>
-                  <a:srgbClr val="0A2240"/>
-                </a:solidFill>
-                <a:latin typeface="Arial"/>
-              </a:rPr>
-              <a:t>New entrants driving price pressure</a:t>
-            </a:r>
-          </a:p>
-        </p:txBody>
-      </p:sp>
-    </p:spTree>
-    <p:extLst>
-      <p:ext uri="{BB962C8B-B14F-4D97-AF65-F5344CB8AC3E}">
-        <p14:creationId xmlns:p14="http://schemas.microsoft.com/office/powerpoint/2010/main" val="1212999818"/>
-      </p:ext>
-    </p:extLst>
-  </p:cSld>
-  <p:clrMapOvr>
-    <a:masterClrMapping/>
-  </p:clrMapOvr>
-</p:sldLayout>
-</file>
-
-<file path=ppt/slideLayouts/slideLayout41.xml><?xml version="1.0" encoding="utf-8"?>
 <p:sldLayout xmlns:a="http://schemas.openxmlformats.org/drawingml/2006/main" xmlns:r="http://schemas.openxmlformats.org/officeDocument/2006/relationships" xmlns:p="http://schemas.openxmlformats.org/presentationml/2006/main" type="blank" preserve="1">
   <p:cSld name="slidekit · Comparison Matrix">
     <p:bg>
@@ -17225,7 +16567,6 @@
     <p:sldLayoutId id="2147483738" r:id="rId39"/>
     <p:sldLayoutId id="2147483739" r:id="rId40"/>
     <p:sldLayoutId id="2147483740" r:id="rId41"/>
-    <p:sldLayoutId id="2147483741" r:id="rId42"/>
   </p:sldLayoutIdLst>
   <p:txStyles>
     <p:titleStyle>
@@ -17624,46 +16965,35 @@
                 </a:solidFill>
                 <a:latin typeface="Arial"/>
               </a:rPr>
-              <a:t>Storage Is for Files</a:t>
-            </a:r>
-          </a:p>
-        </p:txBody>
-      </p:sp>
-      <p:sp>
-        <p:nvSpPr>
-          <p:cNvPr id="3" name="TextBox 2"/>
-          <p:cNvSpPr txBox="1"/>
+              <a:t>Two Ways to Make a Table</a:t>
+            </a:r>
+          </a:p>
+        </p:txBody>
+      </p:sp>
+      <p:pic>
+        <p:nvPicPr>
+          <p:cNvPr id="3" name="Picture 2" descr="sql-tab.png"/>
+          <p:cNvPicPr>
+            <a:picLocks noChangeAspect="1"/>
+          </p:cNvPicPr>
           <p:nvPr/>
-        </p:nvSpPr>
-        <p:spPr>
-          <a:xfrm>
-            <a:off x="457200" y="1908050"/>
-            <a:ext cx="11277600" cy="518159"/>
-          </a:xfrm>
-          <a:prstGeom prst="rect">
-            <a:avLst/>
-          </a:prstGeom>
-          <a:noFill/>
-        </p:spPr>
-        <p:txBody>
-          <a:bodyPr wrap="none" lIns="0" rIns="0">
-            <a:noAutofit/>
-          </a:bodyPr>
-          <a:lstStyle/>
-          <a:p>
-            <a:pPr algn="l"/>
-            <a:r>
-              <a:rPr sz="3400" b="0" i="0">
-                <a:solidFill>
-                  <a:srgbClr val="0A2240"/>
-                </a:solidFill>
-                <a:latin typeface="Arial"/>
-              </a:rPr>
-              <a:t>Profile photos</a:t>
-            </a:r>
-          </a:p>
-        </p:txBody>
-      </p:sp>
+        </p:nvPicPr>
+        <p:blipFill>
+          <a:blip r:embed="rId2"/>
+          <a:stretch>
+            <a:fillRect/>
+          </a:stretch>
+        </p:blipFill>
+        <p:spPr>
+          <a:xfrm>
+            <a:off x="6233160" y="1499616"/>
+            <a:ext cx="5501640" cy="4261104"/>
+          </a:xfrm>
+          <a:prstGeom prst="rect">
+            <a:avLst/>
+          </a:prstGeom>
+        </p:spPr>
+      </p:pic>
       <p:sp>
         <p:nvSpPr>
           <p:cNvPr id="4" name="TextBox 3"/>
@@ -17672,8 +17002,8 @@
         </p:nvSpPr>
         <p:spPr>
           <a:xfrm>
-            <a:off x="457200" y="2883409"/>
-            <a:ext cx="11277600" cy="518159"/>
+            <a:off x="457200" y="1499616"/>
+            <a:ext cx="7389555" cy="609600"/>
           </a:xfrm>
           <a:prstGeom prst="rect">
             <a:avLst/>
@@ -17694,7 +17024,7 @@
                 </a:solidFill>
                 <a:latin typeface="Arial"/>
               </a:rPr>
-              <a:t>Uploaded PDFs</a:t>
+              <a:t>Click in the Table Editor</a:t>
             </a:r>
           </a:p>
         </p:txBody>
@@ -17707,8 +17037,8 @@
         </p:nvSpPr>
         <p:spPr>
           <a:xfrm>
-            <a:off x="457200" y="3858768"/>
-            <a:ext cx="11277600" cy="518159"/>
+            <a:off x="457200" y="2383536"/>
+            <a:ext cx="5501640" cy="609600"/>
           </a:xfrm>
           <a:prstGeom prst="rect">
             <a:avLst/>
@@ -17729,7 +17059,7 @@
                 </a:solidFill>
                 <a:latin typeface="Arial"/>
               </a:rPr>
-              <a:t>Anything too big for a table</a:t>
+              <a:t>Or write it in SQL</a:t>
             </a:r>
           </a:p>
         </p:txBody>
@@ -17742,8 +17072,8 @@
         </p:nvSpPr>
         <p:spPr>
           <a:xfrm>
-            <a:off x="457200" y="4834127"/>
-            <a:ext cx="11277600" cy="518159"/>
+            <a:off x="457200" y="3267456"/>
+            <a:ext cx="5583078" cy="609600"/>
           </a:xfrm>
           <a:prstGeom prst="rect">
             <a:avLst/>
@@ -17764,7 +17094,7 @@
                 </a:solidFill>
                 <a:latin typeface="Arial"/>
               </a:rPr>
-              <a:t>Same access rules as the data</a:t>
+              <a:t>We will write SQL</a:t>
             </a:r>
           </a:p>
         </p:txBody>
@@ -17797,12 +17127,48 @@
             <a:fld id="{4B0E1F8A-6C1D-4E2A-9F3B-7A5C8D2E1F60}" type="slidenum">
               <a:rPr sz="1600" b="0" i="0">
                 <a:solidFill>
-                  <a:srgbClr val="5B6B82"/>
+                  <a:srgbClr val="0A2240"/>
                 </a:solidFill>
                 <a:latin typeface="Arial"/>
               </a:rPr>
               <a:t>10</a:t>
             </a:fld>
+          </a:p>
+        </p:txBody>
+      </p:sp>
+      <p:sp>
+        <p:nvSpPr>
+          <p:cNvPr id="8" name="TextBox 7"/>
+          <p:cNvSpPr txBox="1"/>
+          <p:nvPr/>
+        </p:nvSpPr>
+        <p:spPr>
+          <a:xfrm>
+            <a:off x="10085130" y="6035040"/>
+            <a:ext cx="1213008" cy="365760"/>
+          </a:xfrm>
+          <a:prstGeom prst="rect">
+            <a:avLst/>
+          </a:prstGeom>
+          <a:noFill/>
+        </p:spPr>
+        <p:txBody>
+          <a:bodyPr wrap="none" lIns="0" rIns="0">
+            <a:noAutofit/>
+          </a:bodyPr>
+          <a:lstStyle/>
+          <a:p>
+            <a:pPr algn="l"/>
+            <a:r>
+              <a:rPr sz="1600" b="0" i="0" u="sng">
+                <a:solidFill>
+                  <a:srgbClr val="0072CE"/>
+                </a:solidFill>
+                <a:latin typeface="Arial"/>
+                <a:hlinkClick r:id="rId3"/>
+              </a:rPr>
+              <a:t>Source</a:t>
+            </a:r>
           </a:p>
         </p:txBody>
       </p:sp>
@@ -17834,20 +17200,258 @@
       <p:grpSpPr/>
       <p:sp>
         <p:nvSpPr>
+          <p:cNvPr id="2" name="TextBox 1"/>
+          <p:cNvSpPr txBox="1"/>
+          <p:nvPr/>
+        </p:nvSpPr>
+        <p:spPr>
+          <a:xfrm>
+            <a:off x="457200" y="457200"/>
+            <a:ext cx="11277600" cy="768096"/>
+          </a:xfrm>
+          <a:prstGeom prst="rect">
+            <a:avLst/>
+          </a:prstGeom>
+          <a:noFill/>
+        </p:spPr>
+        <p:txBody>
+          <a:bodyPr wrap="none" lIns="0" rIns="0">
+            <a:noAutofit/>
+          </a:bodyPr>
+          <a:lstStyle/>
+          <a:p>
+            <a:pPr algn="l"/>
+            <a:r>
+              <a:rPr sz="4200" b="1" i="0">
+                <a:solidFill>
+                  <a:srgbClr val="0072CE"/>
+                </a:solidFill>
+                <a:latin typeface="Arial"/>
+              </a:rPr>
+              <a:t>Why We Use SQL</a:t>
+            </a:r>
+          </a:p>
+        </p:txBody>
+      </p:sp>
+      <p:sp>
+        <p:nvSpPr>
+          <p:cNvPr id="3" name="TextBox 2"/>
+          <p:cNvSpPr txBox="1"/>
+          <p:nvPr/>
+        </p:nvSpPr>
+        <p:spPr>
+          <a:xfrm>
+            <a:off x="457200" y="1908050"/>
+            <a:ext cx="11277600" cy="518159"/>
+          </a:xfrm>
+          <a:prstGeom prst="rect">
+            <a:avLst/>
+          </a:prstGeom>
+          <a:noFill/>
+        </p:spPr>
+        <p:txBody>
+          <a:bodyPr wrap="none" lIns="0" rIns="0">
+            <a:noAutofit/>
+          </a:bodyPr>
+          <a:lstStyle/>
+          <a:p>
+            <a:pPr algn="l"/>
+            <a:r>
+              <a:rPr sz="3400" b="0" i="0">
+                <a:solidFill>
+                  <a:srgbClr val="0A2240"/>
+                </a:solidFill>
+                <a:latin typeface="Arial"/>
+              </a:rPr>
+              <a:t>It is written down, so it repeats</a:t>
+            </a:r>
+          </a:p>
+        </p:txBody>
+      </p:sp>
+      <p:sp>
+        <p:nvSpPr>
+          <p:cNvPr id="4" name="TextBox 3"/>
+          <p:cNvSpPr txBox="1"/>
+          <p:nvPr/>
+        </p:nvSpPr>
+        <p:spPr>
+          <a:xfrm>
+            <a:off x="457200" y="2883409"/>
+            <a:ext cx="11277600" cy="518159"/>
+          </a:xfrm>
+          <a:prstGeom prst="rect">
+            <a:avLst/>
+          </a:prstGeom>
+          <a:noFill/>
+        </p:spPr>
+        <p:txBody>
+          <a:bodyPr wrap="none" lIns="0" rIns="0">
+            <a:noAutofit/>
+          </a:bodyPr>
+          <a:lstStyle/>
+          <a:p>
+            <a:pPr algn="l"/>
+            <a:r>
+              <a:rPr sz="3400" b="0" i="0">
+                <a:solidFill>
+                  <a:srgbClr val="0A2240"/>
+                </a:solidFill>
+                <a:latin typeface="Arial"/>
+              </a:rPr>
+              <a:t>It can live in git as a migration</a:t>
+            </a:r>
+          </a:p>
+        </p:txBody>
+      </p:sp>
+      <p:sp>
+        <p:nvSpPr>
+          <p:cNvPr id="5" name="TextBox 4"/>
+          <p:cNvSpPr txBox="1"/>
+          <p:nvPr/>
+        </p:nvSpPr>
+        <p:spPr>
+          <a:xfrm>
+            <a:off x="457200" y="3858768"/>
+            <a:ext cx="11277600" cy="518159"/>
+          </a:xfrm>
+          <a:prstGeom prst="rect">
+            <a:avLst/>
+          </a:prstGeom>
+          <a:noFill/>
+        </p:spPr>
+        <p:txBody>
+          <a:bodyPr wrap="none" lIns="0" rIns="0">
+            <a:noAutofit/>
+          </a:bodyPr>
+          <a:lstStyle/>
+          <a:p>
+            <a:pPr algn="l"/>
+            <a:r>
+              <a:rPr sz="3400" b="0" i="0">
+                <a:solidFill>
+                  <a:srgbClr val="0A2240"/>
+                </a:solidFill>
+                <a:latin typeface="Arial"/>
+              </a:rPr>
+              <a:t>Claude writes it, you review it</a:t>
+            </a:r>
+          </a:p>
+        </p:txBody>
+      </p:sp>
+      <p:sp>
+        <p:nvSpPr>
+          <p:cNvPr id="6" name="TextBox 5"/>
+          <p:cNvSpPr txBox="1"/>
+          <p:nvPr/>
+        </p:nvSpPr>
+        <p:spPr>
+          <a:xfrm>
+            <a:off x="457200" y="4834127"/>
+            <a:ext cx="11277600" cy="518159"/>
+          </a:xfrm>
+          <a:prstGeom prst="rect">
+            <a:avLst/>
+          </a:prstGeom>
+          <a:noFill/>
+        </p:spPr>
+        <p:txBody>
+          <a:bodyPr wrap="none" lIns="0" rIns="0">
+            <a:noAutofit/>
+          </a:bodyPr>
+          <a:lstStyle/>
+          <a:p>
+            <a:pPr algn="l"/>
+            <a:r>
+              <a:rPr sz="3400" b="0" i="0">
+                <a:solidFill>
+                  <a:srgbClr val="0A2240"/>
+                </a:solidFill>
+                <a:latin typeface="Arial"/>
+              </a:rPr>
+              <a:t>It reaches every Postgres type</a:t>
+            </a:r>
+          </a:p>
+        </p:txBody>
+      </p:sp>
+      <p:sp>
+        <p:nvSpPr>
+          <p:cNvPr id="7" name="TextBox 6"/>
+          <p:cNvSpPr/>
+          <p:nvPr>
+            <p:ph type="sldNum" idx="12"/>
+          </p:nvPr>
+        </p:nvSpPr>
+        <p:spPr>
+          <a:xfrm>
+            <a:off x="11186160" y="6035040"/>
+            <a:ext cx="548640" cy="365760"/>
+          </a:xfrm>
+          <a:prstGeom prst="rect">
+            <a:avLst/>
+          </a:prstGeom>
+          <a:noFill/>
+        </p:spPr>
+        <p:txBody>
+          <a:bodyPr wrap="none" lIns="0" rIns="0">
+            <a:noAutofit/>
+          </a:bodyPr>
+          <a:lstStyle/>
+          <a:p>
+            <a:pPr algn="r"/>
+            <a:fld id="{4B0E1F8A-6C1D-4E2A-9F3B-7A5C8D2E1F60}" type="slidenum">
+              <a:rPr sz="1600" b="0" i="0">
+                <a:solidFill>
+                  <a:srgbClr val="0A2240"/>
+                </a:solidFill>
+                <a:latin typeface="Arial"/>
+              </a:rPr>
+              <a:t>11</a:t>
+            </a:fld>
+          </a:p>
+        </p:txBody>
+      </p:sp>
+    </p:spTree>
+  </p:cSld>
+  <p:clrMapOvr>
+    <a:masterClrMapping/>
+  </p:clrMapOvr>
+</p:sld>
+</file>
+
+<file path=ppt/slides/slide12.xml><?xml version="1.0" encoding="utf-8"?>
+<p:sld xmlns:a="http://schemas.openxmlformats.org/drawingml/2006/main" xmlns:p="http://schemas.openxmlformats.org/presentationml/2006/main" xmlns:r="http://schemas.openxmlformats.org/officeDocument/2006/relationships" showMasterSp="0">
+  <p:cSld>
+    <p:bg>
+      <p:bgPr>
+        <a:solidFill>
+          <a:srgbClr val="0C1A1C"/>
+        </a:solidFill>
+        <a:effectLst/>
+      </p:bgPr>
+    </p:bg>
+    <p:spTree>
+      <p:nvGrpSpPr>
+        <p:cNvPr id="1" name=""/>
+        <p:cNvGrpSpPr/>
+        <p:nvPr/>
+      </p:nvGrpSpPr>
+      <p:grpSpPr/>
+      <p:sp>
+        <p:nvSpPr>
           <p:cNvPr id="2" name="Rectangle 1"/>
           <p:cNvSpPr/>
           <p:nvPr/>
         </p:nvSpPr>
         <p:spPr>
           <a:xfrm>
-            <a:off x="457200" y="2484120"/>
-            <a:ext cx="128016" cy="1889760"/>
+            <a:off x="457200" y="457200"/>
+            <a:ext cx="146304" cy="146304"/>
           </a:xfrm>
           <a:prstGeom prst="rect">
             <a:avLst/>
           </a:prstGeom>
           <a:solidFill>
-            <a:srgbClr val="0072CE"/>
+            <a:srgbClr val="FFFFFF"/>
           </a:solidFill>
           <a:ln>
             <a:noFill/>
@@ -17878,49 +17482,137 @@
       </p:sp>
       <p:sp>
         <p:nvSpPr>
-          <p:cNvPr id="3" name="TextBox 2"/>
+          <p:cNvPr id="3" name="Rectangle 2"/>
+          <p:cNvSpPr/>
+          <p:nvPr/>
+        </p:nvSpPr>
+        <p:spPr>
+          <a:xfrm>
+            <a:off x="713232" y="457200"/>
+            <a:ext cx="146304" cy="146304"/>
+          </a:xfrm>
+          <a:prstGeom prst="rect">
+            <a:avLst/>
+          </a:prstGeom>
+          <a:solidFill>
+            <a:srgbClr val="FFFFFF"/>
+          </a:solidFill>
+          <a:ln>
+            <a:noFill/>
+          </a:ln>
+          <a:effectLst/>
+        </p:spPr>
+        <p:style>
+          <a:lnRef idx="1">
+            <a:schemeClr val="accent1"/>
+          </a:lnRef>
+          <a:fillRef idx="3">
+            <a:schemeClr val="accent1"/>
+          </a:fillRef>
+          <a:effectRef idx="2">
+            <a:schemeClr val="accent1"/>
+          </a:effectRef>
+          <a:fontRef idx="minor">
+            <a:schemeClr val="lt1"/>
+          </a:fontRef>
+        </p:style>
+        <p:txBody>
+          <a:bodyPr rtlCol="0" anchor="ctr"/>
+          <a:lstStyle/>
+          <a:p>
+            <a:pPr algn="ctr"/>
+          </a:p>
+        </p:txBody>
+      </p:sp>
+      <p:sp>
+        <p:nvSpPr>
+          <p:cNvPr id="4" name="Rectangle 3"/>
+          <p:cNvSpPr/>
+          <p:nvPr/>
+        </p:nvSpPr>
+        <p:spPr>
+          <a:xfrm>
+            <a:off x="969264" y="457200"/>
+            <a:ext cx="146304" cy="146304"/>
+          </a:xfrm>
+          <a:prstGeom prst="rect">
+            <a:avLst/>
+          </a:prstGeom>
+          <a:solidFill>
+            <a:srgbClr val="FFFFFF"/>
+          </a:solidFill>
+          <a:ln>
+            <a:noFill/>
+          </a:ln>
+          <a:effectLst/>
+        </p:spPr>
+        <p:style>
+          <a:lnRef idx="1">
+            <a:schemeClr val="accent1"/>
+          </a:lnRef>
+          <a:fillRef idx="3">
+            <a:schemeClr val="accent1"/>
+          </a:fillRef>
+          <a:effectRef idx="2">
+            <a:schemeClr val="accent1"/>
+          </a:effectRef>
+          <a:fontRef idx="minor">
+            <a:schemeClr val="lt1"/>
+          </a:fontRef>
+        </p:style>
+        <p:txBody>
+          <a:bodyPr rtlCol="0" anchor="ctr"/>
+          <a:lstStyle/>
+          <a:p>
+            <a:pPr algn="ctr"/>
+          </a:p>
+        </p:txBody>
+      </p:sp>
+      <p:sp>
+        <p:nvSpPr>
+          <p:cNvPr id="5" name="TextBox 4"/>
           <p:cNvSpPr txBox="1"/>
           <p:nvPr/>
         </p:nvSpPr>
         <p:spPr>
           <a:xfrm>
-            <a:off x="996696" y="2484120"/>
-            <a:ext cx="10738104" cy="1005840"/>
-          </a:xfrm>
-          <a:prstGeom prst="rect">
-            <a:avLst/>
-          </a:prstGeom>
-          <a:noFill/>
-        </p:spPr>
-        <p:txBody>
-          <a:bodyPr wrap="none" lIns="0" rIns="0">
-            <a:noAutofit/>
-          </a:bodyPr>
-          <a:lstStyle/>
-          <a:p>
-            <a:pPr algn="l"/>
-            <a:r>
-              <a:rPr sz="6000" b="1" i="0">
-                <a:solidFill>
-                  <a:srgbClr val="0072CE"/>
-                </a:solidFill>
-                <a:latin typeface="Arial"/>
-              </a:rPr>
-              <a:t>API</a:t>
-            </a:r>
-          </a:p>
-        </p:txBody>
-      </p:sp>
-      <p:sp>
-        <p:nvSpPr>
-          <p:cNvPr id="4" name="TextBox 3"/>
+            <a:off x="457200" y="923544"/>
+            <a:ext cx="11277600" cy="640080"/>
+          </a:xfrm>
+          <a:prstGeom prst="rect">
+            <a:avLst/>
+          </a:prstGeom>
+          <a:noFill/>
+        </p:spPr>
+        <p:txBody>
+          <a:bodyPr wrap="none" lIns="0" rIns="0">
+            <a:noAutofit/>
+          </a:bodyPr>
+          <a:lstStyle/>
+          <a:p>
+            <a:pPr algn="l"/>
+            <a:r>
+              <a:rPr sz="4200" b="0" i="0">
+                <a:solidFill>
+                  <a:srgbClr val="FFFFFF"/>
+                </a:solidFill>
+                <a:latin typeface="Arial"/>
+              </a:rPr>
+              <a:t>A first table, in SQL</a:t>
+            </a:r>
+          </a:p>
+        </p:txBody>
+      </p:sp>
+      <p:sp>
+        <p:nvSpPr>
+          <p:cNvPr id="6" name="TextBox 5"/>
           <p:cNvSpPr txBox="1"/>
           <p:nvPr/>
         </p:nvSpPr>
         <p:spPr>
           <a:xfrm>
-            <a:off x="996696" y="3764280"/>
-            <a:ext cx="11195304" cy="609600"/>
+            <a:off x="457200" y="1837944"/>
+            <a:ext cx="6097190" cy="518159"/>
           </a:xfrm>
           <a:prstGeom prst="rect">
             <a:avLst/>
@@ -17937,18 +17629,403 @@
             <a:r>
               <a:rPr sz="3400" b="0" i="0">
                 <a:solidFill>
-                  <a:srgbClr val="0A2240"/>
-                </a:solidFill>
-                <a:latin typeface="Arial"/>
-              </a:rPr>
-              <a:t>How your page talks to the database</a:t>
-            </a:r>
-          </a:p>
-        </p:txBody>
-      </p:sp>
-      <p:sp>
-        <p:nvSpPr>
-          <p:cNvPr id="5" name="TextBox 4"/>
+                  <a:srgbClr val="FFFFFF"/>
+                </a:solidFill>
+                <a:latin typeface="Arial"/>
+              </a:rPr>
+              <a:t>create table notes (</a:t>
+            </a:r>
+          </a:p>
+        </p:txBody>
+      </p:sp>
+      <p:sp>
+        <p:nvSpPr>
+          <p:cNvPr id="7" name="TextBox 6"/>
+          <p:cNvSpPr txBox="1"/>
+          <p:nvPr/>
+        </p:nvSpPr>
+        <p:spPr>
+          <a:xfrm>
+            <a:off x="457200" y="2356103"/>
+            <a:ext cx="9439592" cy="518159"/>
+          </a:xfrm>
+          <a:prstGeom prst="rect">
+            <a:avLst/>
+          </a:prstGeom>
+          <a:noFill/>
+        </p:spPr>
+        <p:txBody>
+          <a:bodyPr wrap="none" lIns="0" rIns="0">
+            <a:noAutofit/>
+          </a:bodyPr>
+          <a:lstStyle/>
+          <a:p>
+            <a:pPr algn="l"/>
+            <a:r>
+              <a:rPr sz="3400" b="0" i="0">
+                <a:solidFill>
+                  <a:srgbClr val="FFFFFF"/>
+                </a:solidFill>
+                <a:latin typeface="Arial"/>
+              </a:rPr>
+              <a:t>  id bigint generated by default</a:t>
+            </a:r>
+          </a:p>
+        </p:txBody>
+      </p:sp>
+      <p:sp>
+        <p:nvSpPr>
+          <p:cNvPr id="8" name="TextBox 7"/>
+          <p:cNvSpPr txBox="1"/>
+          <p:nvPr/>
+        </p:nvSpPr>
+        <p:spPr>
+          <a:xfrm>
+            <a:off x="457200" y="2874262"/>
+            <a:ext cx="662751" cy="518159"/>
+          </a:xfrm>
+          <a:prstGeom prst="rect">
+            <a:avLst/>
+          </a:prstGeom>
+          <a:noFill/>
+        </p:spPr>
+        <p:txBody>
+          <a:bodyPr wrap="none" lIns="0" rIns="0">
+            <a:noAutofit/>
+          </a:bodyPr>
+          <a:lstStyle/>
+          <a:p>
+            <a:pPr algn="l"/>
+            <a:r>
+              <a:rPr sz="3400" b="0" i="0">
+                <a:solidFill>
+                  <a:srgbClr val="FFFFFF"/>
+                </a:solidFill>
+                <a:latin typeface="Arial"/>
+              </a:rPr>
+              <a:t>    </a:t>
+            </a:r>
+          </a:p>
+        </p:txBody>
+      </p:sp>
+      <p:sp>
+        <p:nvSpPr>
+          <p:cNvPr id="9" name="TextBox 8"/>
+          <p:cNvSpPr txBox="1"/>
+          <p:nvPr/>
+        </p:nvSpPr>
+        <p:spPr>
+          <a:xfrm>
+            <a:off x="937071" y="2874262"/>
+            <a:ext cx="912555" cy="518159"/>
+          </a:xfrm>
+          <a:prstGeom prst="rect">
+            <a:avLst/>
+          </a:prstGeom>
+          <a:noFill/>
+        </p:spPr>
+        <p:txBody>
+          <a:bodyPr wrap="none" lIns="0" rIns="0">
+            <a:noAutofit/>
+          </a:bodyPr>
+          <a:lstStyle/>
+          <a:p>
+            <a:pPr algn="l"/>
+            <a:r>
+              <a:rPr sz="3400" b="0" i="0">
+                <a:solidFill>
+                  <a:srgbClr val="569CD6"/>
+                </a:solidFill>
+                <a:latin typeface="Arial"/>
+              </a:rPr>
+              <a:t>as</a:t>
+            </a:r>
+          </a:p>
+        </p:txBody>
+      </p:sp>
+      <p:sp>
+        <p:nvSpPr>
+          <p:cNvPr id="10" name="TextBox 9"/>
+          <p:cNvSpPr txBox="1"/>
+          <p:nvPr/>
+        </p:nvSpPr>
+        <p:spPr>
+          <a:xfrm>
+            <a:off x="1393118" y="2874262"/>
+            <a:ext cx="6466582" cy="518159"/>
+          </a:xfrm>
+          <a:prstGeom prst="rect">
+            <a:avLst/>
+          </a:prstGeom>
+          <a:noFill/>
+        </p:spPr>
+        <p:txBody>
+          <a:bodyPr wrap="none" lIns="0" rIns="0">
+            <a:noAutofit/>
+          </a:bodyPr>
+          <a:lstStyle/>
+          <a:p>
+            <a:pPr algn="l"/>
+            <a:r>
+              <a:rPr sz="3400" b="0" i="0">
+                <a:solidFill>
+                  <a:srgbClr val="FFFFFF"/>
+                </a:solidFill>
+                <a:latin typeface="Arial"/>
+              </a:rPr>
+              <a:t> identity primary key,</a:t>
+            </a:r>
+          </a:p>
+        </p:txBody>
+      </p:sp>
+      <p:sp>
+        <p:nvSpPr>
+          <p:cNvPr id="11" name="TextBox 10"/>
+          <p:cNvSpPr txBox="1"/>
+          <p:nvPr/>
+        </p:nvSpPr>
+        <p:spPr>
+          <a:xfrm>
+            <a:off x="457200" y="3392421"/>
+            <a:ext cx="3562390" cy="518159"/>
+          </a:xfrm>
+          <a:prstGeom prst="rect">
+            <a:avLst/>
+          </a:prstGeom>
+          <a:noFill/>
+        </p:spPr>
+        <p:txBody>
+          <a:bodyPr wrap="none" lIns="0" rIns="0">
+            <a:noAutofit/>
+          </a:bodyPr>
+          <a:lstStyle/>
+          <a:p>
+            <a:pPr algn="l"/>
+            <a:r>
+              <a:rPr sz="3400" b="0" i="0">
+                <a:solidFill>
+                  <a:srgbClr val="FFFFFF"/>
+                </a:solidFill>
+                <a:latin typeface="Arial"/>
+              </a:rPr>
+              <a:t>  body text </a:t>
+            </a:r>
+          </a:p>
+        </p:txBody>
+      </p:sp>
+      <p:sp>
+        <p:nvSpPr>
+          <p:cNvPr id="12" name="TextBox 11"/>
+          <p:cNvSpPr txBox="1"/>
+          <p:nvPr/>
+        </p:nvSpPr>
+        <p:spPr>
+          <a:xfrm>
+            <a:off x="2569394" y="3392421"/>
+            <a:ext cx="1143297" cy="518159"/>
+          </a:xfrm>
+          <a:prstGeom prst="rect">
+            <a:avLst/>
+          </a:prstGeom>
+          <a:noFill/>
+        </p:spPr>
+        <p:txBody>
+          <a:bodyPr wrap="none" lIns="0" rIns="0">
+            <a:noAutofit/>
+          </a:bodyPr>
+          <a:lstStyle/>
+          <a:p>
+            <a:pPr algn="l"/>
+            <a:r>
+              <a:rPr sz="3400" b="0" i="0">
+                <a:solidFill>
+                  <a:srgbClr val="569CD6"/>
+                </a:solidFill>
+                <a:latin typeface="Arial"/>
+              </a:rPr>
+              <a:t>not</a:t>
+            </a:r>
+          </a:p>
+        </p:txBody>
+      </p:sp>
+      <p:sp>
+        <p:nvSpPr>
+          <p:cNvPr id="13" name="TextBox 12"/>
+          <p:cNvSpPr txBox="1"/>
+          <p:nvPr/>
+        </p:nvSpPr>
+        <p:spPr>
+          <a:xfrm>
+            <a:off x="3169655" y="3392421"/>
+            <a:ext cx="1642228" cy="518159"/>
+          </a:xfrm>
+          <a:prstGeom prst="rect">
+            <a:avLst/>
+          </a:prstGeom>
+          <a:noFill/>
+        </p:spPr>
+        <p:txBody>
+          <a:bodyPr wrap="none" lIns="0" rIns="0">
+            <a:noAutofit/>
+          </a:bodyPr>
+          <a:lstStyle/>
+          <a:p>
+            <a:pPr algn="l"/>
+            <a:r>
+              <a:rPr sz="3400" b="0" i="0">
+                <a:solidFill>
+                  <a:srgbClr val="FFFFFF"/>
+                </a:solidFill>
+                <a:latin typeface="Arial"/>
+              </a:rPr>
+              <a:t> null,</a:t>
+            </a:r>
+          </a:p>
+        </p:txBody>
+      </p:sp>
+      <p:sp>
+        <p:nvSpPr>
+          <p:cNvPr id="14" name="TextBox 13"/>
+          <p:cNvSpPr txBox="1"/>
+          <p:nvPr/>
+        </p:nvSpPr>
+        <p:spPr>
+          <a:xfrm>
+            <a:off x="457200" y="3910580"/>
+            <a:ext cx="11734800" cy="518159"/>
+          </a:xfrm>
+          <a:prstGeom prst="rect">
+            <a:avLst/>
+          </a:prstGeom>
+          <a:noFill/>
+        </p:spPr>
+        <p:txBody>
+          <a:bodyPr wrap="none" lIns="0" rIns="0">
+            <a:noAutofit/>
+          </a:bodyPr>
+          <a:lstStyle/>
+          <a:p>
+            <a:pPr algn="l"/>
+            <a:r>
+              <a:rPr sz="3400" b="0" i="0">
+                <a:solidFill>
+                  <a:srgbClr val="FFFFFF"/>
+                </a:solidFill>
+                <a:latin typeface="Arial"/>
+              </a:rPr>
+              <a:t>  created_at timestamptz default now()</a:t>
+            </a:r>
+          </a:p>
+        </p:txBody>
+      </p:sp>
+      <p:sp>
+        <p:nvSpPr>
+          <p:cNvPr id="15" name="TextBox 14"/>
+          <p:cNvSpPr txBox="1"/>
+          <p:nvPr/>
+        </p:nvSpPr>
+        <p:spPr>
+          <a:xfrm>
+            <a:off x="457200" y="4428739"/>
+            <a:ext cx="604897" cy="518159"/>
+          </a:xfrm>
+          <a:prstGeom prst="rect">
+            <a:avLst/>
+          </a:prstGeom>
+          <a:noFill/>
+        </p:spPr>
+        <p:txBody>
+          <a:bodyPr wrap="none" lIns="0" rIns="0">
+            <a:noAutofit/>
+          </a:bodyPr>
+          <a:lstStyle/>
+          <a:p>
+            <a:pPr algn="l"/>
+            <a:r>
+              <a:rPr sz="3400" b="0" i="0">
+                <a:solidFill>
+                  <a:srgbClr val="FFFFFF"/>
+                </a:solidFill>
+                <a:latin typeface="Arial"/>
+              </a:rPr>
+              <a:t>);</a:t>
+            </a:r>
+          </a:p>
+        </p:txBody>
+      </p:sp>
+      <p:sp>
+        <p:nvSpPr>
+          <p:cNvPr id="16" name="TextBox 15"/>
+          <p:cNvSpPr txBox="1"/>
+          <p:nvPr/>
+        </p:nvSpPr>
+        <p:spPr>
+          <a:xfrm>
+            <a:off x="457200" y="4946898"/>
+            <a:ext cx="5098990" cy="518159"/>
+          </a:xfrm>
+          <a:prstGeom prst="rect">
+            <a:avLst/>
+          </a:prstGeom>
+          <a:noFill/>
+        </p:spPr>
+        <p:txBody>
+          <a:bodyPr wrap="none" lIns="0" rIns="0">
+            <a:noAutofit/>
+          </a:bodyPr>
+          <a:lstStyle/>
+          <a:p>
+            <a:pPr algn="l"/>
+            <a:r>
+              <a:rPr sz="3400" b="0" i="0">
+                <a:solidFill>
+                  <a:srgbClr val="FFFFFF"/>
+                </a:solidFill>
+                <a:latin typeface="Arial"/>
+              </a:rPr>
+              <a:t>alter table notes</a:t>
+            </a:r>
+          </a:p>
+        </p:txBody>
+      </p:sp>
+      <p:sp>
+        <p:nvSpPr>
+          <p:cNvPr id="17" name="TextBox 16"/>
+          <p:cNvSpPr txBox="1"/>
+          <p:nvPr/>
+        </p:nvSpPr>
+        <p:spPr>
+          <a:xfrm>
+            <a:off x="457200" y="5465057"/>
+            <a:ext cx="8323659" cy="518159"/>
+          </a:xfrm>
+          <a:prstGeom prst="rect">
+            <a:avLst/>
+          </a:prstGeom>
+          <a:noFill/>
+        </p:spPr>
+        <p:txBody>
+          <a:bodyPr wrap="none" lIns="0" rIns="0">
+            <a:noAutofit/>
+          </a:bodyPr>
+          <a:lstStyle/>
+          <a:p>
+            <a:pPr algn="l"/>
+            <a:r>
+              <a:rPr sz="3400" b="0" i="0">
+                <a:solidFill>
+                  <a:srgbClr val="FFFFFF"/>
+                </a:solidFill>
+                <a:latin typeface="Arial"/>
+              </a:rPr>
+              <a:t>  enable row level security;</a:t>
+            </a:r>
+          </a:p>
+        </p:txBody>
+      </p:sp>
+      <p:sp>
+        <p:nvSpPr>
+          <p:cNvPr id="18" name="TextBox 17"/>
           <p:cNvSpPr/>
           <p:nvPr>
             <p:ph type="sldNum" idx="12"/>
@@ -17974,280 +18051,7 @@
             <a:fld id="{4B0E1F8A-6C1D-4E2A-9F3B-7A5C8D2E1F60}" type="slidenum">
               <a:rPr sz="1600" b="0" i="0">
                 <a:solidFill>
-                  <a:srgbClr val="5B6B82"/>
-                </a:solidFill>
-                <a:latin typeface="Arial"/>
-              </a:rPr>
-              <a:t>11</a:t>
-            </a:fld>
-          </a:p>
-        </p:txBody>
-      </p:sp>
-    </p:spTree>
-  </p:cSld>
-  <p:clrMapOvr>
-    <a:masterClrMapping/>
-  </p:clrMapOvr>
-</p:sld>
-</file>
-
-<file path=ppt/slides/slide12.xml><?xml version="1.0" encoding="utf-8"?>
-<p:sld xmlns:a="http://schemas.openxmlformats.org/drawingml/2006/main" xmlns:p="http://schemas.openxmlformats.org/presentationml/2006/main" xmlns:r="http://schemas.openxmlformats.org/officeDocument/2006/relationships" showMasterSp="0">
-  <p:cSld>
-    <p:bg>
-      <p:bgPr>
-        <a:solidFill>
-          <a:srgbClr val="FFFFFF"/>
-        </a:solidFill>
-        <a:effectLst/>
-      </p:bgPr>
-    </p:bg>
-    <p:spTree>
-      <p:nvGrpSpPr>
-        <p:cNvPr id="1" name=""/>
-        <p:cNvGrpSpPr/>
-        <p:nvPr/>
-      </p:nvGrpSpPr>
-      <p:grpSpPr/>
-      <p:sp>
-        <p:nvSpPr>
-          <p:cNvPr id="2" name="TextBox 1"/>
-          <p:cNvSpPr txBox="1"/>
-          <p:nvPr/>
-        </p:nvSpPr>
-        <p:spPr>
-          <a:xfrm>
-            <a:off x="457200" y="457200"/>
-            <a:ext cx="11277600" cy="768096"/>
-          </a:xfrm>
-          <a:prstGeom prst="rect">
-            <a:avLst/>
-          </a:prstGeom>
-          <a:noFill/>
-        </p:spPr>
-        <p:txBody>
-          <a:bodyPr wrap="none" lIns="0" rIns="0">
-            <a:noAutofit/>
-          </a:bodyPr>
-          <a:lstStyle/>
-          <a:p>
-            <a:pPr algn="l"/>
-            <a:r>
-              <a:rPr sz="4200" b="1" i="0">
-                <a:solidFill>
-                  <a:srgbClr val="0072CE"/>
-                </a:solidFill>
-                <a:latin typeface="Arial"/>
-              </a:rPr>
-              <a:t>Why People Use It</a:t>
-            </a:r>
-          </a:p>
-        </p:txBody>
-      </p:sp>
-      <p:sp>
-        <p:nvSpPr>
-          <p:cNvPr id="3" name="TextBox 2"/>
-          <p:cNvSpPr txBox="1"/>
-          <p:nvPr/>
-        </p:nvSpPr>
-        <p:spPr>
-          <a:xfrm>
-            <a:off x="457200" y="2776728"/>
-            <a:ext cx="4792980" cy="914400"/>
-          </a:xfrm>
-          <a:prstGeom prst="rect">
-            <a:avLst/>
-          </a:prstGeom>
-          <a:noFill/>
-        </p:spPr>
-        <p:txBody>
-          <a:bodyPr wrap="none" lIns="0" rIns="0">
-            <a:noAutofit/>
-          </a:bodyPr>
-          <a:lstStyle/>
-          <a:p>
-            <a:pPr algn="ctr"/>
-            <a:r>
-              <a:rPr sz="6000" b="1" i="0">
-                <a:solidFill>
                   <a:srgbClr val="0A2240"/>
-                </a:solidFill>
-                <a:latin typeface="Arial"/>
-              </a:rPr>
-              <a:t>Server</a:t>
-            </a:r>
-          </a:p>
-        </p:txBody>
-      </p:sp>
-      <p:sp>
-        <p:nvSpPr>
-          <p:cNvPr id="4" name="TextBox 3"/>
-          <p:cNvSpPr txBox="1"/>
-          <p:nvPr/>
-        </p:nvSpPr>
-        <p:spPr>
-          <a:xfrm>
-            <a:off x="0" y="3965448"/>
-            <a:ext cx="5707380" cy="518159"/>
-          </a:xfrm>
-          <a:prstGeom prst="rect">
-            <a:avLst/>
-          </a:prstGeom>
-          <a:noFill/>
-        </p:spPr>
-        <p:txBody>
-          <a:bodyPr wrap="none" lIns="0" rIns="0">
-            <a:noAutofit/>
-          </a:bodyPr>
-          <a:lstStyle/>
-          <a:p>
-            <a:pPr algn="ctr"/>
-            <a:r>
-              <a:rPr sz="3400" b="0" i="0">
-                <a:solidFill>
-                  <a:srgbClr val="0A2240"/>
-                </a:solidFill>
-                <a:latin typeface="Arial"/>
-              </a:rPr>
-              <a:t>You build and run it</a:t>
-            </a:r>
-          </a:p>
-        </p:txBody>
-      </p:sp>
-      <p:sp>
-        <p:nvSpPr>
-          <p:cNvPr id="5" name="TextBox 4"/>
-          <p:cNvSpPr txBox="1"/>
-          <p:nvPr/>
-        </p:nvSpPr>
-        <p:spPr>
-          <a:xfrm>
-            <a:off x="6484620" y="2776728"/>
-            <a:ext cx="5707380" cy="914400"/>
-          </a:xfrm>
-          <a:prstGeom prst="rect">
-            <a:avLst/>
-          </a:prstGeom>
-          <a:noFill/>
-        </p:spPr>
-        <p:txBody>
-          <a:bodyPr wrap="none" lIns="0" rIns="0">
-            <a:noAutofit/>
-          </a:bodyPr>
-          <a:lstStyle/>
-          <a:p>
-            <a:pPr algn="ctr"/>
-            <a:r>
-              <a:rPr sz="6000" b="1" i="0">
-                <a:solidFill>
-                  <a:srgbClr val="0A2240"/>
-                </a:solidFill>
-                <a:latin typeface="Arial"/>
-              </a:rPr>
-              <a:t>Supabase</a:t>
-            </a:r>
-          </a:p>
-        </p:txBody>
-      </p:sp>
-      <p:sp>
-        <p:nvSpPr>
-          <p:cNvPr id="6" name="TextBox 5"/>
-          <p:cNvSpPr txBox="1"/>
-          <p:nvPr/>
-        </p:nvSpPr>
-        <p:spPr>
-          <a:xfrm>
-            <a:off x="6484620" y="3965448"/>
-            <a:ext cx="5707380" cy="518159"/>
-          </a:xfrm>
-          <a:prstGeom prst="rect">
-            <a:avLst/>
-          </a:prstGeom>
-          <a:noFill/>
-        </p:spPr>
-        <p:txBody>
-          <a:bodyPr wrap="none" lIns="0" rIns="0">
-            <a:noAutofit/>
-          </a:bodyPr>
-          <a:lstStyle/>
-          <a:p>
-            <a:pPr algn="ctr"/>
-            <a:r>
-              <a:rPr sz="3400" b="0" i="0">
-                <a:solidFill>
-                  <a:srgbClr val="0A2240"/>
-                </a:solidFill>
-                <a:latin typeface="Arial"/>
-              </a:rPr>
-              <a:t>You set up a project</a:t>
-            </a:r>
-          </a:p>
-        </p:txBody>
-      </p:sp>
-      <p:sp>
-        <p:nvSpPr>
-          <p:cNvPr id="7" name="TextBox 6"/>
-          <p:cNvSpPr txBox="1"/>
-          <p:nvPr/>
-        </p:nvSpPr>
-        <p:spPr>
-          <a:xfrm>
-            <a:off x="5435323" y="3310127"/>
-            <a:ext cx="1321354" cy="640080"/>
-          </a:xfrm>
-          <a:prstGeom prst="rect">
-            <a:avLst/>
-          </a:prstGeom>
-          <a:noFill/>
-        </p:spPr>
-        <p:txBody>
-          <a:bodyPr wrap="none" lIns="0" rIns="0">
-            <a:noAutofit/>
-          </a:bodyPr>
-          <a:lstStyle/>
-          <a:p>
-            <a:pPr algn="ctr"/>
-            <a:r>
-              <a:rPr sz="4200" b="1" i="0">
-                <a:solidFill>
-                  <a:srgbClr val="5B6B82"/>
-                </a:solidFill>
-                <a:latin typeface="Arial"/>
-              </a:rPr>
-              <a:t>VS</a:t>
-            </a:r>
-          </a:p>
-        </p:txBody>
-      </p:sp>
-      <p:sp>
-        <p:nvSpPr>
-          <p:cNvPr id="8" name="TextBox 7"/>
-          <p:cNvSpPr/>
-          <p:nvPr>
-            <p:ph type="sldNum" idx="12"/>
-          </p:nvPr>
-        </p:nvSpPr>
-        <p:spPr>
-          <a:xfrm>
-            <a:off x="11186160" y="6035040"/>
-            <a:ext cx="548640" cy="365760"/>
-          </a:xfrm>
-          <a:prstGeom prst="rect">
-            <a:avLst/>
-          </a:prstGeom>
-          <a:noFill/>
-        </p:spPr>
-        <p:txBody>
-          <a:bodyPr wrap="none" lIns="0" rIns="0">
-            <a:noAutofit/>
-          </a:bodyPr>
-          <a:lstStyle/>
-          <a:p>
-            <a:pPr algn="r"/>
-            <a:fld id="{4B0E1F8A-6C1D-4E2A-9F3B-7A5C8D2E1F60}" type="slidenum">
-              <a:rPr sz="1600" b="0" i="0">
-                <a:solidFill>
-                  <a:srgbClr val="5B6B82"/>
                 </a:solidFill>
                 <a:latin typeface="Arial"/>
               </a:rPr>
@@ -18312,14 +18116,14 @@
                 </a:solidFill>
                 <a:latin typeface="Arial"/>
               </a:rPr>
-              <a:t>The Rule That Protects It</a:t>
+              <a:t>Claude Can Build It</a:t>
             </a:r>
           </a:p>
         </p:txBody>
       </p:sp>
       <p:pic>
         <p:nvPicPr>
-          <p:cNvPr id="3" name="Picture 2" descr="rls.png"/>
+          <p:cNvPr id="3" name="Picture 2" descr="mcp-setup.png"/>
           <p:cNvPicPr>
             <a:picLocks noChangeAspect="1"/>
           </p:cNvPicPr>
@@ -18350,7 +18154,7 @@
         <p:spPr>
           <a:xfrm>
             <a:off x="457200" y="1499616"/>
-            <a:ext cx="8028483" cy="609600"/>
+            <a:ext cx="7598033" cy="609600"/>
           </a:xfrm>
           <a:prstGeom prst="rect">
             <a:avLst/>
@@ -18371,7 +18175,7 @@
                 </a:solidFill>
                 <a:latin typeface="Arial"/>
               </a:rPr>
-              <a:t>Turn on row level security</a:t>
+              <a:t>Supabase's MCP server</a:t>
             </a:r>
           </a:p>
         </p:txBody>
@@ -18385,7 +18189,7 @@
         <p:spPr>
           <a:xfrm>
             <a:off x="457200" y="2383536"/>
-            <a:ext cx="7210761" cy="609600"/>
+            <a:ext cx="6634916" cy="609600"/>
           </a:xfrm>
           <a:prstGeom prst="rect">
             <a:avLst/>
@@ -18406,7 +18210,7 @@
                 </a:solidFill>
                 <a:latin typeface="Arial"/>
               </a:rPr>
-              <a:t>Without it, data is open</a:t>
+              <a:t>Claude runs the SQL</a:t>
             </a:r>
           </a:p>
         </p:txBody>
@@ -18420,7 +18224,7 @@
         <p:spPr>
           <a:xfrm>
             <a:off x="457200" y="3267456"/>
-            <a:ext cx="8247756" cy="609600"/>
+            <a:ext cx="7248881" cy="609600"/>
           </a:xfrm>
           <a:prstGeom prst="rect">
             <a:avLst/>
@@ -18441,7 +18245,7 @@
                 </a:solidFill>
                 <a:latin typeface="Arial"/>
               </a:rPr>
-              <a:t>Supabase warns you itself</a:t>
+              <a:t>Approve each step first</a:t>
             </a:r>
           </a:p>
         </p:txBody>
@@ -18474,7 +18278,7 @@
             <a:fld id="{4B0E1F8A-6C1D-4E2A-9F3B-7A5C8D2E1F60}" type="slidenum">
               <a:rPr sz="1600" b="0" i="0">
                 <a:solidFill>
-                  <a:srgbClr val="5B6B82"/>
+                  <a:srgbClr val="0A2240"/>
                 </a:solidFill>
                 <a:latin typeface="Arial"/>
               </a:rPr>
@@ -18554,7 +18358,7 @@
         <p:spPr>
           <a:xfrm>
             <a:off x="457200" y="457200"/>
-            <a:ext cx="11734800" cy="768096"/>
+            <a:ext cx="11277600" cy="768096"/>
           </a:xfrm>
           <a:prstGeom prst="rect">
             <a:avLst/>
@@ -18575,46 +18379,35 @@
                 </a:solidFill>
                 <a:latin typeface="Arial"/>
               </a:rPr>
-              <a:t>Row Level Security, by Example</a:t>
-            </a:r>
-          </a:p>
-        </p:txBody>
-      </p:sp>
-      <p:sp>
-        <p:nvSpPr>
-          <p:cNvPr id="3" name="TextBox 2"/>
-          <p:cNvSpPr txBox="1"/>
+              <a:t>The Rule That Protects It</a:t>
+            </a:r>
+          </a:p>
+        </p:txBody>
+      </p:sp>
+      <p:pic>
+        <p:nvPicPr>
+          <p:cNvPr id="3" name="Picture 2" descr="rls.png"/>
+          <p:cNvPicPr>
+            <a:picLocks noChangeAspect="1"/>
+          </p:cNvPicPr>
           <p:nvPr/>
-        </p:nvSpPr>
-        <p:spPr>
-          <a:xfrm>
-            <a:off x="457200" y="1499616"/>
-            <a:ext cx="3773775" cy="518159"/>
-          </a:xfrm>
-          <a:prstGeom prst="rect">
-            <a:avLst/>
-          </a:prstGeom>
-          <a:noFill/>
-        </p:spPr>
-        <p:txBody>
-          <a:bodyPr wrap="none" lIns="0" rIns="0">
-            <a:noAutofit/>
-          </a:bodyPr>
-          <a:lstStyle/>
-          <a:p>
-            <a:pPr algn="l"/>
-            <a:r>
-              <a:rPr sz="3400" b="1" i="0">
-                <a:solidFill>
-                  <a:srgbClr val="0072CE"/>
-                </a:solidFill>
-                <a:latin typeface="Arial"/>
-              </a:rPr>
-              <a:t>Setting</a:t>
-            </a:r>
-          </a:p>
-        </p:txBody>
-      </p:sp>
+        </p:nvPicPr>
+        <p:blipFill>
+          <a:blip r:embed="rId2"/>
+          <a:stretch>
+            <a:fillRect/>
+          </a:stretch>
+        </p:blipFill>
+        <p:spPr>
+          <a:xfrm>
+            <a:off x="6233160" y="1499616"/>
+            <a:ext cx="5501640" cy="4261104"/>
+          </a:xfrm>
+          <a:prstGeom prst="rect">
+            <a:avLst/>
+          </a:prstGeom>
+        </p:spPr>
+      </p:pic>
       <p:sp>
         <p:nvSpPr>
           <p:cNvPr id="4" name="TextBox 3"/>
@@ -18623,74 +18416,65 @@
         </p:nvSpPr>
         <p:spPr>
           <a:xfrm>
-            <a:off x="4779615" y="1499616"/>
-            <a:ext cx="6325235" cy="518159"/>
-          </a:xfrm>
-          <a:prstGeom prst="rect">
-            <a:avLst/>
-          </a:prstGeom>
-          <a:noFill/>
-        </p:spPr>
-        <p:txBody>
-          <a:bodyPr wrap="none" lIns="0" rIns="0">
-            <a:noAutofit/>
-          </a:bodyPr>
-          <a:lstStyle/>
-          <a:p>
-            <a:pPr algn="l"/>
-            <a:r>
-              <a:rPr sz="3400" b="1" i="0">
-                <a:solidFill>
-                  <a:srgbClr val="0072CE"/>
-                </a:solidFill>
-                <a:latin typeface="Arial"/>
-              </a:rPr>
-              <a:t>What a visitor gets</a:t>
-            </a:r>
-          </a:p>
-        </p:txBody>
-      </p:sp>
-      <p:sp>
-        <p:nvSpPr>
-          <p:cNvPr id="5" name="Rectangle 4"/>
-          <p:cNvSpPr/>
+            <a:off x="457200" y="1499616"/>
+            <a:ext cx="8028483" cy="609600"/>
+          </a:xfrm>
+          <a:prstGeom prst="rect">
+            <a:avLst/>
+          </a:prstGeom>
+          <a:noFill/>
+        </p:spPr>
+        <p:txBody>
+          <a:bodyPr wrap="none" lIns="0" rIns="0">
+            <a:noAutofit/>
+          </a:bodyPr>
+          <a:lstStyle/>
+          <a:p>
+            <a:pPr algn="l"/>
+            <a:r>
+              <a:rPr sz="3400" b="0" i="0">
+                <a:solidFill>
+                  <a:srgbClr val="0A2240"/>
+                </a:solidFill>
+                <a:latin typeface="Arial"/>
+              </a:rPr>
+              <a:t>Turn on row level security</a:t>
+            </a:r>
+          </a:p>
+        </p:txBody>
+      </p:sp>
+      <p:sp>
+        <p:nvSpPr>
+          <p:cNvPr id="5" name="TextBox 4"/>
+          <p:cNvSpPr txBox="1"/>
           <p:nvPr/>
         </p:nvSpPr>
         <p:spPr>
           <a:xfrm>
-            <a:off x="457200" y="2072639"/>
-            <a:ext cx="9560051" cy="54864"/>
-          </a:xfrm>
-          <a:prstGeom prst="rect">
-            <a:avLst/>
-          </a:prstGeom>
-          <a:solidFill>
-            <a:srgbClr val="0072CE"/>
-          </a:solidFill>
-          <a:ln>
-            <a:noFill/>
-          </a:ln>
-          <a:effectLst/>
-        </p:spPr>
-        <p:style>
-          <a:lnRef idx="1">
-            <a:schemeClr val="accent1"/>
-          </a:lnRef>
-          <a:fillRef idx="3">
-            <a:schemeClr val="accent1"/>
-          </a:fillRef>
-          <a:effectRef idx="2">
-            <a:schemeClr val="accent1"/>
-          </a:effectRef>
-          <a:fontRef idx="minor">
-            <a:schemeClr val="lt1"/>
-          </a:fontRef>
-        </p:style>
-        <p:txBody>
-          <a:bodyPr rtlCol="0" anchor="ctr"/>
-          <a:lstStyle/>
-          <a:p>
-            <a:pPr algn="ctr"/>
+            <a:off x="457200" y="2383536"/>
+            <a:ext cx="7210761" cy="609600"/>
+          </a:xfrm>
+          <a:prstGeom prst="rect">
+            <a:avLst/>
+          </a:prstGeom>
+          <a:noFill/>
+        </p:spPr>
+        <p:txBody>
+          <a:bodyPr wrap="none" lIns="0" rIns="0">
+            <a:noAutofit/>
+          </a:bodyPr>
+          <a:lstStyle/>
+          <a:p>
+            <a:pPr algn="l"/>
+            <a:r>
+              <a:rPr sz="3400" b="0" i="0">
+                <a:solidFill>
+                  <a:srgbClr val="0A2240"/>
+                </a:solidFill>
+                <a:latin typeface="Arial"/>
+              </a:rPr>
+              <a:t>Without it, data is open</a:t>
+            </a:r>
           </a:p>
         </p:txBody>
       </p:sp>
@@ -18702,8 +18486,8 @@
         </p:nvSpPr>
         <p:spPr>
           <a:xfrm>
-            <a:off x="457200" y="2401823"/>
-            <a:ext cx="3773775" cy="936752"/>
+            <a:off x="457200" y="3267456"/>
+            <a:ext cx="8247756" cy="609600"/>
           </a:xfrm>
           <a:prstGeom prst="rect">
             <a:avLst/>
@@ -18724,7 +18508,7 @@
                 </a:solidFill>
                 <a:latin typeface="Arial"/>
               </a:rPr>
-              <a:t>Security off</a:t>
+              <a:t>Supabase warns you itself</a:t>
             </a:r>
           </a:p>
         </p:txBody>
@@ -18732,35 +18516,37 @@
       <p:sp>
         <p:nvSpPr>
           <p:cNvPr id="7" name="TextBox 6"/>
-          <p:cNvSpPr txBox="1"/>
-          <p:nvPr/>
-        </p:nvSpPr>
-        <p:spPr>
-          <a:xfrm>
-            <a:off x="4779615" y="2401823"/>
-            <a:ext cx="7412385" cy="936752"/>
-          </a:xfrm>
-          <a:prstGeom prst="rect">
-            <a:avLst/>
-          </a:prstGeom>
-          <a:noFill/>
-        </p:spPr>
-        <p:txBody>
-          <a:bodyPr wrap="none" lIns="0" rIns="0">
-            <a:noAutofit/>
-          </a:bodyPr>
-          <a:lstStyle/>
-          <a:p>
-            <a:pPr algn="l"/>
-            <a:r>
-              <a:rPr sz="3400" b="0" i="0">
+          <p:cNvSpPr/>
+          <p:nvPr>
+            <p:ph type="sldNum" idx="12"/>
+          </p:nvPr>
+        </p:nvSpPr>
+        <p:spPr>
+          <a:xfrm>
+            <a:off x="11186160" y="6035040"/>
+            <a:ext cx="548640" cy="365760"/>
+          </a:xfrm>
+          <a:prstGeom prst="rect">
+            <a:avLst/>
+          </a:prstGeom>
+          <a:noFill/>
+        </p:spPr>
+        <p:txBody>
+          <a:bodyPr wrap="none" lIns="0" rIns="0">
+            <a:noAutofit/>
+          </a:bodyPr>
+          <a:lstStyle/>
+          <a:p>
+            <a:pPr algn="r"/>
+            <a:fld id="{4B0E1F8A-6C1D-4E2A-9F3B-7A5C8D2E1F60}" type="slidenum">
+              <a:rPr sz="1600" b="0" i="0">
                 <a:solidFill>
                   <a:srgbClr val="0A2240"/>
                 </a:solidFill>
                 <a:latin typeface="Arial"/>
               </a:rPr>
-              <a:t>Every row, read and write</a:t>
-            </a:r>
+              <a:t>14</a:t>
+            </a:fld>
           </a:p>
         </p:txBody>
       </p:sp>
@@ -18772,172 +18558,31 @@
         </p:nvSpPr>
         <p:spPr>
           <a:xfrm>
-            <a:off x="457200" y="3612895"/>
-            <a:ext cx="5635704" cy="936752"/>
-          </a:xfrm>
-          <a:prstGeom prst="rect">
-            <a:avLst/>
-          </a:prstGeom>
-          <a:noFill/>
-        </p:spPr>
-        <p:txBody>
-          <a:bodyPr wrap="none" lIns="0" rIns="0">
-            <a:noAutofit/>
-          </a:bodyPr>
-          <a:lstStyle/>
-          <a:p>
-            <a:pPr algn="l"/>
-            <a:r>
-              <a:rPr sz="3400" b="0" i="0">
-                <a:solidFill>
-                  <a:srgbClr val="0A2240"/>
-                </a:solidFill>
-                <a:latin typeface="Arial"/>
-              </a:rPr>
-              <a:t>On, with no policy</a:t>
-            </a:r>
-          </a:p>
-        </p:txBody>
-      </p:sp>
-      <p:sp>
-        <p:nvSpPr>
-          <p:cNvPr id="9" name="TextBox 8"/>
-          <p:cNvSpPr txBox="1"/>
-          <p:nvPr/>
-        </p:nvSpPr>
-        <p:spPr>
-          <a:xfrm>
-            <a:off x="4779615" y="3612895"/>
-            <a:ext cx="5237636" cy="936752"/>
-          </a:xfrm>
-          <a:prstGeom prst="rect">
-            <a:avLst/>
-          </a:prstGeom>
-          <a:noFill/>
-        </p:spPr>
-        <p:txBody>
-          <a:bodyPr wrap="none" lIns="0" rIns="0">
-            <a:noAutofit/>
-          </a:bodyPr>
-          <a:lstStyle/>
-          <a:p>
-            <a:pPr algn="l"/>
-            <a:r>
-              <a:rPr sz="3400" b="0" i="0">
-                <a:solidFill>
-                  <a:srgbClr val="0A2240"/>
-                </a:solidFill>
-                <a:latin typeface="Arial"/>
-              </a:rPr>
-              <a:t>Nothing at all</a:t>
-            </a:r>
-          </a:p>
-        </p:txBody>
-      </p:sp>
-      <p:sp>
-        <p:nvSpPr>
-          <p:cNvPr id="10" name="TextBox 9"/>
-          <p:cNvSpPr txBox="1"/>
-          <p:nvPr/>
-        </p:nvSpPr>
-        <p:spPr>
-          <a:xfrm>
-            <a:off x="457200" y="4823967"/>
-            <a:ext cx="5328384" cy="936752"/>
-          </a:xfrm>
-          <a:prstGeom prst="rect">
-            <a:avLst/>
-          </a:prstGeom>
-          <a:noFill/>
-        </p:spPr>
-        <p:txBody>
-          <a:bodyPr wrap="none" lIns="0" rIns="0">
-            <a:noAutofit/>
-          </a:bodyPr>
-          <a:lstStyle/>
-          <a:p>
-            <a:pPr algn="l"/>
-            <a:r>
-              <a:rPr sz="3400" b="0" i="0">
-                <a:solidFill>
-                  <a:srgbClr val="0A2240"/>
-                </a:solidFill>
-                <a:latin typeface="Arial"/>
-              </a:rPr>
-              <a:t>On, owner policy</a:t>
-            </a:r>
-          </a:p>
-        </p:txBody>
-      </p:sp>
-      <p:sp>
-        <p:nvSpPr>
-          <p:cNvPr id="11" name="TextBox 10"/>
-          <p:cNvSpPr txBox="1"/>
-          <p:nvPr/>
-        </p:nvSpPr>
-        <p:spPr>
-          <a:xfrm>
-            <a:off x="4779615" y="4823967"/>
-            <a:ext cx="6249332" cy="936752"/>
-          </a:xfrm>
-          <a:prstGeom prst="rect">
-            <a:avLst/>
-          </a:prstGeom>
-          <a:noFill/>
-        </p:spPr>
-        <p:txBody>
-          <a:bodyPr wrap="none" lIns="0" rIns="0">
-            <a:noAutofit/>
-          </a:bodyPr>
-          <a:lstStyle/>
-          <a:p>
-            <a:pPr algn="l"/>
-            <a:r>
-              <a:rPr sz="3400" b="0" i="0">
-                <a:solidFill>
-                  <a:srgbClr val="0A2240"/>
-                </a:solidFill>
-                <a:latin typeface="Arial"/>
-              </a:rPr>
-              <a:t>Only their own rows</a:t>
-            </a:r>
-          </a:p>
-        </p:txBody>
-      </p:sp>
-      <p:sp>
-        <p:nvSpPr>
-          <p:cNvPr id="12" name="TextBox 11"/>
-          <p:cNvSpPr/>
-          <p:nvPr>
-            <p:ph type="sldNum" idx="12"/>
-          </p:nvPr>
-        </p:nvSpPr>
-        <p:spPr>
-          <a:xfrm>
-            <a:off x="11186160" y="6035040"/>
-            <a:ext cx="548640" cy="365760"/>
-          </a:xfrm>
-          <a:prstGeom prst="rect">
-            <a:avLst/>
-          </a:prstGeom>
-          <a:noFill/>
-        </p:spPr>
-        <p:txBody>
-          <a:bodyPr wrap="none" lIns="0" rIns="0">
-            <a:noAutofit/>
-          </a:bodyPr>
-          <a:lstStyle/>
-          <a:p>
-            <a:pPr algn="r"/>
-            <a:fld id="{4B0E1F8A-6C1D-4E2A-9F3B-7A5C8D2E1F60}" type="slidenum">
-              <a:rPr sz="1600" b="0" i="0">
-                <a:solidFill>
-                  <a:srgbClr val="5B6B82"/>
-                </a:solidFill>
-                <a:latin typeface="Arial"/>
-              </a:rPr>
-              <a:t>14</a:t>
-            </a:fld>
+            <a:off x="10085130" y="6035040"/>
+            <a:ext cx="1213008" cy="365760"/>
+          </a:xfrm>
+          <a:prstGeom prst="rect">
+            <a:avLst/>
+          </a:prstGeom>
+          <a:noFill/>
+        </p:spPr>
+        <p:txBody>
+          <a:bodyPr wrap="none" lIns="0" rIns="0">
+            <a:noAutofit/>
+          </a:bodyPr>
+          <a:lstStyle/>
+          <a:p>
+            <a:pPr algn="l"/>
+            <a:r>
+              <a:rPr sz="1600" b="0" i="0" u="sng">
+                <a:solidFill>
+                  <a:srgbClr val="0072CE"/>
+                </a:solidFill>
+                <a:latin typeface="Arial"/>
+                <a:hlinkClick r:id="rId3"/>
+              </a:rPr>
+              <a:t>Source</a:t>
+            </a:r>
           </a:p>
         </p:txBody>
       </p:sp>
@@ -18976,7 +18621,7 @@
         <p:spPr>
           <a:xfrm>
             <a:off x="457200" y="457200"/>
-            <a:ext cx="11277600" cy="768096"/>
+            <a:ext cx="11734800" cy="768096"/>
           </a:xfrm>
           <a:prstGeom prst="rect">
             <a:avLst/>
@@ -18997,35 +18642,46 @@
                 </a:solidFill>
                 <a:latin typeface="Arial"/>
               </a:rPr>
-              <a:t>What It Costs to Start</a:t>
-            </a:r>
-          </a:p>
-        </p:txBody>
-      </p:sp>
-      <p:pic>
-        <p:nvPicPr>
-          <p:cNvPr id="3" name="Picture 2" descr="pricing.png"/>
-          <p:cNvPicPr>
-            <a:picLocks noChangeAspect="1"/>
-          </p:cNvPicPr>
+              <a:t>Row Level Security, by Example</a:t>
+            </a:r>
+          </a:p>
+        </p:txBody>
+      </p:sp>
+      <p:sp>
+        <p:nvSpPr>
+          <p:cNvPr id="3" name="TextBox 2"/>
+          <p:cNvSpPr txBox="1"/>
           <p:nvPr/>
-        </p:nvPicPr>
-        <p:blipFill>
-          <a:blip r:embed="rId2"/>
-          <a:stretch>
-            <a:fillRect/>
-          </a:stretch>
-        </p:blipFill>
-        <p:spPr>
-          <a:xfrm>
-            <a:off x="6233160" y="1499616"/>
-            <a:ext cx="5501640" cy="4261104"/>
-          </a:xfrm>
-          <a:prstGeom prst="rect">
-            <a:avLst/>
-          </a:prstGeom>
-        </p:spPr>
-      </p:pic>
+        </p:nvSpPr>
+        <p:spPr>
+          <a:xfrm>
+            <a:off x="457200" y="1499616"/>
+            <a:ext cx="3773775" cy="518159"/>
+          </a:xfrm>
+          <a:prstGeom prst="rect">
+            <a:avLst/>
+          </a:prstGeom>
+          <a:noFill/>
+        </p:spPr>
+        <p:txBody>
+          <a:bodyPr wrap="none" lIns="0" rIns="0">
+            <a:noAutofit/>
+          </a:bodyPr>
+          <a:lstStyle/>
+          <a:p>
+            <a:pPr algn="l"/>
+            <a:r>
+              <a:rPr sz="3400" b="1" i="0">
+                <a:solidFill>
+                  <a:srgbClr val="0072CE"/>
+                </a:solidFill>
+                <a:latin typeface="Arial"/>
+              </a:rPr>
+              <a:t>Setting</a:t>
+            </a:r>
+          </a:p>
+        </p:txBody>
+      </p:sp>
       <p:sp>
         <p:nvSpPr>
           <p:cNvPr id="4" name="TextBox 3"/>
@@ -19034,65 +18690,74 @@
         </p:nvSpPr>
         <p:spPr>
           <a:xfrm>
-            <a:off x="457200" y="1499616"/>
-            <a:ext cx="5501640" cy="609600"/>
-          </a:xfrm>
-          <a:prstGeom prst="rect">
-            <a:avLst/>
-          </a:prstGeom>
-          <a:noFill/>
-        </p:spPr>
-        <p:txBody>
-          <a:bodyPr wrap="none" lIns="0" rIns="0">
-            <a:noAutofit/>
-          </a:bodyPr>
-          <a:lstStyle/>
-          <a:p>
-            <a:pPr algn="l"/>
-            <a:r>
-              <a:rPr sz="3400" b="0" i="0">
-                <a:solidFill>
-                  <a:srgbClr val="0A2240"/>
-                </a:solidFill>
-                <a:latin typeface="Arial"/>
-              </a:rPr>
-              <a:t>Free to begin</a:t>
-            </a:r>
-          </a:p>
-        </p:txBody>
-      </p:sp>
-      <p:sp>
-        <p:nvSpPr>
-          <p:cNvPr id="5" name="TextBox 4"/>
-          <p:cNvSpPr txBox="1"/>
+            <a:off x="4779615" y="1499616"/>
+            <a:ext cx="6325235" cy="518159"/>
+          </a:xfrm>
+          <a:prstGeom prst="rect">
+            <a:avLst/>
+          </a:prstGeom>
+          <a:noFill/>
+        </p:spPr>
+        <p:txBody>
+          <a:bodyPr wrap="none" lIns="0" rIns="0">
+            <a:noAutofit/>
+          </a:bodyPr>
+          <a:lstStyle/>
+          <a:p>
+            <a:pPr algn="l"/>
+            <a:r>
+              <a:rPr sz="3400" b="1" i="0">
+                <a:solidFill>
+                  <a:srgbClr val="0072CE"/>
+                </a:solidFill>
+                <a:latin typeface="Arial"/>
+              </a:rPr>
+              <a:t>What a visitor gets</a:t>
+            </a:r>
+          </a:p>
+        </p:txBody>
+      </p:sp>
+      <p:sp>
+        <p:nvSpPr>
+          <p:cNvPr id="5" name="Rectangle 4"/>
+          <p:cNvSpPr/>
           <p:nvPr/>
         </p:nvSpPr>
         <p:spPr>
           <a:xfrm>
-            <a:off x="457200" y="2383536"/>
-            <a:ext cx="6366728" cy="609600"/>
-          </a:xfrm>
-          <a:prstGeom prst="rect">
-            <a:avLst/>
-          </a:prstGeom>
-          <a:noFill/>
-        </p:spPr>
-        <p:txBody>
-          <a:bodyPr wrap="none" lIns="0" rIns="0">
-            <a:noAutofit/>
-          </a:bodyPr>
-          <a:lstStyle/>
-          <a:p>
-            <a:pPr algn="l"/>
-            <a:r>
-              <a:rPr sz="3400" b="0" i="0">
-                <a:solidFill>
-                  <a:srgbClr val="0A2240"/>
-                </a:solidFill>
-                <a:latin typeface="Arial"/>
-              </a:rPr>
-              <a:t>500 MB of database</a:t>
-            </a:r>
+            <a:off x="457200" y="2072639"/>
+            <a:ext cx="9560051" cy="54864"/>
+          </a:xfrm>
+          <a:prstGeom prst="rect">
+            <a:avLst/>
+          </a:prstGeom>
+          <a:solidFill>
+            <a:srgbClr val="0072CE"/>
+          </a:solidFill>
+          <a:ln>
+            <a:noFill/>
+          </a:ln>
+          <a:effectLst/>
+        </p:spPr>
+        <p:style>
+          <a:lnRef idx="1">
+            <a:schemeClr val="accent1"/>
+          </a:lnRef>
+          <a:fillRef idx="3">
+            <a:schemeClr val="accent1"/>
+          </a:fillRef>
+          <a:effectRef idx="2">
+            <a:schemeClr val="accent1"/>
+          </a:effectRef>
+          <a:fontRef idx="minor">
+            <a:schemeClr val="lt1"/>
+          </a:fontRef>
+        </p:style>
+        <p:txBody>
+          <a:bodyPr rtlCol="0" anchor="ctr"/>
+          <a:lstStyle/>
+          <a:p>
+            <a:pPr algn="ctr"/>
           </a:p>
         </p:txBody>
       </p:sp>
@@ -19104,8 +18769,8 @@
         </p:nvSpPr>
         <p:spPr>
           <a:xfrm>
-            <a:off x="457200" y="3267456"/>
-            <a:ext cx="6865659" cy="609600"/>
+            <a:off x="457200" y="2401823"/>
+            <a:ext cx="3773775" cy="936752"/>
           </a:xfrm>
           <a:prstGeom prst="rect">
             <a:avLst/>
@@ -19126,7 +18791,7 @@
                 </a:solidFill>
                 <a:latin typeface="Arial"/>
               </a:rPr>
-              <a:t>50,000 users a month</a:t>
+              <a:t>Security off</a:t>
             </a:r>
           </a:p>
         </p:txBody>
@@ -19134,6 +18799,181 @@
       <p:sp>
         <p:nvSpPr>
           <p:cNvPr id="7" name="TextBox 6"/>
+          <p:cNvSpPr txBox="1"/>
+          <p:nvPr/>
+        </p:nvSpPr>
+        <p:spPr>
+          <a:xfrm>
+            <a:off x="4779615" y="2401823"/>
+            <a:ext cx="7412385" cy="936752"/>
+          </a:xfrm>
+          <a:prstGeom prst="rect">
+            <a:avLst/>
+          </a:prstGeom>
+          <a:noFill/>
+        </p:spPr>
+        <p:txBody>
+          <a:bodyPr wrap="none" lIns="0" rIns="0">
+            <a:noAutofit/>
+          </a:bodyPr>
+          <a:lstStyle/>
+          <a:p>
+            <a:pPr algn="l"/>
+            <a:r>
+              <a:rPr sz="3400" b="0" i="0">
+                <a:solidFill>
+                  <a:srgbClr val="0A2240"/>
+                </a:solidFill>
+                <a:latin typeface="Arial"/>
+              </a:rPr>
+              <a:t>Every row, read and write</a:t>
+            </a:r>
+          </a:p>
+        </p:txBody>
+      </p:sp>
+      <p:sp>
+        <p:nvSpPr>
+          <p:cNvPr id="8" name="TextBox 7"/>
+          <p:cNvSpPr txBox="1"/>
+          <p:nvPr/>
+        </p:nvSpPr>
+        <p:spPr>
+          <a:xfrm>
+            <a:off x="457200" y="3612895"/>
+            <a:ext cx="5635704" cy="936752"/>
+          </a:xfrm>
+          <a:prstGeom prst="rect">
+            <a:avLst/>
+          </a:prstGeom>
+          <a:noFill/>
+        </p:spPr>
+        <p:txBody>
+          <a:bodyPr wrap="none" lIns="0" rIns="0">
+            <a:noAutofit/>
+          </a:bodyPr>
+          <a:lstStyle/>
+          <a:p>
+            <a:pPr algn="l"/>
+            <a:r>
+              <a:rPr sz="3400" b="0" i="0">
+                <a:solidFill>
+                  <a:srgbClr val="0A2240"/>
+                </a:solidFill>
+                <a:latin typeface="Arial"/>
+              </a:rPr>
+              <a:t>On, with no policy</a:t>
+            </a:r>
+          </a:p>
+        </p:txBody>
+      </p:sp>
+      <p:sp>
+        <p:nvSpPr>
+          <p:cNvPr id="9" name="TextBox 8"/>
+          <p:cNvSpPr txBox="1"/>
+          <p:nvPr/>
+        </p:nvSpPr>
+        <p:spPr>
+          <a:xfrm>
+            <a:off x="4779615" y="3612895"/>
+            <a:ext cx="5237636" cy="936752"/>
+          </a:xfrm>
+          <a:prstGeom prst="rect">
+            <a:avLst/>
+          </a:prstGeom>
+          <a:noFill/>
+        </p:spPr>
+        <p:txBody>
+          <a:bodyPr wrap="none" lIns="0" rIns="0">
+            <a:noAutofit/>
+          </a:bodyPr>
+          <a:lstStyle/>
+          <a:p>
+            <a:pPr algn="l"/>
+            <a:r>
+              <a:rPr sz="3400" b="0" i="0">
+                <a:solidFill>
+                  <a:srgbClr val="0A2240"/>
+                </a:solidFill>
+                <a:latin typeface="Arial"/>
+              </a:rPr>
+              <a:t>Nothing at all</a:t>
+            </a:r>
+          </a:p>
+        </p:txBody>
+      </p:sp>
+      <p:sp>
+        <p:nvSpPr>
+          <p:cNvPr id="10" name="TextBox 9"/>
+          <p:cNvSpPr txBox="1"/>
+          <p:nvPr/>
+        </p:nvSpPr>
+        <p:spPr>
+          <a:xfrm>
+            <a:off x="457200" y="4823967"/>
+            <a:ext cx="5328384" cy="936752"/>
+          </a:xfrm>
+          <a:prstGeom prst="rect">
+            <a:avLst/>
+          </a:prstGeom>
+          <a:noFill/>
+        </p:spPr>
+        <p:txBody>
+          <a:bodyPr wrap="none" lIns="0" rIns="0">
+            <a:noAutofit/>
+          </a:bodyPr>
+          <a:lstStyle/>
+          <a:p>
+            <a:pPr algn="l"/>
+            <a:r>
+              <a:rPr sz="3400" b="0" i="0">
+                <a:solidFill>
+                  <a:srgbClr val="0A2240"/>
+                </a:solidFill>
+                <a:latin typeface="Arial"/>
+              </a:rPr>
+              <a:t>On, owner policy</a:t>
+            </a:r>
+          </a:p>
+        </p:txBody>
+      </p:sp>
+      <p:sp>
+        <p:nvSpPr>
+          <p:cNvPr id="11" name="TextBox 10"/>
+          <p:cNvSpPr txBox="1"/>
+          <p:nvPr/>
+        </p:nvSpPr>
+        <p:spPr>
+          <a:xfrm>
+            <a:off x="4779615" y="4823967"/>
+            <a:ext cx="6249332" cy="936752"/>
+          </a:xfrm>
+          <a:prstGeom prst="rect">
+            <a:avLst/>
+          </a:prstGeom>
+          <a:noFill/>
+        </p:spPr>
+        <p:txBody>
+          <a:bodyPr wrap="none" lIns="0" rIns="0">
+            <a:noAutofit/>
+          </a:bodyPr>
+          <a:lstStyle/>
+          <a:p>
+            <a:pPr algn="l"/>
+            <a:r>
+              <a:rPr sz="3400" b="0" i="0">
+                <a:solidFill>
+                  <a:srgbClr val="0A2240"/>
+                </a:solidFill>
+                <a:latin typeface="Arial"/>
+              </a:rPr>
+              <a:t>Only their own rows</a:t>
+            </a:r>
+          </a:p>
+        </p:txBody>
+      </p:sp>
+      <p:sp>
+        <p:nvSpPr>
+          <p:cNvPr id="12" name="TextBox 11"/>
           <p:cNvSpPr/>
           <p:nvPr>
             <p:ph type="sldNum" idx="12"/>
@@ -19159,48 +18999,12 @@
             <a:fld id="{4B0E1F8A-6C1D-4E2A-9F3B-7A5C8D2E1F60}" type="slidenum">
               <a:rPr sz="1600" b="0" i="0">
                 <a:solidFill>
-                  <a:srgbClr val="5B6B82"/>
+                  <a:srgbClr val="0A2240"/>
                 </a:solidFill>
                 <a:latin typeface="Arial"/>
               </a:rPr>
               <a:t>15</a:t>
             </a:fld>
-          </a:p>
-        </p:txBody>
-      </p:sp>
-      <p:sp>
-        <p:nvSpPr>
-          <p:cNvPr id="8" name="TextBox 7"/>
-          <p:cNvSpPr txBox="1"/>
-          <p:nvPr/>
-        </p:nvSpPr>
-        <p:spPr>
-          <a:xfrm>
-            <a:off x="10085130" y="6035040"/>
-            <a:ext cx="1213008" cy="365760"/>
-          </a:xfrm>
-          <a:prstGeom prst="rect">
-            <a:avLst/>
-          </a:prstGeom>
-          <a:noFill/>
-        </p:spPr>
-        <p:txBody>
-          <a:bodyPr wrap="none" lIns="0" rIns="0">
-            <a:noAutofit/>
-          </a:bodyPr>
-          <a:lstStyle/>
-          <a:p>
-            <a:pPr algn="l"/>
-            <a:r>
-              <a:rPr sz="1600" b="0" i="0" u="sng">
-                <a:solidFill>
-                  <a:srgbClr val="0072CE"/>
-                </a:solidFill>
-                <a:latin typeface="Arial"/>
-                <a:hlinkClick r:id="rId3"/>
-              </a:rPr>
-              <a:t>Source</a:t>
-            </a:r>
           </a:p>
         </p:txBody>
       </p:sp>
@@ -19260,46 +19064,35 @@
                 </a:solidFill>
                 <a:latin typeface="Arial"/>
               </a:rPr>
-              <a:t>A Real Project That Uses It</a:t>
-            </a:r>
-          </a:p>
-        </p:txBody>
-      </p:sp>
-      <p:sp>
-        <p:nvSpPr>
-          <p:cNvPr id="3" name="TextBox 2"/>
-          <p:cNvSpPr txBox="1"/>
+              <a:t>What It Costs to Start</a:t>
+            </a:r>
+          </a:p>
+        </p:txBody>
+      </p:sp>
+      <p:pic>
+        <p:nvPicPr>
+          <p:cNvPr id="3" name="Picture 2" descr="pricing.png"/>
+          <p:cNvPicPr>
+            <a:picLocks noChangeAspect="1"/>
+          </p:cNvPicPr>
           <p:nvPr/>
-        </p:nvSpPr>
-        <p:spPr>
-          <a:xfrm>
-            <a:off x="457200" y="1499616"/>
-            <a:ext cx="4750851" cy="518159"/>
-          </a:xfrm>
-          <a:prstGeom prst="rect">
-            <a:avLst/>
-          </a:prstGeom>
-          <a:noFill/>
-        </p:spPr>
-        <p:txBody>
-          <a:bodyPr wrap="none" lIns="0" rIns="0">
-            <a:noAutofit/>
-          </a:bodyPr>
-          <a:lstStyle/>
-          <a:p>
-            <a:pPr algn="l"/>
-            <a:r>
-              <a:rPr sz="3400" b="1" i="0">
-                <a:solidFill>
-                  <a:srgbClr val="0072CE"/>
-                </a:solidFill>
-                <a:latin typeface="Arial"/>
-              </a:rPr>
-              <a:t>What it stores</a:t>
-            </a:r>
-          </a:p>
-        </p:txBody>
-      </p:sp>
+        </p:nvPicPr>
+        <p:blipFill>
+          <a:blip r:embed="rId2"/>
+          <a:stretch>
+            <a:fillRect/>
+          </a:stretch>
+        </p:blipFill>
+        <p:spPr>
+          <a:xfrm>
+            <a:off x="6233160" y="1499616"/>
+            <a:ext cx="5501640" cy="4261104"/>
+          </a:xfrm>
+          <a:prstGeom prst="rect">
+            <a:avLst/>
+          </a:prstGeom>
+        </p:spPr>
+      </p:pic>
       <p:sp>
         <p:nvSpPr>
           <p:cNvPr id="4" name="TextBox 3"/>
@@ -19308,74 +19101,65 @@
         </p:nvSpPr>
         <p:spPr>
           <a:xfrm>
-            <a:off x="4971690" y="1499616"/>
-            <a:ext cx="5166583" cy="518159"/>
-          </a:xfrm>
-          <a:prstGeom prst="rect">
-            <a:avLst/>
-          </a:prstGeom>
-          <a:noFill/>
-        </p:spPr>
-        <p:txBody>
-          <a:bodyPr wrap="none" lIns="0" rIns="0">
-            <a:noAutofit/>
-          </a:bodyPr>
-          <a:lstStyle/>
-          <a:p>
-            <a:pPr algn="l"/>
-            <a:r>
-              <a:rPr sz="3400" b="1" i="0">
-                <a:solidFill>
-                  <a:srgbClr val="0072CE"/>
-                </a:solidFill>
-                <a:latin typeface="Arial"/>
-              </a:rPr>
-              <a:t>Example</a:t>
-            </a:r>
-          </a:p>
-        </p:txBody>
-      </p:sp>
-      <p:sp>
-        <p:nvSpPr>
-          <p:cNvPr id="5" name="Rectangle 4"/>
-          <p:cNvSpPr/>
+            <a:off x="457200" y="1499616"/>
+            <a:ext cx="5501640" cy="609600"/>
+          </a:xfrm>
+          <a:prstGeom prst="rect">
+            <a:avLst/>
+          </a:prstGeom>
+          <a:noFill/>
+        </p:spPr>
+        <p:txBody>
+          <a:bodyPr wrap="none" lIns="0" rIns="0">
+            <a:noAutofit/>
+          </a:bodyPr>
+          <a:lstStyle/>
+          <a:p>
+            <a:pPr algn="l"/>
+            <a:r>
+              <a:rPr sz="3400" b="0" i="0">
+                <a:solidFill>
+                  <a:srgbClr val="0A2240"/>
+                </a:solidFill>
+                <a:latin typeface="Arial"/>
+              </a:rPr>
+              <a:t>Free to begin</a:t>
+            </a:r>
+          </a:p>
+        </p:txBody>
+      </p:sp>
+      <p:sp>
+        <p:nvSpPr>
+          <p:cNvPr id="5" name="TextBox 4"/>
+          <p:cNvSpPr txBox="1"/>
           <p:nvPr/>
         </p:nvSpPr>
         <p:spPr>
           <a:xfrm>
-            <a:off x="457200" y="2072639"/>
-            <a:ext cx="9681073" cy="54864"/>
-          </a:xfrm>
-          <a:prstGeom prst="rect">
-            <a:avLst/>
-          </a:prstGeom>
-          <a:solidFill>
-            <a:srgbClr val="0072CE"/>
-          </a:solidFill>
-          <a:ln>
-            <a:noFill/>
-          </a:ln>
-          <a:effectLst/>
-        </p:spPr>
-        <p:style>
-          <a:lnRef idx="1">
-            <a:schemeClr val="accent1"/>
-          </a:lnRef>
-          <a:fillRef idx="3">
-            <a:schemeClr val="accent1"/>
-          </a:fillRef>
-          <a:effectRef idx="2">
-            <a:schemeClr val="accent1"/>
-          </a:effectRef>
-          <a:fontRef idx="minor">
-            <a:schemeClr val="lt1"/>
-          </a:fontRef>
-        </p:style>
-        <p:txBody>
-          <a:bodyPr rtlCol="0" anchor="ctr"/>
-          <a:lstStyle/>
-          <a:p>
-            <a:pPr algn="ctr"/>
+            <a:off x="457200" y="2383536"/>
+            <a:ext cx="6366728" cy="609600"/>
+          </a:xfrm>
+          <a:prstGeom prst="rect">
+            <a:avLst/>
+          </a:prstGeom>
+          <a:noFill/>
+        </p:spPr>
+        <p:txBody>
+          <a:bodyPr wrap="none" lIns="0" rIns="0">
+            <a:noAutofit/>
+          </a:bodyPr>
+          <a:lstStyle/>
+          <a:p>
+            <a:pPr algn="l"/>
+            <a:r>
+              <a:rPr sz="3400" b="0" i="0">
+                <a:solidFill>
+                  <a:srgbClr val="0A2240"/>
+                </a:solidFill>
+                <a:latin typeface="Arial"/>
+              </a:rPr>
+              <a:t>500 MB of database</a:t>
+            </a:r>
           </a:p>
         </p:txBody>
       </p:sp>
@@ -19387,8 +19171,8 @@
         </p:nvSpPr>
         <p:spPr>
           <a:xfrm>
-            <a:off x="457200" y="2401823"/>
-            <a:ext cx="4637841" cy="936752"/>
+            <a:off x="457200" y="3267456"/>
+            <a:ext cx="6865659" cy="609600"/>
           </a:xfrm>
           <a:prstGeom prst="rect">
             <a:avLst/>
@@ -19409,7 +19193,7 @@
                 </a:solidFill>
                 <a:latin typeface="Arial"/>
               </a:rPr>
-              <a:t>Court opinions</a:t>
+              <a:t>50,000 users a month</a:t>
             </a:r>
           </a:p>
         </p:txBody>
@@ -19417,35 +19201,37 @@
       <p:sp>
         <p:nvSpPr>
           <p:cNvPr id="7" name="TextBox 6"/>
-          <p:cNvSpPr txBox="1"/>
-          <p:nvPr/>
-        </p:nvSpPr>
-        <p:spPr>
-          <a:xfrm>
-            <a:off x="4971690" y="2401823"/>
-            <a:ext cx="7220310" cy="936752"/>
-          </a:xfrm>
-          <a:prstGeom prst="rect">
-            <a:avLst/>
-          </a:prstGeom>
-          <a:noFill/>
-        </p:spPr>
-        <p:txBody>
-          <a:bodyPr wrap="none" lIns="0" rIns="0">
-            <a:noAutofit/>
-          </a:bodyPr>
-          <a:lstStyle/>
-          <a:p>
-            <a:pPr algn="l"/>
-            <a:r>
-              <a:rPr sz="3400" b="0" i="0">
+          <p:cNvSpPr/>
+          <p:nvPr>
+            <p:ph type="sldNum" idx="12"/>
+          </p:nvPr>
+        </p:nvSpPr>
+        <p:spPr>
+          <a:xfrm>
+            <a:off x="11186160" y="6035040"/>
+            <a:ext cx="548640" cy="365760"/>
+          </a:xfrm>
+          <a:prstGeom prst="rect">
+            <a:avLst/>
+          </a:prstGeom>
+          <a:noFill/>
+        </p:spPr>
+        <p:txBody>
+          <a:bodyPr wrap="none" lIns="0" rIns="0">
+            <a:noAutofit/>
+          </a:bodyPr>
+          <a:lstStyle/>
+          <a:p>
+            <a:pPr algn="r"/>
+            <a:fld id="{4B0E1F8A-6C1D-4E2A-9F3B-7A5C8D2E1F60}" type="slidenum">
+              <a:rPr sz="1600" b="0" i="0">
                 <a:solidFill>
                   <a:srgbClr val="0A2240"/>
                 </a:solidFill>
                 <a:latin typeface="Arial"/>
               </a:rPr>
-              <a:t>Thousands, fetched daily</a:t>
-            </a:r>
+              <a:t>16</a:t>
+            </a:fld>
           </a:p>
         </p:txBody>
       </p:sp>
@@ -19457,172 +19243,31 @@
         </p:nvSpPr>
         <p:spPr>
           <a:xfrm>
-            <a:off x="457200" y="3612895"/>
-            <a:ext cx="5943024" cy="936752"/>
-          </a:xfrm>
-          <a:prstGeom prst="rect">
-            <a:avLst/>
-          </a:prstGeom>
-          <a:noFill/>
-        </p:spPr>
-        <p:txBody>
-          <a:bodyPr wrap="none" lIns="0" rIns="0">
-            <a:noAutofit/>
-          </a:bodyPr>
-          <a:lstStyle/>
-          <a:p>
-            <a:pPr algn="l"/>
-            <a:r>
-              <a:rPr sz="3400" b="0" i="0">
-                <a:solidFill>
-                  <a:srgbClr val="0A2240"/>
-                </a:solidFill>
-                <a:latin typeface="Arial"/>
-              </a:rPr>
-              <a:t>Is it about asylum?</a:t>
-            </a:r>
-          </a:p>
-        </p:txBody>
-      </p:sp>
-      <p:sp>
-        <p:nvSpPr>
-          <p:cNvPr id="9" name="TextBox 8"/>
-          <p:cNvSpPr txBox="1"/>
-          <p:nvPr/>
-        </p:nvSpPr>
-        <p:spPr>
-          <a:xfrm>
-            <a:off x="4971690" y="3612895"/>
-            <a:ext cx="5905579" cy="936752"/>
-          </a:xfrm>
-          <a:prstGeom prst="rect">
-            <a:avLst/>
-          </a:prstGeom>
-          <a:noFill/>
-        </p:spPr>
-        <p:txBody>
-          <a:bodyPr wrap="none" lIns="0" rIns="0">
-            <a:noAutofit/>
-          </a:bodyPr>
-          <a:lstStyle/>
-          <a:p>
-            <a:pPr algn="l"/>
-            <a:r>
-              <a:rPr sz="3400" b="0" i="0">
-                <a:solidFill>
-                  <a:srgbClr val="0A2240"/>
-                </a:solidFill>
-                <a:latin typeface="Arial"/>
-              </a:rPr>
-              <a:t>A yes or a no each</a:t>
-            </a:r>
-          </a:p>
-        </p:txBody>
-      </p:sp>
-      <p:sp>
-        <p:nvSpPr>
-          <p:cNvPr id="10" name="TextBox 9"/>
-          <p:cNvSpPr txBox="1"/>
-          <p:nvPr/>
-        </p:nvSpPr>
-        <p:spPr>
-          <a:xfrm>
-            <a:off x="457200" y="4823967"/>
-            <a:ext cx="3984744" cy="936752"/>
-          </a:xfrm>
-          <a:prstGeom prst="rect">
-            <a:avLst/>
-          </a:prstGeom>
-          <a:noFill/>
-        </p:spPr>
-        <p:txBody>
-          <a:bodyPr wrap="none" lIns="0" rIns="0">
-            <a:noAutofit/>
-          </a:bodyPr>
-          <a:lstStyle/>
-          <a:p>
-            <a:pPr algn="l"/>
-            <a:r>
-              <a:rPr sz="3400" b="0" i="0">
-                <a:solidFill>
-                  <a:srgbClr val="0A2240"/>
-                </a:solidFill>
-                <a:latin typeface="Arial"/>
-              </a:rPr>
-              <a:t>Case details</a:t>
-            </a:r>
-          </a:p>
-        </p:txBody>
-      </p:sp>
-      <p:sp>
-        <p:nvSpPr>
-          <p:cNvPr id="11" name="TextBox 10"/>
-          <p:cNvSpPr txBox="1"/>
-          <p:nvPr/>
-        </p:nvSpPr>
-        <p:spPr>
-          <a:xfrm>
-            <a:off x="4971690" y="4823967"/>
-            <a:ext cx="7220310" cy="936752"/>
-          </a:xfrm>
-          <a:prstGeom prst="rect">
-            <a:avLst/>
-          </a:prstGeom>
-          <a:noFill/>
-        </p:spPr>
-        <p:txBody>
-          <a:bodyPr wrap="none" lIns="0" rIns="0">
-            <a:noAutofit/>
-          </a:bodyPr>
-          <a:lstStyle/>
-          <a:p>
-            <a:pPr algn="l"/>
-            <a:r>
-              <a:rPr sz="3400" b="0" i="0">
-                <a:solidFill>
-                  <a:srgbClr val="0A2240"/>
-                </a:solidFill>
-                <a:latin typeface="Arial"/>
-              </a:rPr>
-              <a:t>Country, outcome, more</a:t>
-            </a:r>
-          </a:p>
-        </p:txBody>
-      </p:sp>
-      <p:sp>
-        <p:nvSpPr>
-          <p:cNvPr id="12" name="TextBox 11"/>
-          <p:cNvSpPr/>
-          <p:nvPr>
-            <p:ph type="sldNum" idx="12"/>
-          </p:nvPr>
-        </p:nvSpPr>
-        <p:spPr>
-          <a:xfrm>
-            <a:off x="11186160" y="6035040"/>
-            <a:ext cx="548640" cy="365760"/>
-          </a:xfrm>
-          <a:prstGeom prst="rect">
-            <a:avLst/>
-          </a:prstGeom>
-          <a:noFill/>
-        </p:spPr>
-        <p:txBody>
-          <a:bodyPr wrap="none" lIns="0" rIns="0">
-            <a:noAutofit/>
-          </a:bodyPr>
-          <a:lstStyle/>
-          <a:p>
-            <a:pPr algn="r"/>
-            <a:fld id="{4B0E1F8A-6C1D-4E2A-9F3B-7A5C8D2E1F60}" type="slidenum">
-              <a:rPr sz="1600" b="0" i="0">
-                <a:solidFill>
-                  <a:srgbClr val="5B6B82"/>
-                </a:solidFill>
-                <a:latin typeface="Arial"/>
-              </a:rPr>
-              <a:t>16</a:t>
-            </a:fld>
+            <a:off x="10085130" y="6035040"/>
+            <a:ext cx="1213008" cy="365760"/>
+          </a:xfrm>
+          <a:prstGeom prst="rect">
+            <a:avLst/>
+          </a:prstGeom>
+          <a:noFill/>
+        </p:spPr>
+        <p:txBody>
+          <a:bodyPr wrap="none" lIns="0" rIns="0">
+            <a:noAutofit/>
+          </a:bodyPr>
+          <a:lstStyle/>
+          <a:p>
+            <a:pPr algn="l"/>
+            <a:r>
+              <a:rPr sz="1600" b="0" i="0" u="sng">
+                <a:solidFill>
+                  <a:srgbClr val="0072CE"/>
+                </a:solidFill>
+                <a:latin typeface="Arial"/>
+                <a:hlinkClick r:id="rId3"/>
+              </a:rPr>
+              <a:t>Source</a:t>
+            </a:r>
           </a:p>
         </p:txBody>
       </p:sp>
@@ -19682,7 +19327,7 @@
                 </a:solidFill>
                 <a:latin typeface="Arial"/>
               </a:rPr>
-              <a:t>Your First Ten Minutes</a:t>
+              <a:t>A Real Project That Uses It</a:t>
             </a:r>
           </a:p>
         </p:txBody>
@@ -19696,28 +19341,28 @@
         <p:spPr>
           <a:xfrm>
             <a:off x="457200" y="1499616"/>
-            <a:ext cx="1132164" cy="640080"/>
-          </a:xfrm>
-          <a:prstGeom prst="rect">
-            <a:avLst/>
-          </a:prstGeom>
-          <a:noFill/>
-        </p:spPr>
-        <p:txBody>
-          <a:bodyPr wrap="none" lIns="0" rIns="0">
-            <a:noAutofit/>
-          </a:bodyPr>
-          <a:lstStyle/>
-          <a:p>
-            <a:pPr algn="l"/>
-            <a:r>
-              <a:rPr sz="4200" b="1" i="0">
+            <a:ext cx="4750851" cy="518159"/>
+          </a:xfrm>
+          <a:prstGeom prst="rect">
+            <a:avLst/>
+          </a:prstGeom>
+          <a:noFill/>
+        </p:spPr>
+        <p:txBody>
+          <a:bodyPr wrap="none" lIns="0" rIns="0">
+            <a:noAutofit/>
+          </a:bodyPr>
+          <a:lstStyle/>
+          <a:p>
+            <a:pPr algn="l"/>
+            <a:r>
+              <a:rPr sz="3400" b="1" i="0">
                 <a:solidFill>
                   <a:srgbClr val="0072CE"/>
                 </a:solidFill>
                 <a:latin typeface="Arial"/>
               </a:rPr>
-              <a:t>01</a:t>
+              <a:t>What it stores</a:t>
             </a:r>
           </a:p>
         </p:txBody>
@@ -19730,65 +19375,74 @@
         </p:nvSpPr>
         <p:spPr>
           <a:xfrm>
-            <a:off x="1461983" y="1499616"/>
-            <a:ext cx="10272817" cy="640080"/>
-          </a:xfrm>
-          <a:prstGeom prst="rect">
-            <a:avLst/>
-          </a:prstGeom>
-          <a:noFill/>
-        </p:spPr>
-        <p:txBody>
-          <a:bodyPr wrap="none" lIns="0" rIns="0">
-            <a:noAutofit/>
-          </a:bodyPr>
-          <a:lstStyle/>
-          <a:p>
-            <a:pPr algn="l"/>
-            <a:r>
-              <a:rPr sz="4200" b="1" i="0">
+            <a:off x="4971690" y="1499616"/>
+            <a:ext cx="5166583" cy="518159"/>
+          </a:xfrm>
+          <a:prstGeom prst="rect">
+            <a:avLst/>
+          </a:prstGeom>
+          <a:noFill/>
+        </p:spPr>
+        <p:txBody>
+          <a:bodyPr wrap="none" lIns="0" rIns="0">
+            <a:noAutofit/>
+          </a:bodyPr>
+          <a:lstStyle/>
+          <a:p>
+            <a:pPr algn="l"/>
+            <a:r>
+              <a:rPr sz="3400" b="1" i="0">
                 <a:solidFill>
                   <a:srgbClr val="0072CE"/>
                 </a:solidFill>
                 <a:latin typeface="Arial"/>
               </a:rPr>
-              <a:t>Make an account</a:t>
-            </a:r>
-          </a:p>
-        </p:txBody>
-      </p:sp>
-      <p:sp>
-        <p:nvSpPr>
-          <p:cNvPr id="5" name="TextBox 4"/>
-          <p:cNvSpPr txBox="1"/>
+              <a:t>Example</a:t>
+            </a:r>
+          </a:p>
+        </p:txBody>
+      </p:sp>
+      <p:sp>
+        <p:nvSpPr>
+          <p:cNvPr id="5" name="Rectangle 4"/>
+          <p:cNvSpPr/>
           <p:nvPr/>
         </p:nvSpPr>
         <p:spPr>
           <a:xfrm>
-            <a:off x="1461983" y="2185416"/>
-            <a:ext cx="10272817" cy="551688"/>
-          </a:xfrm>
-          <a:prstGeom prst="rect">
-            <a:avLst/>
-          </a:prstGeom>
-          <a:noFill/>
-        </p:spPr>
-        <p:txBody>
-          <a:bodyPr wrap="none" lIns="0" rIns="0">
-            <a:noAutofit/>
-          </a:bodyPr>
-          <a:lstStyle/>
-          <a:p>
-            <a:pPr algn="l"/>
-            <a:r>
-              <a:rPr sz="3400" b="0" i="0">
-                <a:solidFill>
-                  <a:srgbClr val="0A2240"/>
-                </a:solidFill>
-                <a:latin typeface="Arial"/>
-              </a:rPr>
-              <a:t>The free plan is enough</a:t>
-            </a:r>
+            <a:off x="457200" y="2072639"/>
+            <a:ext cx="9681073" cy="54864"/>
+          </a:xfrm>
+          <a:prstGeom prst="rect">
+            <a:avLst/>
+          </a:prstGeom>
+          <a:solidFill>
+            <a:srgbClr val="0072CE"/>
+          </a:solidFill>
+          <a:ln>
+            <a:noFill/>
+          </a:ln>
+          <a:effectLst/>
+        </p:spPr>
+        <p:style>
+          <a:lnRef idx="1">
+            <a:schemeClr val="accent1"/>
+          </a:lnRef>
+          <a:fillRef idx="3">
+            <a:schemeClr val="accent1"/>
+          </a:fillRef>
+          <a:effectRef idx="2">
+            <a:schemeClr val="accent1"/>
+          </a:effectRef>
+          <a:fontRef idx="minor">
+            <a:schemeClr val="lt1"/>
+          </a:fontRef>
+        </p:style>
+        <p:txBody>
+          <a:bodyPr rtlCol="0" anchor="ctr"/>
+          <a:lstStyle/>
+          <a:p>
+            <a:pPr algn="ctr"/>
           </a:p>
         </p:txBody>
       </p:sp>
@@ -19800,29 +19454,29 @@
         </p:nvSpPr>
         <p:spPr>
           <a:xfrm>
-            <a:off x="457200" y="3011424"/>
-            <a:ext cx="1132164" cy="640080"/>
-          </a:xfrm>
-          <a:prstGeom prst="rect">
-            <a:avLst/>
-          </a:prstGeom>
-          <a:noFill/>
-        </p:spPr>
-        <p:txBody>
-          <a:bodyPr wrap="none" lIns="0" rIns="0">
-            <a:noAutofit/>
-          </a:bodyPr>
-          <a:lstStyle/>
-          <a:p>
-            <a:pPr algn="l"/>
-            <a:r>
-              <a:rPr sz="4200" b="1" i="0">
-                <a:solidFill>
-                  <a:srgbClr val="0072CE"/>
-                </a:solidFill>
-                <a:latin typeface="Arial"/>
-              </a:rPr>
-              <a:t>02</a:t>
+            <a:off x="457200" y="2401823"/>
+            <a:ext cx="4637841" cy="936752"/>
+          </a:xfrm>
+          <a:prstGeom prst="rect">
+            <a:avLst/>
+          </a:prstGeom>
+          <a:noFill/>
+        </p:spPr>
+        <p:txBody>
+          <a:bodyPr wrap="none" lIns="0" rIns="0">
+            <a:noAutofit/>
+          </a:bodyPr>
+          <a:lstStyle/>
+          <a:p>
+            <a:pPr algn="l"/>
+            <a:r>
+              <a:rPr sz="3400" b="0" i="0">
+                <a:solidFill>
+                  <a:srgbClr val="0A2240"/>
+                </a:solidFill>
+                <a:latin typeface="Arial"/>
+              </a:rPr>
+              <a:t>Court opinions</a:t>
             </a:r>
           </a:p>
         </p:txBody>
@@ -19835,29 +19489,29 @@
         </p:nvSpPr>
         <p:spPr>
           <a:xfrm>
-            <a:off x="1461983" y="3011424"/>
-            <a:ext cx="10272817" cy="640080"/>
-          </a:xfrm>
-          <a:prstGeom prst="rect">
-            <a:avLst/>
-          </a:prstGeom>
-          <a:noFill/>
-        </p:spPr>
-        <p:txBody>
-          <a:bodyPr wrap="none" lIns="0" rIns="0">
-            <a:noAutofit/>
-          </a:bodyPr>
-          <a:lstStyle/>
-          <a:p>
-            <a:pPr algn="l"/>
-            <a:r>
-              <a:rPr sz="4200" b="1" i="0">
-                <a:solidFill>
-                  <a:srgbClr val="0072CE"/>
-                </a:solidFill>
-                <a:latin typeface="Arial"/>
-              </a:rPr>
-              <a:t>Create a project</a:t>
+            <a:off x="4971690" y="2401823"/>
+            <a:ext cx="7220310" cy="936752"/>
+          </a:xfrm>
+          <a:prstGeom prst="rect">
+            <a:avLst/>
+          </a:prstGeom>
+          <a:noFill/>
+        </p:spPr>
+        <p:txBody>
+          <a:bodyPr wrap="none" lIns="0" rIns="0">
+            <a:noAutofit/>
+          </a:bodyPr>
+          <a:lstStyle/>
+          <a:p>
+            <a:pPr algn="l"/>
+            <a:r>
+              <a:rPr sz="3400" b="0" i="0">
+                <a:solidFill>
+                  <a:srgbClr val="0A2240"/>
+                </a:solidFill>
+                <a:latin typeface="Arial"/>
+              </a:rPr>
+              <a:t>Thousands, fetched daily</a:t>
             </a:r>
           </a:p>
         </p:txBody>
@@ -19870,8 +19524,8 @@
         </p:nvSpPr>
         <p:spPr>
           <a:xfrm>
-            <a:off x="1461983" y="3697224"/>
-            <a:ext cx="10272817" cy="551688"/>
+            <a:off x="457200" y="3612895"/>
+            <a:ext cx="5943024" cy="936752"/>
           </a:xfrm>
           <a:prstGeom prst="rect">
             <a:avLst/>
@@ -19892,7 +19546,7 @@
                 </a:solidFill>
                 <a:latin typeface="Arial"/>
               </a:rPr>
-              <a:t>You get a database right away</a:t>
+              <a:t>Is it about asylum?</a:t>
             </a:r>
           </a:p>
         </p:txBody>
@@ -19905,29 +19559,29 @@
         </p:nvSpPr>
         <p:spPr>
           <a:xfrm>
-            <a:off x="457200" y="4523232"/>
-            <a:ext cx="1132164" cy="640080"/>
-          </a:xfrm>
-          <a:prstGeom prst="rect">
-            <a:avLst/>
-          </a:prstGeom>
-          <a:noFill/>
-        </p:spPr>
-        <p:txBody>
-          <a:bodyPr wrap="none" lIns="0" rIns="0">
-            <a:noAutofit/>
-          </a:bodyPr>
-          <a:lstStyle/>
-          <a:p>
-            <a:pPr algn="l"/>
-            <a:r>
-              <a:rPr sz="4200" b="1" i="0">
-                <a:solidFill>
-                  <a:srgbClr val="0072CE"/>
-                </a:solidFill>
-                <a:latin typeface="Arial"/>
-              </a:rPr>
-              <a:t>03</a:t>
+            <a:off x="4971690" y="3612895"/>
+            <a:ext cx="5905579" cy="936752"/>
+          </a:xfrm>
+          <a:prstGeom prst="rect">
+            <a:avLst/>
+          </a:prstGeom>
+          <a:noFill/>
+        </p:spPr>
+        <p:txBody>
+          <a:bodyPr wrap="none" lIns="0" rIns="0">
+            <a:noAutofit/>
+          </a:bodyPr>
+          <a:lstStyle/>
+          <a:p>
+            <a:pPr algn="l"/>
+            <a:r>
+              <a:rPr sz="3400" b="0" i="0">
+                <a:solidFill>
+                  <a:srgbClr val="0A2240"/>
+                </a:solidFill>
+                <a:latin typeface="Arial"/>
+              </a:rPr>
+              <a:t>A yes or a no each</a:t>
             </a:r>
           </a:p>
         </p:txBody>
@@ -19940,29 +19594,29 @@
         </p:nvSpPr>
         <p:spPr>
           <a:xfrm>
-            <a:off x="1461983" y="4523232"/>
-            <a:ext cx="10272817" cy="640080"/>
-          </a:xfrm>
-          <a:prstGeom prst="rect">
-            <a:avLst/>
-          </a:prstGeom>
-          <a:noFill/>
-        </p:spPr>
-        <p:txBody>
-          <a:bodyPr wrap="none" lIns="0" rIns="0">
-            <a:noAutofit/>
-          </a:bodyPr>
-          <a:lstStyle/>
-          <a:p>
-            <a:pPr algn="l"/>
-            <a:r>
-              <a:rPr sz="4200" b="1" i="0">
-                <a:solidFill>
-                  <a:srgbClr val="0072CE"/>
-                </a:solidFill>
-                <a:latin typeface="Arial"/>
-              </a:rPr>
-              <a:t>Make one table</a:t>
+            <a:off x="457200" y="4823967"/>
+            <a:ext cx="3984744" cy="936752"/>
+          </a:xfrm>
+          <a:prstGeom prst="rect">
+            <a:avLst/>
+          </a:prstGeom>
+          <a:noFill/>
+        </p:spPr>
+        <p:txBody>
+          <a:bodyPr wrap="none" lIns="0" rIns="0">
+            <a:noAutofit/>
+          </a:bodyPr>
+          <a:lstStyle/>
+          <a:p>
+            <a:pPr algn="l"/>
+            <a:r>
+              <a:rPr sz="3400" b="0" i="0">
+                <a:solidFill>
+                  <a:srgbClr val="0A2240"/>
+                </a:solidFill>
+                <a:latin typeface="Arial"/>
+              </a:rPr>
+              <a:t>Case details</a:t>
             </a:r>
           </a:p>
         </p:txBody>
@@ -19975,8 +19629,8 @@
         </p:nvSpPr>
         <p:spPr>
           <a:xfrm>
-            <a:off x="1461983" y="5209032"/>
-            <a:ext cx="10272817" cy="551688"/>
+            <a:off x="4971690" y="4823967"/>
+            <a:ext cx="7220310" cy="936752"/>
           </a:xfrm>
           <a:prstGeom prst="rect">
             <a:avLst/>
@@ -19997,7 +19651,7 @@
                 </a:solidFill>
                 <a:latin typeface="Arial"/>
               </a:rPr>
-              <a:t>Then add a row by hand</a:t>
+              <a:t>Country, outcome, more</a:t>
             </a:r>
           </a:p>
         </p:txBody>
@@ -20030,7 +19684,7 @@
             <a:fld id="{4B0E1F8A-6C1D-4E2A-9F3B-7A5C8D2E1F60}" type="slidenum">
               <a:rPr sz="1600" b="0" i="0">
                 <a:solidFill>
-                  <a:srgbClr val="5B6B82"/>
+                  <a:srgbClr val="0A2240"/>
                 </a:solidFill>
                 <a:latin typeface="Arial"/>
               </a:rPr>
@@ -20109,7 +19763,7 @@
         <p:spPr>
           <a:xfrm>
             <a:off x="457200" y="1499616"/>
-            <a:ext cx="3945612" cy="518159"/>
+            <a:ext cx="5333779" cy="518159"/>
           </a:xfrm>
           <a:prstGeom prst="rect">
             <a:avLst/>
@@ -20143,8 +19797,8 @@
         </p:nvSpPr>
         <p:spPr>
           <a:xfrm>
-            <a:off x="4563504" y="1499616"/>
-            <a:ext cx="5070862" cy="518159"/>
+            <a:off x="6339619" y="1499616"/>
+            <a:ext cx="4942462" cy="518159"/>
           </a:xfrm>
           <a:prstGeom prst="rect">
             <a:avLst/>
@@ -20179,7 +19833,7 @@
         <p:spPr>
           <a:xfrm>
             <a:off x="457200" y="2072639"/>
-            <a:ext cx="9177166" cy="54864"/>
+            <a:ext cx="10448530" cy="54864"/>
           </a:xfrm>
           <a:prstGeom prst="rect">
             <a:avLst/>
@@ -20223,7 +19877,7 @@
         <p:spPr>
           <a:xfrm>
             <a:off x="457200" y="2401823"/>
-            <a:ext cx="3562726" cy="452323"/>
+            <a:ext cx="8055808" cy="452323"/>
           </a:xfrm>
           <a:prstGeom prst="rect">
             <a:avLst/>
@@ -20244,7 +19898,7 @@
                 </a:solidFill>
                 <a:latin typeface="Arial"/>
               </a:rPr>
-              <a:t>Homepage</a:t>
+              <a:t>Homepage, editor, sign-in</a:t>
             </a:r>
           </a:p>
         </p:txBody>
@@ -20257,8 +19911,8 @@
         </p:nvSpPr>
         <p:spPr>
           <a:xfrm>
-            <a:off x="4563504" y="2401823"/>
-            <a:ext cx="5070862" cy="452323"/>
+            <a:off x="6339619" y="2401823"/>
+            <a:ext cx="4676299" cy="452323"/>
           </a:xfrm>
           <a:prstGeom prst="rect">
             <a:avLst/>
@@ -20293,7 +19947,7 @@
         <p:spPr>
           <a:xfrm>
             <a:off x="457200" y="3128466"/>
-            <a:ext cx="3754675" cy="452323"/>
+            <a:ext cx="8131710" cy="452323"/>
           </a:xfrm>
           <a:prstGeom prst="rect">
             <a:avLst/>
@@ -20314,7 +19968,7 @@
                 </a:solidFill>
                 <a:latin typeface="Arial"/>
               </a:rPr>
-              <a:t>Table editor</a:t>
+              <a:t>Two ways to make a table</a:t>
             </a:r>
           </a:p>
         </p:txBody>
@@ -20327,8 +19981,8 @@
         </p:nvSpPr>
         <p:spPr>
           <a:xfrm>
-            <a:off x="4563504" y="3128466"/>
-            <a:ext cx="7628496" cy="452323"/>
+            <a:off x="6339619" y="3128466"/>
+            <a:ext cx="5852381" cy="452323"/>
           </a:xfrm>
           <a:prstGeom prst="rect">
             <a:avLst/>
@@ -20349,7 +20003,7 @@
                 </a:solidFill>
                 <a:latin typeface="Arial"/>
               </a:rPr>
-              <a:t>supabase.com/database</a:t>
+              <a:t>supabase.com/docs</a:t>
             </a:r>
           </a:p>
         </p:txBody>
@@ -20363,7 +20017,7 @@
         <p:spPr>
           <a:xfrm>
             <a:off x="457200" y="3855109"/>
-            <a:ext cx="3557664" cy="452323"/>
+            <a:ext cx="7313652" cy="452323"/>
           </a:xfrm>
           <a:prstGeom prst="rect">
             <a:avLst/>
@@ -20384,7 +20038,7 @@
                 </a:solidFill>
                 <a:latin typeface="Arial"/>
               </a:rPr>
-              <a:t>Sign-in</a:t>
+              <a:t>Claude and MCP setup</a:t>
             </a:r>
           </a:p>
         </p:txBody>
@@ -20397,8 +20051,8 @@
         </p:nvSpPr>
         <p:spPr>
           <a:xfrm>
-            <a:off x="4563504" y="3855109"/>
-            <a:ext cx="6212899" cy="452323"/>
+            <a:off x="6339619" y="3855109"/>
+            <a:ext cx="5852381" cy="452323"/>
           </a:xfrm>
           <a:prstGeom prst="rect">
             <a:avLst/>
@@ -20419,7 +20073,7 @@
                 </a:solidFill>
                 <a:latin typeface="Arial"/>
               </a:rPr>
-              <a:t>supabase.com/auth</a:t>
+              <a:t>supabase.com/docs</a:t>
             </a:r>
           </a:p>
         </p:txBody>
@@ -20433,7 +20087,7 @@
         <p:spPr>
           <a:xfrm>
             <a:off x="457200" y="4581752"/>
-            <a:ext cx="5289926" cy="452323"/>
+            <a:ext cx="5333779" cy="452323"/>
           </a:xfrm>
           <a:prstGeom prst="rect">
             <a:avLst/>
@@ -20467,8 +20121,8 @@
         </p:nvSpPr>
         <p:spPr>
           <a:xfrm>
-            <a:off x="4563504" y="4581752"/>
-            <a:ext cx="6327596" cy="452323"/>
+            <a:off x="6339619" y="4581752"/>
+            <a:ext cx="5852381" cy="452323"/>
           </a:xfrm>
           <a:prstGeom prst="rect">
             <a:avLst/>
@@ -20503,7 +20157,7 @@
         <p:spPr>
           <a:xfrm>
             <a:off x="457200" y="5308395"/>
-            <a:ext cx="3557664" cy="452323"/>
+            <a:ext cx="5333779" cy="452323"/>
           </a:xfrm>
           <a:prstGeom prst="rect">
             <a:avLst/>
@@ -20537,8 +20191,8 @@
         </p:nvSpPr>
         <p:spPr>
           <a:xfrm>
-            <a:off x="4563504" y="5308395"/>
-            <a:ext cx="6903441" cy="452323"/>
+            <a:off x="6339619" y="5308395"/>
+            <a:ext cx="5852381" cy="452323"/>
           </a:xfrm>
           <a:prstGeom prst="rect">
             <a:avLst/>
@@ -20592,7 +20246,7 @@
             <a:fld id="{4B0E1F8A-6C1D-4E2A-9F3B-7A5C8D2E1F60}" type="slidenum">
               <a:rPr sz="1600" b="0" i="0">
                 <a:solidFill>
-                  <a:srgbClr val="5B6B82"/>
+                  <a:srgbClr val="0A2240"/>
                 </a:solidFill>
                 <a:latin typeface="Arial"/>
               </a:rPr>
@@ -20629,45 +20283,36 @@
       <p:grpSpPr/>
       <p:sp>
         <p:nvSpPr>
-          <p:cNvPr id="2" name="Rectangle 1"/>
-          <p:cNvSpPr/>
+          <p:cNvPr id="2" name="TextBox 1"/>
+          <p:cNvSpPr txBox="1"/>
           <p:nvPr/>
         </p:nvSpPr>
         <p:spPr>
           <a:xfrm>
-            <a:off x="457200" y="2926080"/>
-            <a:ext cx="128016" cy="1005840"/>
-          </a:xfrm>
-          <a:prstGeom prst="rect">
-            <a:avLst/>
-          </a:prstGeom>
-          <a:solidFill>
-            <a:srgbClr val="0072CE"/>
-          </a:solidFill>
-          <a:ln>
-            <a:noFill/>
-          </a:ln>
-          <a:effectLst/>
-        </p:spPr>
-        <p:style>
-          <a:lnRef idx="1">
-            <a:schemeClr val="accent1"/>
-          </a:lnRef>
-          <a:fillRef idx="3">
-            <a:schemeClr val="accent1"/>
-          </a:fillRef>
-          <a:effectRef idx="2">
-            <a:schemeClr val="accent1"/>
-          </a:effectRef>
-          <a:fontRef idx="minor">
-            <a:schemeClr val="lt1"/>
-          </a:fontRef>
-        </p:style>
-        <p:txBody>
-          <a:bodyPr rtlCol="0" anchor="ctr"/>
-          <a:lstStyle/>
-          <a:p>
-            <a:pPr algn="ctr"/>
+            <a:off x="457200" y="457200"/>
+            <a:ext cx="11734800" cy="768096"/>
+          </a:xfrm>
+          <a:prstGeom prst="rect">
+            <a:avLst/>
+          </a:prstGeom>
+          <a:noFill/>
+        </p:spPr>
+        <p:txBody>
+          <a:bodyPr wrap="none" lIns="0" rIns="0">
+            <a:noAutofit/>
+          </a:bodyPr>
+          <a:lstStyle/>
+          <a:p>
+            <a:pPr algn="l"/>
+            <a:r>
+              <a:rPr sz="4200" b="1" i="0">
+                <a:solidFill>
+                  <a:srgbClr val="0072CE"/>
+                </a:solidFill>
+                <a:latin typeface="Arial"/>
+              </a:rPr>
+              <a:t>Your First Session With Claude</a:t>
+            </a:r>
           </a:p>
         </p:txBody>
       </p:sp>
@@ -20679,36 +20324,316 @@
         </p:nvSpPr>
         <p:spPr>
           <a:xfrm>
-            <a:off x="996696" y="2926080"/>
-            <a:ext cx="11195304" cy="1005840"/>
-          </a:xfrm>
-          <a:prstGeom prst="rect">
-            <a:avLst/>
-          </a:prstGeom>
-          <a:noFill/>
-        </p:spPr>
-        <p:txBody>
-          <a:bodyPr wrap="none" lIns="0" rIns="0">
-            <a:noAutofit/>
-          </a:bodyPr>
-          <a:lstStyle/>
-          <a:p>
-            <a:pPr algn="l"/>
-            <a:r>
-              <a:rPr sz="6000" b="1" i="0">
+            <a:off x="457200" y="1499616"/>
+            <a:ext cx="1132164" cy="640080"/>
+          </a:xfrm>
+          <a:prstGeom prst="rect">
+            <a:avLst/>
+          </a:prstGeom>
+          <a:noFill/>
+        </p:spPr>
+        <p:txBody>
+          <a:bodyPr wrap="none" lIns="0" rIns="0">
+            <a:noAutofit/>
+          </a:bodyPr>
+          <a:lstStyle/>
+          <a:p>
+            <a:pPr algn="l"/>
+            <a:r>
+              <a:rPr sz="4200" b="1" i="0">
+                <a:solidFill>
+                  <a:srgbClr val="0072CE"/>
+                </a:solidFill>
+                <a:latin typeface="Arial"/>
+              </a:rPr>
+              <a:t>01</a:t>
+            </a:r>
+          </a:p>
+        </p:txBody>
+      </p:sp>
+      <p:sp>
+        <p:nvSpPr>
+          <p:cNvPr id="4" name="TextBox 3"/>
+          <p:cNvSpPr txBox="1"/>
+          <p:nvPr/>
+        </p:nvSpPr>
+        <p:spPr>
+          <a:xfrm>
+            <a:off x="1461983" y="1499616"/>
+            <a:ext cx="10730017" cy="640080"/>
+          </a:xfrm>
+          <a:prstGeom prst="rect">
+            <a:avLst/>
+          </a:prstGeom>
+          <a:noFill/>
+        </p:spPr>
+        <p:txBody>
+          <a:bodyPr wrap="none" lIns="0" rIns="0">
+            <a:noAutofit/>
+          </a:bodyPr>
+          <a:lstStyle/>
+          <a:p>
+            <a:pPr algn="l"/>
+            <a:r>
+              <a:rPr sz="4200" b="1" i="0">
+                <a:solidFill>
+                  <a:srgbClr val="0072CE"/>
+                </a:solidFill>
+                <a:latin typeface="Arial"/>
+              </a:rPr>
+              <a:t>Connect Claude to Supabase</a:t>
+            </a:r>
+          </a:p>
+        </p:txBody>
+      </p:sp>
+      <p:sp>
+        <p:nvSpPr>
+          <p:cNvPr id="5" name="TextBox 4"/>
+          <p:cNvSpPr txBox="1"/>
+          <p:nvPr/>
+        </p:nvSpPr>
+        <p:spPr>
+          <a:xfrm>
+            <a:off x="1461983" y="2185416"/>
+            <a:ext cx="10272817" cy="551688"/>
+          </a:xfrm>
+          <a:prstGeom prst="rect">
+            <a:avLst/>
+          </a:prstGeom>
+          <a:noFill/>
+        </p:spPr>
+        <p:txBody>
+          <a:bodyPr wrap="none" lIns="0" rIns="0">
+            <a:noAutofit/>
+          </a:bodyPr>
+          <a:lstStyle/>
+          <a:p>
+            <a:pPr algn="l"/>
+            <a:r>
+              <a:rPr sz="3400" b="0" i="0">
                 <a:solidFill>
                   <a:srgbClr val="0A2240"/>
                 </a:solidFill>
                 <a:latin typeface="Arial"/>
               </a:rPr>
-              <a:t>What should it remember?</a:t>
-            </a:r>
-          </a:p>
-        </p:txBody>
-      </p:sp>
-      <p:sp>
-        <p:nvSpPr>
-          <p:cNvPr id="4" name="TextBox 3"/>
+              <a:t>One claude mcp add command</a:t>
+            </a:r>
+          </a:p>
+        </p:txBody>
+      </p:sp>
+      <p:sp>
+        <p:nvSpPr>
+          <p:cNvPr id="6" name="TextBox 5"/>
+          <p:cNvSpPr txBox="1"/>
+          <p:nvPr/>
+        </p:nvSpPr>
+        <p:spPr>
+          <a:xfrm>
+            <a:off x="457200" y="3011424"/>
+            <a:ext cx="1132164" cy="640080"/>
+          </a:xfrm>
+          <a:prstGeom prst="rect">
+            <a:avLst/>
+          </a:prstGeom>
+          <a:noFill/>
+        </p:spPr>
+        <p:txBody>
+          <a:bodyPr wrap="none" lIns="0" rIns="0">
+            <a:noAutofit/>
+          </a:bodyPr>
+          <a:lstStyle/>
+          <a:p>
+            <a:pPr algn="l"/>
+            <a:r>
+              <a:rPr sz="4200" b="1" i="0">
+                <a:solidFill>
+                  <a:srgbClr val="0072CE"/>
+                </a:solidFill>
+                <a:latin typeface="Arial"/>
+              </a:rPr>
+              <a:t>02</a:t>
+            </a:r>
+          </a:p>
+        </p:txBody>
+      </p:sp>
+      <p:sp>
+        <p:nvSpPr>
+          <p:cNvPr id="7" name="TextBox 6"/>
+          <p:cNvSpPr txBox="1"/>
+          <p:nvPr/>
+        </p:nvSpPr>
+        <p:spPr>
+          <a:xfrm>
+            <a:off x="1461983" y="3011424"/>
+            <a:ext cx="10730017" cy="640080"/>
+          </a:xfrm>
+          <a:prstGeom prst="rect">
+            <a:avLst/>
+          </a:prstGeom>
+          <a:noFill/>
+        </p:spPr>
+        <p:txBody>
+          <a:bodyPr wrap="none" lIns="0" rIns="0">
+            <a:noAutofit/>
+          </a:bodyPr>
+          <a:lstStyle/>
+          <a:p>
+            <a:pPr algn="l"/>
+            <a:r>
+              <a:rPr sz="4200" b="1" i="0">
+                <a:solidFill>
+                  <a:srgbClr val="0072CE"/>
+                </a:solidFill>
+                <a:latin typeface="Arial"/>
+              </a:rPr>
+              <a:t>Describe the table you need</a:t>
+            </a:r>
+          </a:p>
+        </p:txBody>
+      </p:sp>
+      <p:sp>
+        <p:nvSpPr>
+          <p:cNvPr id="8" name="TextBox 7"/>
+          <p:cNvSpPr txBox="1"/>
+          <p:nvPr/>
+        </p:nvSpPr>
+        <p:spPr>
+          <a:xfrm>
+            <a:off x="1461983" y="3697224"/>
+            <a:ext cx="10730017" cy="551688"/>
+          </a:xfrm>
+          <a:prstGeom prst="rect">
+            <a:avLst/>
+          </a:prstGeom>
+          <a:noFill/>
+        </p:spPr>
+        <p:txBody>
+          <a:bodyPr wrap="none" lIns="0" rIns="0">
+            <a:noAutofit/>
+          </a:bodyPr>
+          <a:lstStyle/>
+          <a:p>
+            <a:pPr algn="l"/>
+            <a:r>
+              <a:rPr sz="3400" b="0" i="0">
+                <a:solidFill>
+                  <a:srgbClr val="0A2240"/>
+                </a:solidFill>
+                <a:latin typeface="Arial"/>
+              </a:rPr>
+              <a:t>In plain words; Claude writes the SQL</a:t>
+            </a:r>
+          </a:p>
+        </p:txBody>
+      </p:sp>
+      <p:sp>
+        <p:nvSpPr>
+          <p:cNvPr id="9" name="TextBox 8"/>
+          <p:cNvSpPr txBox="1"/>
+          <p:nvPr/>
+        </p:nvSpPr>
+        <p:spPr>
+          <a:xfrm>
+            <a:off x="457200" y="4523232"/>
+            <a:ext cx="1132164" cy="640080"/>
+          </a:xfrm>
+          <a:prstGeom prst="rect">
+            <a:avLst/>
+          </a:prstGeom>
+          <a:noFill/>
+        </p:spPr>
+        <p:txBody>
+          <a:bodyPr wrap="none" lIns="0" rIns="0">
+            <a:noAutofit/>
+          </a:bodyPr>
+          <a:lstStyle/>
+          <a:p>
+            <a:pPr algn="l"/>
+            <a:r>
+              <a:rPr sz="4200" b="1" i="0">
+                <a:solidFill>
+                  <a:srgbClr val="0072CE"/>
+                </a:solidFill>
+                <a:latin typeface="Arial"/>
+              </a:rPr>
+              <a:t>03</a:t>
+            </a:r>
+          </a:p>
+        </p:txBody>
+      </p:sp>
+      <p:sp>
+        <p:nvSpPr>
+          <p:cNvPr id="10" name="TextBox 9"/>
+          <p:cNvSpPr txBox="1"/>
+          <p:nvPr/>
+        </p:nvSpPr>
+        <p:spPr>
+          <a:xfrm>
+            <a:off x="1461983" y="4523232"/>
+            <a:ext cx="10272817" cy="640080"/>
+          </a:xfrm>
+          <a:prstGeom prst="rect">
+            <a:avLst/>
+          </a:prstGeom>
+          <a:noFill/>
+        </p:spPr>
+        <p:txBody>
+          <a:bodyPr wrap="none" lIns="0" rIns="0">
+            <a:noAutofit/>
+          </a:bodyPr>
+          <a:lstStyle/>
+          <a:p>
+            <a:pPr algn="l"/>
+            <a:r>
+              <a:rPr sz="4200" b="1" i="0">
+                <a:solidFill>
+                  <a:srgbClr val="0072CE"/>
+                </a:solidFill>
+                <a:latin typeface="Arial"/>
+              </a:rPr>
+              <a:t>Read it, then approve it</a:t>
+            </a:r>
+          </a:p>
+        </p:txBody>
+      </p:sp>
+      <p:sp>
+        <p:nvSpPr>
+          <p:cNvPr id="11" name="TextBox 10"/>
+          <p:cNvSpPr txBox="1"/>
+          <p:nvPr/>
+        </p:nvSpPr>
+        <p:spPr>
+          <a:xfrm>
+            <a:off x="1461983" y="5209032"/>
+            <a:ext cx="10272817" cy="551688"/>
+          </a:xfrm>
+          <a:prstGeom prst="rect">
+            <a:avLst/>
+          </a:prstGeom>
+          <a:noFill/>
+        </p:spPr>
+        <p:txBody>
+          <a:bodyPr wrap="none" lIns="0" rIns="0">
+            <a:noAutofit/>
+          </a:bodyPr>
+          <a:lstStyle/>
+          <a:p>
+            <a:pPr algn="l"/>
+            <a:r>
+              <a:rPr sz="3400" b="0" i="0">
+                <a:solidFill>
+                  <a:srgbClr val="0A2240"/>
+                </a:solidFill>
+                <a:latin typeface="Arial"/>
+              </a:rPr>
+              <a:t>Check that RLS is switched on</a:t>
+            </a:r>
+          </a:p>
+        </p:txBody>
+      </p:sp>
+      <p:sp>
+        <p:nvSpPr>
+          <p:cNvPr id="12" name="TextBox 11"/>
           <p:cNvSpPr/>
           <p:nvPr>
             <p:ph type="sldNum" idx="12"/>
@@ -20734,7 +20659,7 @@
             <a:fld id="{4B0E1F8A-6C1D-4E2A-9F3B-7A5C8D2E1F60}" type="slidenum">
               <a:rPr sz="1600" b="0" i="0">
                 <a:solidFill>
-                  <a:srgbClr val="5B6B82"/>
+                  <a:srgbClr val="0A2240"/>
                 </a:solidFill>
                 <a:latin typeface="Arial"/>
               </a:rPr>
@@ -20876,7 +20801,7 @@
             <a:fld id="{4B0E1F8A-6C1D-4E2A-9F3B-7A5C8D2E1F60}" type="slidenum">
               <a:rPr sz="1600" b="0" i="0">
                 <a:solidFill>
-                  <a:srgbClr val="5B6B82"/>
+                  <a:srgbClr val="0A2240"/>
                 </a:solidFill>
                 <a:latin typeface="Arial"/>
               </a:rPr>
@@ -21053,7 +20978,7 @@
             <a:fld id="{4B0E1F8A-6C1D-4E2A-9F3B-7A5C8D2E1F60}" type="slidenum">
               <a:rPr sz="1600" b="0" i="0">
                 <a:solidFill>
-                  <a:srgbClr val="5B6B82"/>
+                  <a:srgbClr val="0A2240"/>
                 </a:solidFill>
                 <a:latin typeface="Arial"/>
               </a:rPr>
@@ -21280,7 +21205,7 @@
             <a:fld id="{4B0E1F8A-6C1D-4E2A-9F3B-7A5C8D2E1F60}" type="slidenum">
               <a:rPr sz="1600" b="0" i="0">
                 <a:solidFill>
-                  <a:srgbClr val="5B6B82"/>
+                  <a:srgbClr val="0A2240"/>
                 </a:solidFill>
                 <a:latin typeface="Arial"/>
               </a:rPr>
@@ -21395,7 +21320,7 @@
         <p:spPr>
           <a:xfrm>
             <a:off x="457200" y="1499616"/>
-            <a:ext cx="3255068" cy="518159"/>
+            <a:ext cx="2214193" cy="518159"/>
           </a:xfrm>
           <a:prstGeom prst="rect">
             <a:avLst/>
@@ -21412,11 +21337,11 @@
             <a:r>
               <a:rPr sz="3400" b="1" i="0">
                 <a:solidFill>
-                  <a:srgbClr val="0A2240"/>
-                </a:solidFill>
-                <a:latin typeface="Arial"/>
-              </a:rPr>
-              <a:t>Database</a:t>
+                  <a:srgbClr val="0072CE"/>
+                </a:solidFill>
+                <a:latin typeface="Arial"/>
+              </a:rPr>
+              <a:t>Piece</a:t>
             </a:r>
           </a:p>
         </p:txBody>
@@ -21429,65 +21354,74 @@
         </p:nvSpPr>
         <p:spPr>
           <a:xfrm>
-            <a:off x="457200" y="2154935"/>
-            <a:ext cx="2613660" cy="3605785"/>
-          </a:xfrm>
-          <a:prstGeom prst="rect">
-            <a:avLst/>
-          </a:prstGeom>
-          <a:noFill/>
-        </p:spPr>
-        <p:txBody>
-          <a:bodyPr wrap="square" lIns="0" rIns="0">
-            <a:noAutofit/>
-          </a:bodyPr>
-          <a:lstStyle/>
-          <a:p>
-            <a:pPr algn="l"/>
-            <a:r>
-              <a:rPr sz="3400" b="0" i="0">
-                <a:solidFill>
-                  <a:srgbClr val="0A2240"/>
-                </a:solidFill>
-                <a:latin typeface="Arial"/>
-              </a:rPr>
-              <a:t>Tables of your data</a:t>
-            </a:r>
-          </a:p>
-        </p:txBody>
-      </p:sp>
-      <p:sp>
-        <p:nvSpPr>
-          <p:cNvPr id="5" name="TextBox 4"/>
-          <p:cNvSpPr txBox="1"/>
+            <a:off x="3220033" y="1499616"/>
+            <a:ext cx="4289702" cy="518159"/>
+          </a:xfrm>
+          <a:prstGeom prst="rect">
+            <a:avLst/>
+          </a:prstGeom>
+          <a:noFill/>
+        </p:spPr>
+        <p:txBody>
+          <a:bodyPr wrap="none" lIns="0" rIns="0">
+            <a:noAutofit/>
+          </a:bodyPr>
+          <a:lstStyle/>
+          <a:p>
+            <a:pPr algn="l"/>
+            <a:r>
+              <a:rPr sz="3400" b="1" i="0">
+                <a:solidFill>
+                  <a:srgbClr val="0072CE"/>
+                </a:solidFill>
+                <a:latin typeface="Arial"/>
+              </a:rPr>
+              <a:t>What it does</a:t>
+            </a:r>
+          </a:p>
+        </p:txBody>
+      </p:sp>
+      <p:sp>
+        <p:nvSpPr>
+          <p:cNvPr id="5" name="Rectangle 4"/>
+          <p:cNvSpPr/>
           <p:nvPr/>
         </p:nvSpPr>
         <p:spPr>
           <a:xfrm>
-            <a:off x="3345180" y="1499616"/>
-            <a:ext cx="2613660" cy="518159"/>
-          </a:xfrm>
-          <a:prstGeom prst="rect">
-            <a:avLst/>
-          </a:prstGeom>
-          <a:noFill/>
-        </p:spPr>
-        <p:txBody>
-          <a:bodyPr wrap="none" lIns="0" rIns="0">
-            <a:noAutofit/>
-          </a:bodyPr>
-          <a:lstStyle/>
-          <a:p>
-            <a:pPr algn="l"/>
-            <a:r>
-              <a:rPr sz="3400" b="1" i="0">
-                <a:solidFill>
-                  <a:srgbClr val="0A2240"/>
-                </a:solidFill>
-                <a:latin typeface="Arial"/>
-              </a:rPr>
-              <a:t>Auth</a:t>
-            </a:r>
+            <a:off x="457200" y="2072639"/>
+            <a:ext cx="7040726" cy="54864"/>
+          </a:xfrm>
+          <a:prstGeom prst="rect">
+            <a:avLst/>
+          </a:prstGeom>
+          <a:solidFill>
+            <a:srgbClr val="0072CE"/>
+          </a:solidFill>
+          <a:ln>
+            <a:noFill/>
+          </a:ln>
+          <a:effectLst/>
+        </p:spPr>
+        <p:style>
+          <a:lnRef idx="1">
+            <a:schemeClr val="accent1"/>
+          </a:lnRef>
+          <a:fillRef idx="3">
+            <a:schemeClr val="accent1"/>
+          </a:fillRef>
+          <a:effectRef idx="2">
+            <a:schemeClr val="accent1"/>
+          </a:effectRef>
+          <a:fontRef idx="minor">
+            <a:schemeClr val="lt1"/>
+          </a:fontRef>
+        </p:style>
+        <p:txBody>
+          <a:bodyPr rtlCol="0" anchor="ctr"/>
+          <a:lstStyle/>
+          <a:p>
+            <a:pPr algn="ctr"/>
           </a:p>
         </p:txBody>
       </p:sp>
@@ -21499,16 +21433,16 @@
         </p:nvSpPr>
         <p:spPr>
           <a:xfrm>
-            <a:off x="3345180" y="2154935"/>
-            <a:ext cx="2613660" cy="3605785"/>
-          </a:xfrm>
-          <a:prstGeom prst="rect">
-            <a:avLst/>
-          </a:prstGeom>
-          <a:noFill/>
-        </p:spPr>
-        <p:txBody>
-          <a:bodyPr wrap="square" lIns="0" rIns="0">
+            <a:off x="457200" y="2401823"/>
+            <a:ext cx="3140372" cy="633984"/>
+          </a:xfrm>
+          <a:prstGeom prst="rect">
+            <a:avLst/>
+          </a:prstGeom>
+          <a:noFill/>
+        </p:spPr>
+        <p:txBody>
+          <a:bodyPr wrap="none" lIns="0" rIns="0">
             <a:noAutofit/>
           </a:bodyPr>
           <a:lstStyle/>
@@ -21521,7 +21455,7 @@
                 </a:solidFill>
                 <a:latin typeface="Arial"/>
               </a:rPr>
-              <a:t>Who is signed in</a:t>
+              <a:t>Database</a:t>
             </a:r>
           </a:p>
         </p:txBody>
@@ -21534,29 +21468,29 @@
         </p:nvSpPr>
         <p:spPr>
           <a:xfrm>
-            <a:off x="6233160" y="1499616"/>
-            <a:ext cx="2755126" cy="518159"/>
-          </a:xfrm>
-          <a:prstGeom prst="rect">
-            <a:avLst/>
-          </a:prstGeom>
-          <a:noFill/>
-        </p:spPr>
-        <p:txBody>
-          <a:bodyPr wrap="none" lIns="0" rIns="0">
-            <a:noAutofit/>
-          </a:bodyPr>
-          <a:lstStyle/>
-          <a:p>
-            <a:pPr algn="l"/>
-            <a:r>
-              <a:rPr sz="3400" b="1" i="0">
+            <a:off x="3220033" y="2401823"/>
+            <a:ext cx="6020612" cy="633984"/>
+          </a:xfrm>
+          <a:prstGeom prst="rect">
+            <a:avLst/>
+          </a:prstGeom>
+          <a:noFill/>
+        </p:spPr>
+        <p:txBody>
+          <a:bodyPr wrap="none" lIns="0" rIns="0">
+            <a:noAutofit/>
+          </a:bodyPr>
+          <a:lstStyle/>
+          <a:p>
+            <a:pPr algn="l"/>
+            <a:r>
+              <a:rPr sz="3400" b="0" i="0">
                 <a:solidFill>
                   <a:srgbClr val="0A2240"/>
                 </a:solidFill>
                 <a:latin typeface="Arial"/>
               </a:rPr>
-              <a:t>Storage</a:t>
+              <a:t>Tables of your data</a:t>
             </a:r>
           </a:p>
         </p:txBody>
@@ -21569,16 +21503,16 @@
         </p:nvSpPr>
         <p:spPr>
           <a:xfrm>
-            <a:off x="6233160" y="2154935"/>
-            <a:ext cx="2613660" cy="3605785"/>
-          </a:xfrm>
-          <a:prstGeom prst="rect">
-            <a:avLst/>
-          </a:prstGeom>
-          <a:noFill/>
-        </p:spPr>
-        <p:txBody>
-          <a:bodyPr wrap="square" lIns="0" rIns="0">
+            <a:off x="457200" y="3310127"/>
+            <a:ext cx="2214193" cy="633984"/>
+          </a:xfrm>
+          <a:prstGeom prst="rect">
+            <a:avLst/>
+          </a:prstGeom>
+          <a:noFill/>
+        </p:spPr>
+        <p:txBody>
+          <a:bodyPr wrap="none" lIns="0" rIns="0">
             <a:noAutofit/>
           </a:bodyPr>
           <a:lstStyle/>
@@ -21591,7 +21525,7 @@
                 </a:solidFill>
                 <a:latin typeface="Arial"/>
               </a:rPr>
-              <a:t>Files people upload</a:t>
+              <a:t>Auth</a:t>
             </a:r>
           </a:p>
         </p:txBody>
@@ -21604,29 +21538,29 @@
         </p:nvSpPr>
         <p:spPr>
           <a:xfrm>
-            <a:off x="9121140" y="1499616"/>
-            <a:ext cx="2613660" cy="518159"/>
-          </a:xfrm>
-          <a:prstGeom prst="rect">
-            <a:avLst/>
-          </a:prstGeom>
-          <a:noFill/>
-        </p:spPr>
-        <p:txBody>
-          <a:bodyPr wrap="none" lIns="0" rIns="0">
-            <a:noAutofit/>
-          </a:bodyPr>
-          <a:lstStyle/>
-          <a:p>
-            <a:pPr algn="l"/>
-            <a:r>
-              <a:rPr sz="3400" b="1" i="0">
+            <a:off x="3220033" y="3310127"/>
+            <a:ext cx="5251806" cy="633984"/>
+          </a:xfrm>
+          <a:prstGeom prst="rect">
+            <a:avLst/>
+          </a:prstGeom>
+          <a:noFill/>
+        </p:spPr>
+        <p:txBody>
+          <a:bodyPr wrap="none" lIns="0" rIns="0">
+            <a:noAutofit/>
+          </a:bodyPr>
+          <a:lstStyle/>
+          <a:p>
+            <a:pPr algn="l"/>
+            <a:r>
+              <a:rPr sz="3400" b="0" i="0">
                 <a:solidFill>
                   <a:srgbClr val="0A2240"/>
                 </a:solidFill>
                 <a:latin typeface="Arial"/>
               </a:rPr>
-              <a:t>API</a:t>
+              <a:t>Who is signed in</a:t>
             </a:r>
           </a:p>
         </p:txBody>
@@ -21639,16 +21573,16 @@
         </p:nvSpPr>
         <p:spPr>
           <a:xfrm>
-            <a:off x="9121140" y="2154935"/>
-            <a:ext cx="2613660" cy="3605785"/>
-          </a:xfrm>
-          <a:prstGeom prst="rect">
-            <a:avLst/>
-          </a:prstGeom>
-          <a:noFill/>
-        </p:spPr>
-        <p:txBody>
-          <a:bodyPr wrap="square" lIns="0" rIns="0">
+            <a:off x="457200" y="4218431"/>
+            <a:ext cx="2602646" cy="633984"/>
+          </a:xfrm>
+          <a:prstGeom prst="rect">
+            <a:avLst/>
+          </a:prstGeom>
+          <a:noFill/>
+        </p:spPr>
+        <p:txBody>
+          <a:bodyPr wrap="none" lIns="0" rIns="0">
             <a:noAutofit/>
           </a:bodyPr>
           <a:lstStyle/>
@@ -21661,6 +21595,111 @@
                 </a:solidFill>
                 <a:latin typeface="Arial"/>
               </a:rPr>
+              <a:t>Storage</a:t>
+            </a:r>
+          </a:p>
+        </p:txBody>
+      </p:sp>
+      <p:sp>
+        <p:nvSpPr>
+          <p:cNvPr id="11" name="TextBox 10"/>
+          <p:cNvSpPr txBox="1"/>
+          <p:nvPr/>
+        </p:nvSpPr>
+        <p:spPr>
+          <a:xfrm>
+            <a:off x="3220033" y="4218431"/>
+            <a:ext cx="6174779" cy="633984"/>
+          </a:xfrm>
+          <a:prstGeom prst="rect">
+            <a:avLst/>
+          </a:prstGeom>
+          <a:noFill/>
+        </p:spPr>
+        <p:txBody>
+          <a:bodyPr wrap="none" lIns="0" rIns="0">
+            <a:noAutofit/>
+          </a:bodyPr>
+          <a:lstStyle/>
+          <a:p>
+            <a:pPr algn="l"/>
+            <a:r>
+              <a:rPr sz="3400" b="0" i="0">
+                <a:solidFill>
+                  <a:srgbClr val="0A2240"/>
+                </a:solidFill>
+                <a:latin typeface="Arial"/>
+              </a:rPr>
+              <a:t>Files people upload</a:t>
+            </a:r>
+          </a:p>
+        </p:txBody>
+      </p:sp>
+      <p:sp>
+        <p:nvSpPr>
+          <p:cNvPr id="12" name="TextBox 11"/>
+          <p:cNvSpPr txBox="1"/>
+          <p:nvPr/>
+        </p:nvSpPr>
+        <p:spPr>
+          <a:xfrm>
+            <a:off x="457200" y="5126735"/>
+            <a:ext cx="2214193" cy="633984"/>
+          </a:xfrm>
+          <a:prstGeom prst="rect">
+            <a:avLst/>
+          </a:prstGeom>
+          <a:noFill/>
+        </p:spPr>
+        <p:txBody>
+          <a:bodyPr wrap="none" lIns="0" rIns="0">
+            <a:noAutofit/>
+          </a:bodyPr>
+          <a:lstStyle/>
+          <a:p>
+            <a:pPr algn="l"/>
+            <a:r>
+              <a:rPr sz="3400" b="0" i="0">
+                <a:solidFill>
+                  <a:srgbClr val="0A2240"/>
+                </a:solidFill>
+                <a:latin typeface="Arial"/>
+              </a:rPr>
+              <a:t>API</a:t>
+            </a:r>
+          </a:p>
+        </p:txBody>
+      </p:sp>
+      <p:sp>
+        <p:nvSpPr>
+          <p:cNvPr id="13" name="TextBox 12"/>
+          <p:cNvSpPr txBox="1"/>
+          <p:nvPr/>
+        </p:nvSpPr>
+        <p:spPr>
+          <a:xfrm>
+            <a:off x="3220033" y="5126735"/>
+            <a:ext cx="6442292" cy="633984"/>
+          </a:xfrm>
+          <a:prstGeom prst="rect">
+            <a:avLst/>
+          </a:prstGeom>
+          <a:noFill/>
+        </p:spPr>
+        <p:txBody>
+          <a:bodyPr wrap="none" lIns="0" rIns="0">
+            <a:noAutofit/>
+          </a:bodyPr>
+          <a:lstStyle/>
+          <a:p>
+            <a:pPr algn="l"/>
+            <a:r>
+              <a:rPr sz="3400" b="0" i="0">
+                <a:solidFill>
+                  <a:srgbClr val="0A2240"/>
+                </a:solidFill>
+                <a:latin typeface="Arial"/>
+              </a:rPr>
               <a:t>How your page asks</a:t>
             </a:r>
           </a:p>
@@ -21668,7 +21707,7 @@
       </p:sp>
       <p:sp>
         <p:nvSpPr>
-          <p:cNvPr id="11" name="TextBox 10"/>
+          <p:cNvPr id="14" name="TextBox 13"/>
           <p:cNvSpPr/>
           <p:nvPr>
             <p:ph type="sldNum" idx="12"/>
@@ -21694,7 +21733,7 @@
             <a:fld id="{4B0E1F8A-6C1D-4E2A-9F3B-7A5C8D2E1F60}" type="slidenum">
               <a:rPr sz="1600" b="0" i="0">
                 <a:solidFill>
-                  <a:srgbClr val="5B6B82"/>
+                  <a:srgbClr val="0A2240"/>
                 </a:solidFill>
                 <a:latin typeface="Arial"/>
               </a:rPr>
@@ -21871,7 +21910,7 @@
             <a:fld id="{4B0E1F8A-6C1D-4E2A-9F3B-7A5C8D2E1F60}" type="slidenum">
               <a:rPr sz="1600" b="0" i="0">
                 <a:solidFill>
-                  <a:srgbClr val="5B6B82"/>
+                  <a:srgbClr val="0A2240"/>
                 </a:solidFill>
                 <a:latin typeface="Arial"/>
               </a:rPr>
@@ -22098,7 +22137,7 @@
             <a:fld id="{4B0E1F8A-6C1D-4E2A-9F3B-7A5C8D2E1F60}" type="slidenum">
               <a:rPr sz="1600" b="0" i="0">
                 <a:solidFill>
-                  <a:srgbClr val="5B6B82"/>
+                  <a:srgbClr val="0A2240"/>
                 </a:solidFill>
                 <a:latin typeface="Arial"/>
               </a:rPr>
@@ -22178,7 +22217,7 @@
         <p:spPr>
           <a:xfrm>
             <a:off x="457200" y="457200"/>
-            <a:ext cx="11734800" cy="768096"/>
+            <a:ext cx="11277600" cy="768096"/>
           </a:xfrm>
           <a:prstGeom prst="rect">
             <a:avLst/>
@@ -22199,46 +22238,35 @@
                 </a:solidFill>
                 <a:latin typeface="Arial"/>
               </a:rPr>
-              <a:t>Four Things You Do to a Table</a:t>
-            </a:r>
-          </a:p>
-        </p:txBody>
-      </p:sp>
-      <p:sp>
-        <p:nvSpPr>
-          <p:cNvPr id="3" name="TextBox 2"/>
-          <p:cNvSpPr txBox="1"/>
+              <a:t>Sign-In, Built In</a:t>
+            </a:r>
+          </a:p>
+        </p:txBody>
+      </p:sp>
+      <p:pic>
+        <p:nvPicPr>
+          <p:cNvPr id="3" name="Picture 2" descr="auth.png"/>
+          <p:cNvPicPr>
+            <a:picLocks noChangeAspect="1"/>
+          </p:cNvPicPr>
           <p:nvPr/>
-        </p:nvSpPr>
-        <p:spPr>
-          <a:xfrm>
-            <a:off x="457200" y="1908050"/>
-            <a:ext cx="11277600" cy="518159"/>
-          </a:xfrm>
-          <a:prstGeom prst="rect">
-            <a:avLst/>
-          </a:prstGeom>
-          <a:noFill/>
-        </p:spPr>
-        <p:txBody>
-          <a:bodyPr wrap="none" lIns="0" rIns="0">
-            <a:noAutofit/>
-          </a:bodyPr>
-          <a:lstStyle/>
-          <a:p>
-            <a:pPr algn="l"/>
-            <a:r>
-              <a:rPr sz="3400" b="0" i="0">
-                <a:solidFill>
-                  <a:srgbClr val="0A2240"/>
-                </a:solidFill>
-                <a:latin typeface="Arial"/>
-              </a:rPr>
-              <a:t>Add a row</a:t>
-            </a:r>
-          </a:p>
-        </p:txBody>
-      </p:sp>
+        </p:nvPicPr>
+        <p:blipFill>
+          <a:blip r:embed="rId2"/>
+          <a:stretch>
+            <a:fillRect/>
+          </a:stretch>
+        </p:blipFill>
+        <p:spPr>
+          <a:xfrm>
+            <a:off x="6233160" y="1499616"/>
+            <a:ext cx="5501640" cy="4261104"/>
+          </a:xfrm>
+          <a:prstGeom prst="rect">
+            <a:avLst/>
+          </a:prstGeom>
+        </p:spPr>
+      </p:pic>
       <p:sp>
         <p:nvSpPr>
           <p:cNvPr id="4" name="TextBox 3"/>
@@ -22247,8 +22275,8 @@
         </p:nvSpPr>
         <p:spPr>
           <a:xfrm>
-            <a:off x="457200" y="2883409"/>
-            <a:ext cx="11277600" cy="518159"/>
+            <a:off x="457200" y="1499616"/>
+            <a:ext cx="6403836" cy="609600"/>
           </a:xfrm>
           <a:prstGeom prst="rect">
             <a:avLst/>
@@ -22269,7 +22297,7 @@
                 </a:solidFill>
                 <a:latin typeface="Arial"/>
               </a:rPr>
-              <a:t>Find the rows you want</a:t>
+              <a:t>Email and password</a:t>
             </a:r>
           </a:p>
         </p:txBody>
@@ -22282,8 +22310,8 @@
         </p:nvSpPr>
         <p:spPr>
           <a:xfrm>
-            <a:off x="457200" y="3858768"/>
-            <a:ext cx="11277600" cy="518159"/>
+            <a:off x="457200" y="2383536"/>
+            <a:ext cx="7248881" cy="609600"/>
           </a:xfrm>
           <a:prstGeom prst="rect">
             <a:avLst/>
@@ -22304,7 +22332,7 @@
                 </a:solidFill>
                 <a:latin typeface="Arial"/>
               </a:rPr>
-              <a:t>Change a row</a:t>
+              <a:t>Google, GitHub, others</a:t>
             </a:r>
           </a:p>
         </p:txBody>
@@ -22317,8 +22345,8 @@
         </p:nvSpPr>
         <p:spPr>
           <a:xfrm>
-            <a:off x="457200" y="4834127"/>
-            <a:ext cx="11277600" cy="518159"/>
+            <a:off x="457200" y="3267456"/>
+            <a:ext cx="6826528" cy="609600"/>
           </a:xfrm>
           <a:prstGeom prst="rect">
             <a:avLst/>
@@ -22339,7 +22367,7 @@
                 </a:solidFill>
                 <a:latin typeface="Arial"/>
               </a:rPr>
-              <a:t>Delete a row</a:t>
+              <a:t>No login code to write</a:t>
             </a:r>
           </a:p>
         </p:txBody>
@@ -22372,12 +22400,48 @@
             <a:fld id="{4B0E1F8A-6C1D-4E2A-9F3B-7A5C8D2E1F60}" type="slidenum">
               <a:rPr sz="1600" b="0" i="0">
                 <a:solidFill>
-                  <a:srgbClr val="5B6B82"/>
+                  <a:srgbClr val="0A2240"/>
                 </a:solidFill>
                 <a:latin typeface="Arial"/>
               </a:rPr>
               <a:t>8</a:t>
             </a:fld>
+          </a:p>
+        </p:txBody>
+      </p:sp>
+      <p:sp>
+        <p:nvSpPr>
+          <p:cNvPr id="8" name="TextBox 7"/>
+          <p:cNvSpPr txBox="1"/>
+          <p:nvPr/>
+        </p:nvSpPr>
+        <p:spPr>
+          <a:xfrm>
+            <a:off x="10085130" y="6035040"/>
+            <a:ext cx="1213008" cy="365760"/>
+          </a:xfrm>
+          <a:prstGeom prst="rect">
+            <a:avLst/>
+          </a:prstGeom>
+          <a:noFill/>
+        </p:spPr>
+        <p:txBody>
+          <a:bodyPr wrap="none" lIns="0" rIns="0">
+            <a:noAutofit/>
+          </a:bodyPr>
+          <a:lstStyle/>
+          <a:p>
+            <a:pPr algn="l"/>
+            <a:r>
+              <a:rPr sz="1600" b="0" i="0" u="sng">
+                <a:solidFill>
+                  <a:srgbClr val="0072CE"/>
+                </a:solidFill>
+                <a:latin typeface="Arial"/>
+                <a:hlinkClick r:id="rId3"/>
+              </a:rPr>
+              <a:t>Source</a:t>
+            </a:r>
           </a:p>
         </p:txBody>
       </p:sp>
@@ -22409,63 +22473,83 @@
       <p:grpSpPr/>
       <p:sp>
         <p:nvSpPr>
-          <p:cNvPr id="2" name="TextBox 1"/>
+          <p:cNvPr id="2" name="Rectangle 1"/>
+          <p:cNvSpPr/>
+          <p:nvPr/>
+        </p:nvSpPr>
+        <p:spPr>
+          <a:xfrm>
+            <a:off x="457200" y="2484120"/>
+            <a:ext cx="128016" cy="1889760"/>
+          </a:xfrm>
+          <a:prstGeom prst="rect">
+            <a:avLst/>
+          </a:prstGeom>
+          <a:solidFill>
+            <a:srgbClr val="0072CE"/>
+          </a:solidFill>
+          <a:ln>
+            <a:noFill/>
+          </a:ln>
+          <a:effectLst/>
+        </p:spPr>
+        <p:style>
+          <a:lnRef idx="1">
+            <a:schemeClr val="accent1"/>
+          </a:lnRef>
+          <a:fillRef idx="3">
+            <a:schemeClr val="accent1"/>
+          </a:fillRef>
+          <a:effectRef idx="2">
+            <a:schemeClr val="accent1"/>
+          </a:effectRef>
+          <a:fontRef idx="minor">
+            <a:schemeClr val="lt1"/>
+          </a:fontRef>
+        </p:style>
+        <p:txBody>
+          <a:bodyPr rtlCol="0" anchor="ctr"/>
+          <a:lstStyle/>
+          <a:p>
+            <a:pPr algn="ctr"/>
+          </a:p>
+        </p:txBody>
+      </p:sp>
+      <p:sp>
+        <p:nvSpPr>
+          <p:cNvPr id="3" name="TextBox 2"/>
           <p:cNvSpPr txBox="1"/>
           <p:nvPr/>
         </p:nvSpPr>
         <p:spPr>
           <a:xfrm>
-            <a:off x="457200" y="457200"/>
-            <a:ext cx="11277600" cy="768096"/>
-          </a:xfrm>
-          <a:prstGeom prst="rect">
-            <a:avLst/>
-          </a:prstGeom>
-          <a:noFill/>
-        </p:spPr>
-        <p:txBody>
-          <a:bodyPr wrap="none" lIns="0" rIns="0">
-            <a:noAutofit/>
-          </a:bodyPr>
-          <a:lstStyle/>
-          <a:p>
-            <a:pPr algn="l"/>
-            <a:r>
-              <a:rPr sz="4200" b="1" i="0">
+            <a:off x="996696" y="2484120"/>
+            <a:ext cx="10738104" cy="1005840"/>
+          </a:xfrm>
+          <a:prstGeom prst="rect">
+            <a:avLst/>
+          </a:prstGeom>
+          <a:noFill/>
+        </p:spPr>
+        <p:txBody>
+          <a:bodyPr wrap="none" lIns="0" rIns="0">
+            <a:noAutofit/>
+          </a:bodyPr>
+          <a:lstStyle/>
+          <a:p>
+            <a:pPr algn="l"/>
+            <a:r>
+              <a:rPr sz="6000" b="1" i="0">
                 <a:solidFill>
                   <a:srgbClr val="0072CE"/>
                 </a:solidFill>
                 <a:latin typeface="Arial"/>
               </a:rPr>
-              <a:t>Sign-In, Built In</a:t>
-            </a:r>
-          </a:p>
-        </p:txBody>
-      </p:sp>
-      <p:pic>
-        <p:nvPicPr>
-          <p:cNvPr id="3" name="Picture 2" descr="auth.png"/>
-          <p:cNvPicPr>
-            <a:picLocks noChangeAspect="1"/>
-          </p:cNvPicPr>
-          <p:nvPr/>
-        </p:nvPicPr>
-        <p:blipFill>
-          <a:blip r:embed="rId2"/>
-          <a:stretch>
-            <a:fillRect/>
-          </a:stretch>
-        </p:blipFill>
-        <p:spPr>
-          <a:xfrm>
-            <a:off x="6233160" y="1499616"/>
-            <a:ext cx="5501640" cy="4261104"/>
-          </a:xfrm>
-          <a:prstGeom prst="rect">
-            <a:avLst/>
-          </a:prstGeom>
-        </p:spPr>
-      </p:pic>
+              <a:t>SQL</a:t>
+            </a:r>
+          </a:p>
+        </p:txBody>
+      </p:sp>
       <p:sp>
         <p:nvSpPr>
           <p:cNvPr id="4" name="TextBox 3"/>
@@ -22474,8 +22558,8 @@
         </p:nvSpPr>
         <p:spPr>
           <a:xfrm>
-            <a:off x="457200" y="1499616"/>
-            <a:ext cx="6403836" cy="609600"/>
+            <a:off x="996696" y="3764280"/>
+            <a:ext cx="11195304" cy="609600"/>
           </a:xfrm>
           <a:prstGeom prst="rect">
             <a:avLst/>
@@ -22496,7 +22580,7 @@
                 </a:solidFill>
                 <a:latin typeface="Arial"/>
               </a:rPr>
-              <a:t>Email and password</a:t>
+              <a:t>The language for building and asking a database</a:t>
             </a:r>
           </a:p>
         </p:txBody>
@@ -22504,76 +22588,6 @@
       <p:sp>
         <p:nvSpPr>
           <p:cNvPr id="5" name="TextBox 4"/>
-          <p:cNvSpPr txBox="1"/>
-          <p:nvPr/>
-        </p:nvSpPr>
-        <p:spPr>
-          <a:xfrm>
-            <a:off x="457200" y="2383536"/>
-            <a:ext cx="7248881" cy="609600"/>
-          </a:xfrm>
-          <a:prstGeom prst="rect">
-            <a:avLst/>
-          </a:prstGeom>
-          <a:noFill/>
-        </p:spPr>
-        <p:txBody>
-          <a:bodyPr wrap="none" lIns="0" rIns="0">
-            <a:noAutofit/>
-          </a:bodyPr>
-          <a:lstStyle/>
-          <a:p>
-            <a:pPr algn="l"/>
-            <a:r>
-              <a:rPr sz="3400" b="0" i="0">
-                <a:solidFill>
-                  <a:srgbClr val="0A2240"/>
-                </a:solidFill>
-                <a:latin typeface="Arial"/>
-              </a:rPr>
-              <a:t>Google, GitHub, others</a:t>
-            </a:r>
-          </a:p>
-        </p:txBody>
-      </p:sp>
-      <p:sp>
-        <p:nvSpPr>
-          <p:cNvPr id="6" name="TextBox 5"/>
-          <p:cNvSpPr txBox="1"/>
-          <p:nvPr/>
-        </p:nvSpPr>
-        <p:spPr>
-          <a:xfrm>
-            <a:off x="457200" y="3267456"/>
-            <a:ext cx="6826528" cy="609600"/>
-          </a:xfrm>
-          <a:prstGeom prst="rect">
-            <a:avLst/>
-          </a:prstGeom>
-          <a:noFill/>
-        </p:spPr>
-        <p:txBody>
-          <a:bodyPr wrap="none" lIns="0" rIns="0">
-            <a:noAutofit/>
-          </a:bodyPr>
-          <a:lstStyle/>
-          <a:p>
-            <a:pPr algn="l"/>
-            <a:r>
-              <a:rPr sz="3400" b="0" i="0">
-                <a:solidFill>
-                  <a:srgbClr val="0A2240"/>
-                </a:solidFill>
-                <a:latin typeface="Arial"/>
-              </a:rPr>
-              <a:t>No login code to write</a:t>
-            </a:r>
-          </a:p>
-        </p:txBody>
-      </p:sp>
-      <p:sp>
-        <p:nvSpPr>
-          <p:cNvPr id="7" name="TextBox 6"/>
           <p:cNvSpPr/>
           <p:nvPr>
             <p:ph type="sldNum" idx="12"/>
@@ -22599,48 +22613,12 @@
             <a:fld id="{4B0E1F8A-6C1D-4E2A-9F3B-7A5C8D2E1F60}" type="slidenum">
               <a:rPr sz="1600" b="0" i="0">
                 <a:solidFill>
-                  <a:srgbClr val="5B6B82"/>
+                  <a:srgbClr val="0A2240"/>
                 </a:solidFill>
                 <a:latin typeface="Arial"/>
               </a:rPr>
               <a:t>9</a:t>
             </a:fld>
-          </a:p>
-        </p:txBody>
-      </p:sp>
-      <p:sp>
-        <p:nvSpPr>
-          <p:cNvPr id="8" name="TextBox 7"/>
-          <p:cNvSpPr txBox="1"/>
-          <p:nvPr/>
-        </p:nvSpPr>
-        <p:spPr>
-          <a:xfrm>
-            <a:off x="10085130" y="6035040"/>
-            <a:ext cx="1213008" cy="365760"/>
-          </a:xfrm>
-          <a:prstGeom prst="rect">
-            <a:avLst/>
-          </a:prstGeom>
-          <a:noFill/>
-        </p:spPr>
-        <p:txBody>
-          <a:bodyPr wrap="none" lIns="0" rIns="0">
-            <a:noAutofit/>
-          </a:bodyPr>
-          <a:lstStyle/>
-          <a:p>
-            <a:pPr algn="l"/>
-            <a:r>
-              <a:rPr sz="1600" b="0" i="0" u="sng">
-                <a:solidFill>
-                  <a:srgbClr val="0072CE"/>
-                </a:solidFill>
-                <a:latin typeface="Arial"/>
-                <a:hlinkClick r:id="rId3"/>
-              </a:rPr>
-              <a:t>Source</a:t>
-            </a:r>
           </a:p>
         </p:txBody>
       </p:sp>
